--- a/b11402037-b11402053-demo.pptx
+++ b/b11402037-b11402053-demo.pptx
@@ -3803,7 +3803,7 @@
                 <a:latin typeface="Consolas"/>
                 <a:ea typeface="Microsoft JhengHei"/>
               </a:rPr>
-              <a:t>1. 載入 CSV   3. 正規化   5. 匯出</a:t>
+              <a:t>1. 載入   2. 正規化   3. 匯出</a:t>
             </a:r>
           </a:p>
           <a:p>
@@ -9134,7 +9134,7 @@
                 <a:latin typeface="Consolas"/>
                 <a:ea typeface="Microsoft JhengHei"/>
               </a:rPr>
-              <a:t>1 載入 CSV   2 顯示原始   3 執行正規化</a:t>
+              <a:t>1 載入＋顯示原始   2 正規化＋顯示結果</a:t>
             </a:r>
           </a:p>
           <a:p>
@@ -9151,7 +9151,7 @@
                 <a:latin typeface="Consolas"/>
                 <a:ea typeface="Microsoft JhengHei"/>
               </a:rPr>
-              <a:t>4 預覽結果   5 匯出 CSV   0 離開</a:t>
+              <a:t>3 匯出 CSV＋自動離開   0 離開</a:t>
             </a:r>
           </a:p>
           <a:p>
@@ -9168,7 +9168,7 @@
                 <a:latin typeface="Microsoft JhengHei"/>
                 <a:ea typeface="Microsoft JhengHei"/>
               </a:rPr>
-              <a:t>狀態防呆：未載入 / 未正規化時擋下後續操作</a:t>
+              <a:t>同步複合動作設計；狀態防呆擋下未就緒操作</a:t>
             </a:r>
           </a:p>
         </p:txBody>

--- a/b11402037-b11402053-demo.pptx
+++ b/b11402037-b11402053-demo.pptx
@@ -14,6 +14,7 @@
     <p:sldId id="262" r:id="rId13"/>
     <p:sldId id="263" r:id="rId14"/>
     <p:sldId id="264" r:id="rId15"/>
+    <p:sldId id="265" r:id="rId16"/>
   </p:sldIdLst>
   <p:sldSz cx="12191695" cy="6858000" type="screen4x3"/>
   <p:notesSz cx="6858000" cy="9144000"/>
@@ -3903,6 +3904,1002 @@
 </p:sld>
 </file>
 
+<file path=ppt/slides/slide10.xml><?xml version="1.0" encoding="utf-8"?>
+<p:sld xmlns:a="http://schemas.openxmlformats.org/drawingml/2006/main" xmlns:p="http://schemas.openxmlformats.org/presentationml/2006/main" xmlns:r="http://schemas.openxmlformats.org/officeDocument/2006/relationships">
+  <p:cSld>
+    <p:spTree>
+      <p:nvGrpSpPr>
+        <p:cNvPr id="1" name=""/>
+        <p:cNvGrpSpPr/>
+        <p:nvPr/>
+      </p:nvGrpSpPr>
+      <p:grpSpPr/>
+      <p:sp>
+        <p:nvSpPr>
+          <p:cNvPr id="2" name="Rectangle 1"/>
+          <p:cNvSpPr/>
+          <p:nvPr/>
+        </p:nvSpPr>
+        <p:spPr>
+          <a:xfrm>
+            <a:off x="0" y="0"/>
+            <a:ext cx="12191695" cy="6858000"/>
+          </a:xfrm>
+          <a:prstGeom prst="rect">
+            <a:avLst/>
+          </a:prstGeom>
+          <a:solidFill>
+            <a:srgbClr val="1B2A41"/>
+          </a:solidFill>
+          <a:ln>
+            <a:noFill/>
+          </a:ln>
+          <a:effectLst/>
+        </p:spPr>
+        <p:style>
+          <a:lnRef idx="1">
+            <a:schemeClr val="accent1"/>
+          </a:lnRef>
+          <a:fillRef idx="3">
+            <a:schemeClr val="accent1"/>
+          </a:fillRef>
+          <a:effectRef idx="2">
+            <a:schemeClr val="accent1"/>
+          </a:effectRef>
+          <a:fontRef idx="minor">
+            <a:schemeClr val="lt1"/>
+          </a:fontRef>
+        </p:style>
+        <p:txBody>
+          <a:bodyPr rtlCol="0" anchor="ctr"/>
+          <a:lstStyle/>
+          <a:p>
+            <a:pPr algn="ctr"/>
+          </a:p>
+        </p:txBody>
+      </p:sp>
+      <p:sp>
+        <p:nvSpPr>
+          <p:cNvPr id="3" name="TextBox 2"/>
+          <p:cNvSpPr txBox="1"/>
+          <p:nvPr/>
+        </p:nvSpPr>
+        <p:spPr>
+          <a:xfrm>
+            <a:off x="822960" y="457200"/>
+            <a:ext cx="10515600" cy="274320"/>
+          </a:xfrm>
+          <a:prstGeom prst="rect">
+            <a:avLst/>
+          </a:prstGeom>
+          <a:noFill/>
+        </p:spPr>
+        <p:txBody>
+          <a:bodyPr wrap="square" anchor="t" lIns="0" rIns="0" tIns="0" bIns="0">
+            <a:spAutoFit/>
+          </a:bodyPr>
+          <a:lstStyle/>
+          <a:p>
+            <a:pPr algn="l"/>
+            <a:r>
+              <a:rPr sz="1200" b="1" i="0" spc="160">
+                <a:solidFill>
+                  <a:srgbClr val="3FD0B6"/>
+                </a:solidFill>
+                <a:latin typeface="Consolas"/>
+                <a:ea typeface="Microsoft JhengHei"/>
+              </a:rPr>
+              <a:t>REFERENCES</a:t>
+            </a:r>
+          </a:p>
+        </p:txBody>
+      </p:sp>
+      <p:sp>
+        <p:nvSpPr>
+          <p:cNvPr id="4" name="TextBox 3"/>
+          <p:cNvSpPr txBox="1"/>
+          <p:nvPr/>
+        </p:nvSpPr>
+        <p:spPr>
+          <a:xfrm>
+            <a:off x="822960" y="731520"/>
+            <a:ext cx="10515600" cy="548640"/>
+          </a:xfrm>
+          <a:prstGeom prst="rect">
+            <a:avLst/>
+          </a:prstGeom>
+          <a:noFill/>
+        </p:spPr>
+        <p:txBody>
+          <a:bodyPr wrap="square" anchor="t" lIns="0" rIns="0" tIns="0" bIns="0">
+            <a:spAutoFit/>
+          </a:bodyPr>
+          <a:lstStyle/>
+          <a:p>
+            <a:pPr algn="l"/>
+            <a:r>
+              <a:rPr sz="2700" b="1" i="0">
+                <a:solidFill>
+                  <a:srgbClr val="FFFFFF"/>
+                </a:solidFill>
+                <a:latin typeface="Microsoft JhengHei"/>
+                <a:ea typeface="Microsoft JhengHei"/>
+              </a:rPr>
+              <a:t>參考文獻</a:t>
+            </a:r>
+          </a:p>
+        </p:txBody>
+      </p:sp>
+      <p:sp>
+        <p:nvSpPr>
+          <p:cNvPr id="5" name="Rectangle 4"/>
+          <p:cNvSpPr/>
+          <p:nvPr/>
+        </p:nvSpPr>
+        <p:spPr>
+          <a:xfrm>
+            <a:off x="822960" y="1673352"/>
+            <a:ext cx="118872" cy="118872"/>
+          </a:xfrm>
+          <a:prstGeom prst="rect">
+            <a:avLst/>
+          </a:prstGeom>
+          <a:solidFill>
+            <a:srgbClr val="3FD0B6"/>
+          </a:solidFill>
+          <a:ln>
+            <a:noFill/>
+          </a:ln>
+          <a:effectLst/>
+        </p:spPr>
+        <p:style>
+          <a:lnRef idx="1">
+            <a:schemeClr val="accent1"/>
+          </a:lnRef>
+          <a:fillRef idx="3">
+            <a:schemeClr val="accent1"/>
+          </a:fillRef>
+          <a:effectRef idx="2">
+            <a:schemeClr val="accent1"/>
+          </a:effectRef>
+          <a:fontRef idx="minor">
+            <a:schemeClr val="lt1"/>
+          </a:fontRef>
+        </p:style>
+        <p:txBody>
+          <a:bodyPr rtlCol="0" anchor="ctr"/>
+          <a:lstStyle/>
+          <a:p>
+            <a:pPr algn="ctr"/>
+          </a:p>
+        </p:txBody>
+      </p:sp>
+      <p:sp>
+        <p:nvSpPr>
+          <p:cNvPr id="6" name="TextBox 5"/>
+          <p:cNvSpPr txBox="1"/>
+          <p:nvPr/>
+        </p:nvSpPr>
+        <p:spPr>
+          <a:xfrm>
+            <a:off x="1060704" y="1591056"/>
+            <a:ext cx="4846320" cy="292608"/>
+          </a:xfrm>
+          <a:prstGeom prst="rect">
+            <a:avLst/>
+          </a:prstGeom>
+          <a:noFill/>
+        </p:spPr>
+        <p:txBody>
+          <a:bodyPr wrap="square" anchor="t" lIns="0" rIns="0" tIns="0" bIns="0">
+            <a:spAutoFit/>
+          </a:bodyPr>
+          <a:lstStyle/>
+          <a:p>
+            <a:pPr algn="l"/>
+            <a:r>
+              <a:rPr sz="1450" b="1" i="0">
+                <a:solidFill>
+                  <a:srgbClr val="FFFFFF"/>
+                </a:solidFill>
+                <a:latin typeface="Microsoft JhengHei"/>
+                <a:ea typeface="Microsoft JhengHei"/>
+              </a:rPr>
+              <a:t>排名資料來源</a:t>
+            </a:r>
+          </a:p>
+        </p:txBody>
+      </p:sp>
+      <p:sp>
+        <p:nvSpPr>
+          <p:cNvPr id="7" name="TextBox 6"/>
+          <p:cNvSpPr txBox="1"/>
+          <p:nvPr/>
+        </p:nvSpPr>
+        <p:spPr>
+          <a:xfrm>
+            <a:off x="1060704" y="2011680"/>
+            <a:ext cx="5029200" cy="1554480"/>
+          </a:xfrm>
+          <a:prstGeom prst="rect">
+            <a:avLst/>
+          </a:prstGeom>
+          <a:noFill/>
+        </p:spPr>
+        <p:txBody>
+          <a:bodyPr wrap="square" anchor="t" lIns="0" rIns="0" tIns="0" bIns="0">
+            <a:spAutoFit/>
+          </a:bodyPr>
+          <a:lstStyle/>
+          <a:p>
+            <a:pPr algn="l" marL="164592" indent="-164592">
+              <a:lnSpc>
+                <a:spcPct val="115000"/>
+              </a:lnSpc>
+              <a:spcAft>
+                <a:spcPts val="700"/>
+              </a:spcAft>
+              <a:buClr>
+                <a:srgbClr val="3FD0B6"/>
+              </a:buClr>
+              <a:buFont typeface="Arial"/>
+              <a:buChar char="▪"/>
+            </a:pPr>
+            <a:r>
+              <a:rPr sz="1100" b="0" i="0">
+                <a:solidFill>
+                  <a:srgbClr val="CADCFC"/>
+                </a:solidFill>
+                <a:latin typeface="Microsoft JhengHei"/>
+                <a:ea typeface="Microsoft JhengHei"/>
+              </a:rPr>
+              <a:t>QS World University Rankings — topuniversities.com</a:t>
+            </a:r>
+          </a:p>
+          <a:p>
+            <a:pPr algn="l" marL="164592" indent="-164592">
+              <a:lnSpc>
+                <a:spcPct val="115000"/>
+              </a:lnSpc>
+              <a:spcAft>
+                <a:spcPts val="700"/>
+              </a:spcAft>
+              <a:buClr>
+                <a:srgbClr val="3FD0B6"/>
+              </a:buClr>
+              <a:buFont typeface="Arial"/>
+              <a:buChar char="▪"/>
+            </a:pPr>
+            <a:r>
+              <a:rPr sz="1100" b="0" i="0">
+                <a:solidFill>
+                  <a:srgbClr val="CADCFC"/>
+                </a:solidFill>
+                <a:latin typeface="Microsoft JhengHei"/>
+                <a:ea typeface="Microsoft JhengHei"/>
+              </a:rPr>
+              <a:t>Times Higher Education (THE) World University Rankings</a:t>
+            </a:r>
+          </a:p>
+          <a:p>
+            <a:pPr algn="l" marL="164592" indent="-164592">
+              <a:lnSpc>
+                <a:spcPct val="115000"/>
+              </a:lnSpc>
+              <a:spcAft>
+                <a:spcPts val="700"/>
+              </a:spcAft>
+              <a:buClr>
+                <a:srgbClr val="3FD0B6"/>
+              </a:buClr>
+              <a:buFont typeface="Arial"/>
+              <a:buChar char="▪"/>
+            </a:pPr>
+            <a:r>
+              <a:rPr sz="1100" b="0" i="0">
+                <a:solidFill>
+                  <a:srgbClr val="CADCFC"/>
+                </a:solidFill>
+                <a:latin typeface="Microsoft JhengHei"/>
+                <a:ea typeface="Microsoft JhengHei"/>
+              </a:rPr>
+              <a:t>ShanghaiRanking / Academic Ranking of World Universities (ARWU)</a:t>
+            </a:r>
+          </a:p>
+        </p:txBody>
+      </p:sp>
+      <p:sp>
+        <p:nvSpPr>
+          <p:cNvPr id="8" name="Rectangle 7"/>
+          <p:cNvSpPr/>
+          <p:nvPr/>
+        </p:nvSpPr>
+        <p:spPr>
+          <a:xfrm>
+            <a:off x="6400800" y="1673352"/>
+            <a:ext cx="118872" cy="118872"/>
+          </a:xfrm>
+          <a:prstGeom prst="rect">
+            <a:avLst/>
+          </a:prstGeom>
+          <a:solidFill>
+            <a:srgbClr val="3FD0B6"/>
+          </a:solidFill>
+          <a:ln>
+            <a:noFill/>
+          </a:ln>
+          <a:effectLst/>
+        </p:spPr>
+        <p:style>
+          <a:lnRef idx="1">
+            <a:schemeClr val="accent1"/>
+          </a:lnRef>
+          <a:fillRef idx="3">
+            <a:schemeClr val="accent1"/>
+          </a:fillRef>
+          <a:effectRef idx="2">
+            <a:schemeClr val="accent1"/>
+          </a:effectRef>
+          <a:fontRef idx="minor">
+            <a:schemeClr val="lt1"/>
+          </a:fontRef>
+        </p:style>
+        <p:txBody>
+          <a:bodyPr rtlCol="0" anchor="ctr"/>
+          <a:lstStyle/>
+          <a:p>
+            <a:pPr algn="ctr"/>
+          </a:p>
+        </p:txBody>
+      </p:sp>
+      <p:sp>
+        <p:nvSpPr>
+          <p:cNvPr id="9" name="TextBox 8"/>
+          <p:cNvSpPr txBox="1"/>
+          <p:nvPr/>
+        </p:nvSpPr>
+        <p:spPr>
+          <a:xfrm>
+            <a:off x="6638544" y="1591056"/>
+            <a:ext cx="4846320" cy="292608"/>
+          </a:xfrm>
+          <a:prstGeom prst="rect">
+            <a:avLst/>
+          </a:prstGeom>
+          <a:noFill/>
+        </p:spPr>
+        <p:txBody>
+          <a:bodyPr wrap="square" anchor="t" lIns="0" rIns="0" tIns="0" bIns="0">
+            <a:spAutoFit/>
+          </a:bodyPr>
+          <a:lstStyle/>
+          <a:p>
+            <a:pPr algn="l"/>
+            <a:r>
+              <a:rPr sz="1450" b="1" i="0">
+                <a:solidFill>
+                  <a:srgbClr val="FFFFFF"/>
+                </a:solidFill>
+                <a:latin typeface="Microsoft JhengHei"/>
+                <a:ea typeface="Microsoft JhengHei"/>
+              </a:rPr>
+              <a:t>技術標準</a:t>
+            </a:r>
+          </a:p>
+        </p:txBody>
+      </p:sp>
+      <p:sp>
+        <p:nvSpPr>
+          <p:cNvPr id="10" name="TextBox 9"/>
+          <p:cNvSpPr txBox="1"/>
+          <p:nvPr/>
+        </p:nvSpPr>
+        <p:spPr>
+          <a:xfrm>
+            <a:off x="6638544" y="2011680"/>
+            <a:ext cx="5029200" cy="1554480"/>
+          </a:xfrm>
+          <a:prstGeom prst="rect">
+            <a:avLst/>
+          </a:prstGeom>
+          <a:noFill/>
+        </p:spPr>
+        <p:txBody>
+          <a:bodyPr wrap="square" anchor="t" lIns="0" rIns="0" tIns="0" bIns="0">
+            <a:spAutoFit/>
+          </a:bodyPr>
+          <a:lstStyle/>
+          <a:p>
+            <a:pPr algn="l" marL="164592" indent="-164592">
+              <a:lnSpc>
+                <a:spcPct val="115000"/>
+              </a:lnSpc>
+              <a:spcAft>
+                <a:spcPts val="700"/>
+              </a:spcAft>
+              <a:buClr>
+                <a:srgbClr val="3FD0B6"/>
+              </a:buClr>
+              <a:buFont typeface="Arial"/>
+              <a:buChar char="▪"/>
+            </a:pPr>
+            <a:r>
+              <a:rPr sz="1100" b="0" i="0">
+                <a:solidFill>
+                  <a:srgbClr val="CADCFC"/>
+                </a:solidFill>
+                <a:latin typeface="Microsoft JhengHei"/>
+                <a:ea typeface="Microsoft JhengHei"/>
+              </a:rPr>
+              <a:t>ISO 3166-1 — 國家代碼標準（國家別名映射依據）</a:t>
+            </a:r>
+          </a:p>
+          <a:p>
+            <a:pPr algn="l" marL="164592" indent="-164592">
+              <a:lnSpc>
+                <a:spcPct val="115000"/>
+              </a:lnSpc>
+              <a:spcAft>
+                <a:spcPts val="700"/>
+              </a:spcAft>
+              <a:buClr>
+                <a:srgbClr val="3FD0B6"/>
+              </a:buClr>
+              <a:buFont typeface="Arial"/>
+              <a:buChar char="▪"/>
+            </a:pPr>
+            <a:r>
+              <a:rPr sz="1100" b="0" i="0">
+                <a:solidFill>
+                  <a:srgbClr val="CADCFC"/>
+                </a:solidFill>
+                <a:latin typeface="Microsoft JhengHei"/>
+                <a:ea typeface="Microsoft JhengHei"/>
+              </a:rPr>
+              <a:t>RFC 4180 — CSV 格式標準（quoting / escaping 規範）</a:t>
+            </a:r>
+          </a:p>
+          <a:p>
+            <a:pPr algn="l" marL="164592" indent="-164592">
+              <a:lnSpc>
+                <a:spcPct val="115000"/>
+              </a:lnSpc>
+              <a:spcAft>
+                <a:spcPts val="700"/>
+              </a:spcAft>
+              <a:buClr>
+                <a:srgbClr val="3FD0B6"/>
+              </a:buClr>
+              <a:buFont typeface="Arial"/>
+              <a:buChar char="▪"/>
+            </a:pPr>
+            <a:r>
+              <a:rPr sz="1100" b="0" i="0">
+                <a:solidFill>
+                  <a:srgbClr val="CADCFC"/>
+                </a:solidFill>
+                <a:latin typeface="Microsoft JhengHei"/>
+                <a:ea typeface="Microsoft JhengHei"/>
+              </a:rPr>
+              <a:t>Unicode UAX #15 — Unicode Normalization Forms（NFC / NFD）</a:t>
+            </a:r>
+          </a:p>
+        </p:txBody>
+      </p:sp>
+      <p:sp>
+        <p:nvSpPr>
+          <p:cNvPr id="11" name="Rectangle 10"/>
+          <p:cNvSpPr/>
+          <p:nvPr/>
+        </p:nvSpPr>
+        <p:spPr>
+          <a:xfrm>
+            <a:off x="822960" y="3867911"/>
+            <a:ext cx="118872" cy="118872"/>
+          </a:xfrm>
+          <a:prstGeom prst="rect">
+            <a:avLst/>
+          </a:prstGeom>
+          <a:solidFill>
+            <a:srgbClr val="3FD0B6"/>
+          </a:solidFill>
+          <a:ln>
+            <a:noFill/>
+          </a:ln>
+          <a:effectLst/>
+        </p:spPr>
+        <p:style>
+          <a:lnRef idx="1">
+            <a:schemeClr val="accent1"/>
+          </a:lnRef>
+          <a:fillRef idx="3">
+            <a:schemeClr val="accent1"/>
+          </a:fillRef>
+          <a:effectRef idx="2">
+            <a:schemeClr val="accent1"/>
+          </a:effectRef>
+          <a:fontRef idx="minor">
+            <a:schemeClr val="lt1"/>
+          </a:fontRef>
+        </p:style>
+        <p:txBody>
+          <a:bodyPr rtlCol="0" anchor="ctr"/>
+          <a:lstStyle/>
+          <a:p>
+            <a:pPr algn="ctr"/>
+          </a:p>
+        </p:txBody>
+      </p:sp>
+      <p:sp>
+        <p:nvSpPr>
+          <p:cNvPr id="12" name="TextBox 11"/>
+          <p:cNvSpPr txBox="1"/>
+          <p:nvPr/>
+        </p:nvSpPr>
+        <p:spPr>
+          <a:xfrm>
+            <a:off x="1060704" y="3785615"/>
+            <a:ext cx="4846320" cy="292608"/>
+          </a:xfrm>
+          <a:prstGeom prst="rect">
+            <a:avLst/>
+          </a:prstGeom>
+          <a:noFill/>
+        </p:spPr>
+        <p:txBody>
+          <a:bodyPr wrap="square" anchor="t" lIns="0" rIns="0" tIns="0" bIns="0">
+            <a:spAutoFit/>
+          </a:bodyPr>
+          <a:lstStyle/>
+          <a:p>
+            <a:pPr algn="l"/>
+            <a:r>
+              <a:rPr sz="1450" b="1" i="0">
+                <a:solidFill>
+                  <a:srgbClr val="FFFFFF"/>
+                </a:solidFill>
+                <a:latin typeface="Microsoft JhengHei"/>
+                <a:ea typeface="Microsoft JhengHei"/>
+              </a:rPr>
+              <a:t>語言與工具</a:t>
+            </a:r>
+          </a:p>
+        </p:txBody>
+      </p:sp>
+      <p:sp>
+        <p:nvSpPr>
+          <p:cNvPr id="13" name="TextBox 12"/>
+          <p:cNvSpPr txBox="1"/>
+          <p:nvPr/>
+        </p:nvSpPr>
+        <p:spPr>
+          <a:xfrm>
+            <a:off x="1060704" y="4206240"/>
+            <a:ext cx="5029200" cy="1554480"/>
+          </a:xfrm>
+          <a:prstGeom prst="rect">
+            <a:avLst/>
+          </a:prstGeom>
+          <a:noFill/>
+        </p:spPr>
+        <p:txBody>
+          <a:bodyPr wrap="square" anchor="t" lIns="0" rIns="0" tIns="0" bIns="0">
+            <a:spAutoFit/>
+          </a:bodyPr>
+          <a:lstStyle/>
+          <a:p>
+            <a:pPr algn="l" marL="164592" indent="-164592">
+              <a:lnSpc>
+                <a:spcPct val="115000"/>
+              </a:lnSpc>
+              <a:spcAft>
+                <a:spcPts val="700"/>
+              </a:spcAft>
+              <a:buClr>
+                <a:srgbClr val="3FD0B6"/>
+              </a:buClr>
+              <a:buFont typeface="Arial"/>
+              <a:buChar char="▪"/>
+            </a:pPr>
+            <a:r>
+              <a:rPr sz="1100" b="0" i="0">
+                <a:solidFill>
+                  <a:srgbClr val="CADCFC"/>
+                </a:solidFill>
+                <a:latin typeface="Microsoft JhengHei"/>
+                <a:ea typeface="Microsoft JhengHei"/>
+              </a:rPr>
+              <a:t>ISO/IEC 9899:2011 — C11 Language Standard</a:t>
+            </a:r>
+          </a:p>
+          <a:p>
+            <a:pPr algn="l" marL="164592" indent="-164592">
+              <a:lnSpc>
+                <a:spcPct val="115000"/>
+              </a:lnSpc>
+              <a:spcAft>
+                <a:spcPts val="700"/>
+              </a:spcAft>
+              <a:buClr>
+                <a:srgbClr val="3FD0B6"/>
+              </a:buClr>
+              <a:buFont typeface="Arial"/>
+              <a:buChar char="▪"/>
+            </a:pPr>
+            <a:r>
+              <a:rPr sz="1100" b="0" i="0">
+                <a:solidFill>
+                  <a:srgbClr val="CADCFC"/>
+                </a:solidFill>
+                <a:latin typeface="Microsoft JhengHei"/>
+                <a:ea typeface="Microsoft JhengHei"/>
+              </a:rPr>
+              <a:t>GCC Compiler Documentation（-Wall -Wextra）</a:t>
+            </a:r>
+          </a:p>
+          <a:p>
+            <a:pPr algn="l" marL="164592" indent="-164592">
+              <a:lnSpc>
+                <a:spcPct val="115000"/>
+              </a:lnSpc>
+              <a:spcAft>
+                <a:spcPts val="700"/>
+              </a:spcAft>
+              <a:buClr>
+                <a:srgbClr val="3FD0B6"/>
+              </a:buClr>
+              <a:buFont typeface="Arial"/>
+              <a:buChar char="▪"/>
+            </a:pPr>
+            <a:r>
+              <a:rPr sz="1100" b="0" i="0">
+                <a:solidFill>
+                  <a:srgbClr val="CADCFC"/>
+                </a:solidFill>
+                <a:latin typeface="Microsoft JhengHei"/>
+                <a:ea typeface="Microsoft JhengHei"/>
+              </a:rPr>
+              <a:t>GNU Make Manual</a:t>
+            </a:r>
+          </a:p>
+        </p:txBody>
+      </p:sp>
+      <p:sp>
+        <p:nvSpPr>
+          <p:cNvPr id="14" name="Rectangle 13"/>
+          <p:cNvSpPr/>
+          <p:nvPr/>
+        </p:nvSpPr>
+        <p:spPr>
+          <a:xfrm>
+            <a:off x="6400800" y="3867911"/>
+            <a:ext cx="118872" cy="118872"/>
+          </a:xfrm>
+          <a:prstGeom prst="rect">
+            <a:avLst/>
+          </a:prstGeom>
+          <a:solidFill>
+            <a:srgbClr val="3FD0B6"/>
+          </a:solidFill>
+          <a:ln>
+            <a:noFill/>
+          </a:ln>
+          <a:effectLst/>
+        </p:spPr>
+        <p:style>
+          <a:lnRef idx="1">
+            <a:schemeClr val="accent1"/>
+          </a:lnRef>
+          <a:fillRef idx="3">
+            <a:schemeClr val="accent1"/>
+          </a:fillRef>
+          <a:effectRef idx="2">
+            <a:schemeClr val="accent1"/>
+          </a:effectRef>
+          <a:fontRef idx="minor">
+            <a:schemeClr val="lt1"/>
+          </a:fontRef>
+        </p:style>
+        <p:txBody>
+          <a:bodyPr rtlCol="0" anchor="ctr"/>
+          <a:lstStyle/>
+          <a:p>
+            <a:pPr algn="ctr"/>
+          </a:p>
+        </p:txBody>
+      </p:sp>
+      <p:sp>
+        <p:nvSpPr>
+          <p:cNvPr id="15" name="TextBox 14"/>
+          <p:cNvSpPr txBox="1"/>
+          <p:nvPr/>
+        </p:nvSpPr>
+        <p:spPr>
+          <a:xfrm>
+            <a:off x="6638544" y="3785615"/>
+            <a:ext cx="4846320" cy="292608"/>
+          </a:xfrm>
+          <a:prstGeom prst="rect">
+            <a:avLst/>
+          </a:prstGeom>
+          <a:noFill/>
+        </p:spPr>
+        <p:txBody>
+          <a:bodyPr wrap="square" anchor="t" lIns="0" rIns="0" tIns="0" bIns="0">
+            <a:spAutoFit/>
+          </a:bodyPr>
+          <a:lstStyle/>
+          <a:p>
+            <a:pPr algn="l"/>
+            <a:r>
+              <a:rPr sz="1450" b="1" i="0">
+                <a:solidFill>
+                  <a:srgbClr val="FFFFFF"/>
+                </a:solidFill>
+                <a:latin typeface="Microsoft JhengHei"/>
+                <a:ea typeface="Microsoft JhengHei"/>
+              </a:rPr>
+              <a:t>專案內部文件</a:t>
+            </a:r>
+          </a:p>
+        </p:txBody>
+      </p:sp>
+      <p:sp>
+        <p:nvSpPr>
+          <p:cNvPr id="16" name="TextBox 15"/>
+          <p:cNvSpPr txBox="1"/>
+          <p:nvPr/>
+        </p:nvSpPr>
+        <p:spPr>
+          <a:xfrm>
+            <a:off x="6638544" y="4206240"/>
+            <a:ext cx="5029200" cy="1554480"/>
+          </a:xfrm>
+          <a:prstGeom prst="rect">
+            <a:avLst/>
+          </a:prstGeom>
+          <a:noFill/>
+        </p:spPr>
+        <p:txBody>
+          <a:bodyPr wrap="square" anchor="t" lIns="0" rIns="0" tIns="0" bIns="0">
+            <a:spAutoFit/>
+          </a:bodyPr>
+          <a:lstStyle/>
+          <a:p>
+            <a:pPr algn="l" marL="164592" indent="-164592">
+              <a:lnSpc>
+                <a:spcPct val="115000"/>
+              </a:lnSpc>
+              <a:spcAft>
+                <a:spcPts val="700"/>
+              </a:spcAft>
+              <a:buClr>
+                <a:srgbClr val="3FD0B6"/>
+              </a:buClr>
+              <a:buFont typeface="Arial"/>
+              <a:buChar char="▪"/>
+            </a:pPr>
+            <a:r>
+              <a:rPr sz="1100" b="0" i="0">
+                <a:solidFill>
+                  <a:srgbClr val="CADCFC"/>
+                </a:solidFill>
+                <a:latin typeface="Microsoft JhengHei"/>
+                <a:ea typeface="Microsoft JhengHei"/>
+              </a:rPr>
+              <a:t>README.md — 使用說明與驗證流程</a:t>
+            </a:r>
+          </a:p>
+          <a:p>
+            <a:pPr algn="l" marL="164592" indent="-164592">
+              <a:lnSpc>
+                <a:spcPct val="115000"/>
+              </a:lnSpc>
+              <a:spcAft>
+                <a:spcPts val="700"/>
+              </a:spcAft>
+              <a:buClr>
+                <a:srgbClr val="3FD0B6"/>
+              </a:buClr>
+              <a:buFont typeface="Arial"/>
+              <a:buChar char="▪"/>
+            </a:pPr>
+            <a:r>
+              <a:rPr sz="1100" b="0" i="0">
+                <a:solidFill>
+                  <a:srgbClr val="CADCFC"/>
+                </a:solidFill>
+                <a:latin typeface="Microsoft JhengHei"/>
+                <a:ea typeface="Microsoft JhengHei"/>
+              </a:rPr>
+              <a:t>c_engine/docs/architecture.md — 系統架構與資料流</a:t>
+            </a:r>
+          </a:p>
+          <a:p>
+            <a:pPr algn="l" marL="164592" indent="-164592">
+              <a:lnSpc>
+                <a:spcPct val="115000"/>
+              </a:lnSpc>
+              <a:spcAft>
+                <a:spcPts val="700"/>
+              </a:spcAft>
+              <a:buClr>
+                <a:srgbClr val="3FD0B6"/>
+              </a:buClr>
+              <a:buFont typeface="Arial"/>
+              <a:buChar char="▪"/>
+            </a:pPr>
+            <a:r>
+              <a:rPr sz="1100" b="0" i="0">
+                <a:solidFill>
+                  <a:srgbClr val="CADCFC"/>
+                </a:solidFill>
+                <a:latin typeface="Microsoft JhengHei"/>
+                <a:ea typeface="Microsoft JhengHei"/>
+              </a:rPr>
+              <a:t>test-report.md — Session 1–6 累計測試報告</a:t>
+            </a:r>
+          </a:p>
+        </p:txBody>
+      </p:sp>
+      <p:sp>
+        <p:nvSpPr>
+          <p:cNvPr id="17" name="Rectangle 16"/>
+          <p:cNvSpPr/>
+          <p:nvPr/>
+        </p:nvSpPr>
+        <p:spPr>
+          <a:xfrm>
+            <a:off x="822960" y="5961888"/>
+            <a:ext cx="10543032" cy="0"/>
+          </a:xfrm>
+          <a:prstGeom prst="rect">
+            <a:avLst/>
+          </a:prstGeom>
+          <a:noFill/>
+          <a:ln>
+            <a:noFill/>
+          </a:ln>
+          <a:effectLst/>
+        </p:spPr>
+        <p:style>
+          <a:lnRef idx="1">
+            <a:schemeClr val="accent1"/>
+          </a:lnRef>
+          <a:fillRef idx="3">
+            <a:schemeClr val="accent1"/>
+          </a:fillRef>
+          <a:effectRef idx="2">
+            <a:schemeClr val="accent1"/>
+          </a:effectRef>
+          <a:fontRef idx="minor">
+            <a:schemeClr val="lt1"/>
+          </a:fontRef>
+        </p:style>
+        <p:txBody>
+          <a:bodyPr rtlCol="0" anchor="ctr"/>
+          <a:lstStyle/>
+          <a:p>
+            <a:pPr algn="ctr"/>
+          </a:p>
+        </p:txBody>
+      </p:sp>
+      <p:sp>
+        <p:nvSpPr>
+          <p:cNvPr id="18" name="TextBox 17"/>
+          <p:cNvSpPr txBox="1"/>
+          <p:nvPr/>
+        </p:nvSpPr>
+        <p:spPr>
+          <a:xfrm>
+            <a:off x="822960" y="6035040"/>
+            <a:ext cx="10515600" cy="365760"/>
+          </a:xfrm>
+          <a:prstGeom prst="rect">
+            <a:avLst/>
+          </a:prstGeom>
+          <a:noFill/>
+        </p:spPr>
+        <p:txBody>
+          <a:bodyPr wrap="square" anchor="t" lIns="0" rIns="0" tIns="0" bIns="0">
+            <a:spAutoFit/>
+          </a:bodyPr>
+          <a:lstStyle/>
+          <a:p>
+            <a:pPr algn="l"/>
+            <a:r>
+              <a:rPr sz="1200" b="0" i="0">
+                <a:solidFill>
+                  <a:srgbClr val="7E93A8"/>
+                </a:solidFill>
+                <a:latin typeface="Consolas"/>
+                <a:ea typeface="Microsoft JhengHei"/>
+              </a:rPr>
+              <a:t>Thank You — 謝謝聆聽   |   Demo：2026.06.18 – 06.20   |   b11402037 高恩在 · b11402053 林秉學</a:t>
+            </a:r>
+          </a:p>
+        </p:txBody>
+      </p:sp>
+      <p:sp>
+        <p:nvSpPr>
+          <p:cNvPr id="19" name="TextBox 18"/>
+          <p:cNvSpPr txBox="1"/>
+          <p:nvPr/>
+        </p:nvSpPr>
+        <p:spPr>
+          <a:xfrm>
+            <a:off x="640080" y="6473952"/>
+            <a:ext cx="7315200" cy="274320"/>
+          </a:xfrm>
+          <a:prstGeom prst="rect">
+            <a:avLst/>
+          </a:prstGeom>
+          <a:noFill/>
+        </p:spPr>
+        <p:txBody>
+          <a:bodyPr wrap="square" anchor="t" lIns="0" rIns="0" tIns="0" bIns="0">
+            <a:spAutoFit/>
+          </a:bodyPr>
+          <a:lstStyle/>
+          <a:p>
+            <a:pPr algn="l"/>
+            <a:r>
+              <a:rPr sz="900" b="0" i="0">
+                <a:solidFill>
+                  <a:srgbClr val="CADCFC"/>
+                </a:solidFill>
+                <a:latin typeface="Consolas"/>
+                <a:ea typeface="Microsoft JhengHei"/>
+              </a:rPr>
+              <a:t>Clawer C Data Normalization Engine — b11402037 · b11402053</a:t>
+            </a:r>
+          </a:p>
+        </p:txBody>
+      </p:sp>
+      <p:sp>
+        <p:nvSpPr>
+          <p:cNvPr id="20" name="TextBox 19"/>
+          <p:cNvSpPr txBox="1"/>
+          <p:nvPr/>
+        </p:nvSpPr>
+        <p:spPr>
+          <a:xfrm>
+            <a:off x="10607040" y="6473952"/>
+            <a:ext cx="941832" cy="274320"/>
+          </a:xfrm>
+          <a:prstGeom prst="rect">
+            <a:avLst/>
+          </a:prstGeom>
+          <a:noFill/>
+        </p:spPr>
+        <p:txBody>
+          <a:bodyPr wrap="square" anchor="t" lIns="0" rIns="0" tIns="0" bIns="0">
+            <a:spAutoFit/>
+          </a:bodyPr>
+          <a:lstStyle/>
+          <a:p>
+            <a:pPr algn="r"/>
+            <a:r>
+              <a:rPr sz="900" b="0" i="0">
+                <a:solidFill>
+                  <a:srgbClr val="CADCFC"/>
+                </a:solidFill>
+                <a:latin typeface="Consolas"/>
+                <a:ea typeface="Microsoft JhengHei"/>
+              </a:rPr>
+              <a:t>10 / 10</a:t>
+            </a:r>
+          </a:p>
+        </p:txBody>
+      </p:sp>
+    </p:spTree>
+  </p:cSld>
+  <p:clrMapOvr>
+    <a:masterClrMapping/>
+  </p:clrMapOvr>
+</p:sld>
+</file>
+
 <file path=ppt/slides/slide2.xml><?xml version="1.0" encoding="utf-8"?>
 <p:sld xmlns:a="http://schemas.openxmlformats.org/drawingml/2006/main" xmlns:p="http://schemas.openxmlformats.org/presentationml/2006/main" xmlns:r="http://schemas.openxmlformats.org/officeDocument/2006/relationships">
   <p:cSld>
@@ -5270,7 +6267,7 @@
                 <a:latin typeface="Consolas"/>
                 <a:ea typeface="Microsoft JhengHei"/>
               </a:rPr>
-              <a:t>2 / 9</a:t>
+              <a:t>2 / 10</a:t>
             </a:r>
           </a:p>
         </p:txBody>
@@ -6526,7 +7523,7 @@
                 <a:latin typeface="Consolas"/>
                 <a:ea typeface="Microsoft JhengHei"/>
               </a:rPr>
-              <a:t>3 / 9</a:t>
+              <a:t>3 / 10</a:t>
             </a:r>
           </a:p>
         </p:txBody>
@@ -7698,7 +8695,7 @@
                 <a:latin typeface="Consolas"/>
                 <a:ea typeface="Microsoft JhengHei"/>
               </a:rPr>
-              <a:t>4 / 9</a:t>
+              <a:t>4 / 10</a:t>
             </a:r>
           </a:p>
         </p:txBody>
@@ -9404,7 +10401,7 @@
                 <a:latin typeface="Consolas"/>
                 <a:ea typeface="Microsoft JhengHei"/>
               </a:rPr>
-              <a:t>5 / 9</a:t>
+              <a:t>5 / 10</a:t>
             </a:r>
           </a:p>
         </p:txBody>
@@ -9418,6 +10415,434 @@
 </file>
 
 <file path=ppt/slides/slide6.xml><?xml version="1.0" encoding="utf-8"?>
+<p:sld xmlns:a="http://schemas.openxmlformats.org/drawingml/2006/main" xmlns:p="http://schemas.openxmlformats.org/presentationml/2006/main" xmlns:r="http://schemas.openxmlformats.org/officeDocument/2006/relationships">
+  <p:cSld>
+    <p:spTree>
+      <p:nvGrpSpPr>
+        <p:cNvPr id="1" name=""/>
+        <p:cNvGrpSpPr/>
+        <p:nvPr/>
+      </p:nvGrpSpPr>
+      <p:grpSpPr/>
+      <p:sp>
+        <p:nvSpPr>
+          <p:cNvPr id="2" name="Rectangle 1"/>
+          <p:cNvSpPr/>
+          <p:nvPr/>
+        </p:nvSpPr>
+        <p:spPr>
+          <a:xfrm>
+            <a:off x="0" y="0"/>
+            <a:ext cx="12191695" cy="6858000"/>
+          </a:xfrm>
+          <a:prstGeom prst="rect">
+            <a:avLst/>
+          </a:prstGeom>
+          <a:solidFill>
+            <a:srgbClr val="FFFFFF"/>
+          </a:solidFill>
+          <a:ln>
+            <a:noFill/>
+          </a:ln>
+          <a:effectLst/>
+        </p:spPr>
+        <p:style>
+          <a:lnRef idx="1">
+            <a:schemeClr val="accent1"/>
+          </a:lnRef>
+          <a:fillRef idx="3">
+            <a:schemeClr val="accent1"/>
+          </a:fillRef>
+          <a:effectRef idx="2">
+            <a:schemeClr val="accent1"/>
+          </a:effectRef>
+          <a:fontRef idx="minor">
+            <a:schemeClr val="lt1"/>
+          </a:fontRef>
+        </p:style>
+        <p:txBody>
+          <a:bodyPr rtlCol="0" anchor="ctr"/>
+          <a:lstStyle/>
+          <a:p>
+            <a:pPr algn="ctr"/>
+          </a:p>
+        </p:txBody>
+      </p:sp>
+      <p:sp>
+        <p:nvSpPr>
+          <p:cNvPr id="3" name="TextBox 2"/>
+          <p:cNvSpPr txBox="1"/>
+          <p:nvPr/>
+        </p:nvSpPr>
+        <p:spPr>
+          <a:xfrm>
+            <a:off x="640080" y="384048"/>
+            <a:ext cx="10972800" cy="274320"/>
+          </a:xfrm>
+          <a:prstGeom prst="rect">
+            <a:avLst/>
+          </a:prstGeom>
+          <a:noFill/>
+        </p:spPr>
+        <p:txBody>
+          <a:bodyPr wrap="square" anchor="t" lIns="0" rIns="0" tIns="0" bIns="0">
+            <a:spAutoFit/>
+          </a:bodyPr>
+          <a:lstStyle/>
+          <a:p>
+            <a:pPr algn="l"/>
+            <a:r>
+              <a:rPr sz="1200" b="1" i="0" spc="160">
+                <a:solidFill>
+                  <a:srgbClr val="0E8C8B"/>
+                </a:solidFill>
+                <a:latin typeface="Consolas"/>
+                <a:ea typeface="Microsoft JhengHei"/>
+              </a:rPr>
+              <a:t>03 · IMPLEMENTATION</a:t>
+            </a:r>
+          </a:p>
+        </p:txBody>
+      </p:sp>
+      <p:sp>
+        <p:nvSpPr>
+          <p:cNvPr id="4" name="TextBox 3"/>
+          <p:cNvSpPr txBox="1"/>
+          <p:nvPr/>
+        </p:nvSpPr>
+        <p:spPr>
+          <a:xfrm>
+            <a:off x="640080" y="658368"/>
+            <a:ext cx="10972800" cy="566928"/>
+          </a:xfrm>
+          <a:prstGeom prst="rect">
+            <a:avLst/>
+          </a:prstGeom>
+          <a:noFill/>
+        </p:spPr>
+        <p:txBody>
+          <a:bodyPr wrap="square" anchor="t" lIns="0" rIns="0" tIns="0" bIns="0">
+            <a:spAutoFit/>
+          </a:bodyPr>
+          <a:lstStyle/>
+          <a:p>
+            <a:pPr algn="l"/>
+            <a:r>
+              <a:rPr sz="2700" b="1" i="0">
+                <a:solidFill>
+                  <a:srgbClr val="22303F"/>
+                </a:solidFill>
+                <a:latin typeface="Microsoft JhengHei"/>
+                <a:ea typeface="Microsoft JhengHei"/>
+              </a:rPr>
+              <a:t>實作 — Windows 實際執行畫面</a:t>
+            </a:r>
+          </a:p>
+        </p:txBody>
+      </p:sp>
+      <p:pic>
+        <p:nvPicPr>
+          <p:cNvPr id="5" name="Picture 4" descr="run-build-load.png"/>
+          <p:cNvPicPr>
+            <a:picLocks noChangeAspect="1"/>
+          </p:cNvPicPr>
+          <p:nvPr/>
+        </p:nvPicPr>
+        <p:blipFill>
+          <a:blip r:embed="rId2"/>
+          <a:stretch>
+            <a:fillRect/>
+          </a:stretch>
+        </p:blipFill>
+        <p:spPr>
+          <a:xfrm>
+            <a:off x="640080" y="1554480"/>
+            <a:ext cx="5349240" cy="2841784"/>
+          </a:xfrm>
+          <a:prstGeom prst="rect">
+            <a:avLst/>
+          </a:prstGeom>
+        </p:spPr>
+      </p:pic>
+      <p:pic>
+        <p:nvPicPr>
+          <p:cNvPr id="6" name="Picture 5" descr="run-normalize-export.png"/>
+          <p:cNvPicPr>
+            <a:picLocks noChangeAspect="1"/>
+          </p:cNvPicPr>
+          <p:nvPr/>
+        </p:nvPicPr>
+        <p:blipFill>
+          <a:blip r:embed="rId3"/>
+          <a:stretch>
+            <a:fillRect/>
+          </a:stretch>
+        </p:blipFill>
+        <p:spPr>
+          <a:xfrm>
+            <a:off x="6473952" y="1554480"/>
+            <a:ext cx="5349240" cy="2841784"/>
+          </a:xfrm>
+          <a:prstGeom prst="rect">
+            <a:avLst/>
+          </a:prstGeom>
+        </p:spPr>
+      </p:pic>
+      <p:sp>
+        <p:nvSpPr>
+          <p:cNvPr id="7" name="TextBox 6"/>
+          <p:cNvSpPr txBox="1"/>
+          <p:nvPr/>
+        </p:nvSpPr>
+        <p:spPr>
+          <a:xfrm>
+            <a:off x="640080" y="4526280"/>
+            <a:ext cx="5349240" cy="457200"/>
+          </a:xfrm>
+          <a:prstGeom prst="rect">
+            <a:avLst/>
+          </a:prstGeom>
+          <a:noFill/>
+        </p:spPr>
+        <p:txBody>
+          <a:bodyPr wrap="square" anchor="t" lIns="0" rIns="0" tIns="0" bIns="0">
+            <a:spAutoFit/>
+          </a:bodyPr>
+          <a:lstStyle/>
+          <a:p>
+            <a:pPr algn="ctr"/>
+            <a:r>
+              <a:rPr sz="1050" b="0" i="0">
+                <a:solidFill>
+                  <a:srgbClr val="5F6E7D"/>
+                </a:solidFill>
+                <a:latin typeface="Microsoft JhengHei"/>
+                <a:ea typeface="Microsoft JhengHei"/>
+              </a:rPr>
+              <a:t>build.ps1 編譯（清空舊輸出）→ 選項 1 載入並顯示原始資料</a:t>
+            </a:r>
+          </a:p>
+        </p:txBody>
+      </p:sp>
+      <p:sp>
+        <p:nvSpPr>
+          <p:cNvPr id="8" name="TextBox 7"/>
+          <p:cNvSpPr txBox="1"/>
+          <p:nvPr/>
+        </p:nvSpPr>
+        <p:spPr>
+          <a:xfrm>
+            <a:off x="6473952" y="4526280"/>
+            <a:ext cx="5349240" cy="457200"/>
+          </a:xfrm>
+          <a:prstGeom prst="rect">
+            <a:avLst/>
+          </a:prstGeom>
+          <a:noFill/>
+        </p:spPr>
+        <p:txBody>
+          <a:bodyPr wrap="square" anchor="t" lIns="0" rIns="0" tIns="0" bIns="0">
+            <a:spAutoFit/>
+          </a:bodyPr>
+          <a:lstStyle/>
+          <a:p>
+            <a:pPr algn="ctr"/>
+            <a:r>
+              <a:rPr sz="1050" b="0" i="0">
+                <a:solidFill>
+                  <a:srgbClr val="5F6E7D"/>
+                </a:solidFill>
+                <a:latin typeface="Microsoft JhengHei"/>
+                <a:ea typeface="Microsoft JhengHei"/>
+              </a:rPr>
+              <a:t>選項 2 正規化並顯示結果 → 選項 3 匯出後自動離開</a:t>
+            </a:r>
+          </a:p>
+        </p:txBody>
+      </p:sp>
+      <p:sp>
+        <p:nvSpPr>
+          <p:cNvPr id="9" name="Rounded Rectangle 8"/>
+          <p:cNvSpPr/>
+          <p:nvPr/>
+        </p:nvSpPr>
+        <p:spPr>
+          <a:xfrm>
+            <a:off x="640080" y="5138928"/>
+            <a:ext cx="10908792" cy="566928"/>
+          </a:xfrm>
+          <a:prstGeom prst="roundRect">
+            <a:avLst>
+              <a:gd name="adj" fmla="val 8000"/>
+            </a:avLst>
+          </a:prstGeom>
+          <a:solidFill>
+            <a:srgbClr val="E8F4F2"/>
+          </a:solidFill>
+          <a:ln>
+            <a:noFill/>
+          </a:ln>
+          <a:effectLst/>
+        </p:spPr>
+        <p:style>
+          <a:lnRef idx="1">
+            <a:schemeClr val="accent1"/>
+          </a:lnRef>
+          <a:fillRef idx="3">
+            <a:schemeClr val="accent1"/>
+          </a:fillRef>
+          <a:effectRef idx="2">
+            <a:schemeClr val="accent1"/>
+          </a:effectRef>
+          <a:fontRef idx="minor">
+            <a:schemeClr val="lt1"/>
+          </a:fontRef>
+        </p:style>
+        <p:txBody>
+          <a:bodyPr rtlCol="0" anchor="ctr"/>
+          <a:lstStyle/>
+          <a:p>
+            <a:pPr algn="ctr"/>
+          </a:p>
+        </p:txBody>
+      </p:sp>
+      <p:sp>
+        <p:nvSpPr>
+          <p:cNvPr id="10" name="TextBox 9"/>
+          <p:cNvSpPr txBox="1"/>
+          <p:nvPr/>
+        </p:nvSpPr>
+        <p:spPr>
+          <a:xfrm>
+            <a:off x="640080" y="5276088"/>
+            <a:ext cx="10908792" cy="310896"/>
+          </a:xfrm>
+          <a:prstGeom prst="rect">
+            <a:avLst/>
+          </a:prstGeom>
+          <a:noFill/>
+        </p:spPr>
+        <p:txBody>
+          <a:bodyPr wrap="square" anchor="t" lIns="0" rIns="0" tIns="0" bIns="0">
+            <a:spAutoFit/>
+          </a:bodyPr>
+          <a:lstStyle/>
+          <a:p>
+            <a:pPr algn="ctr"/>
+            <a:r>
+              <a:rPr sz="1250" b="1" i="0">
+                <a:solidFill>
+                  <a:srgbClr val="22303F"/>
+                </a:solidFill>
+                <a:latin typeface="Microsoft JhengHei"/>
+                <a:ea typeface="Microsoft JhengHei"/>
+              </a:rPr>
+              <a:t>完整 demo 流程僅需三個輸入：</a:t>
+            </a:r>
+            <a:r>
+              <a:rPr sz="1250" b="1" i="0">
+                <a:solidFill>
+                  <a:srgbClr val="0E8C8B"/>
+                </a:solidFill>
+                <a:latin typeface="Consolas"/>
+                <a:ea typeface="Microsoft JhengHei"/>
+              </a:rPr>
+              <a:t>1 → 2 → 3</a:t>
+            </a:r>
+            <a:r>
+              <a:rPr sz="1250" b="1" i="0">
+                <a:solidFill>
+                  <a:srgbClr val="22303F"/>
+                </a:solidFill>
+                <a:latin typeface="Microsoft JhengHei"/>
+                <a:ea typeface="Microsoft JhengHei"/>
+              </a:rPr>
+              <a:t>，即完成載入、正規化、匯出並自動離開</a:t>
+            </a:r>
+          </a:p>
+        </p:txBody>
+      </p:sp>
+      <p:sp>
+        <p:nvSpPr>
+          <p:cNvPr id="11" name="TextBox 10"/>
+          <p:cNvSpPr txBox="1"/>
+          <p:nvPr/>
+        </p:nvSpPr>
+        <p:spPr>
+          <a:xfrm>
+            <a:off x="640080" y="6473952"/>
+            <a:ext cx="7315200" cy="274320"/>
+          </a:xfrm>
+          <a:prstGeom prst="rect">
+            <a:avLst/>
+          </a:prstGeom>
+          <a:noFill/>
+        </p:spPr>
+        <p:txBody>
+          <a:bodyPr wrap="square" anchor="t" lIns="0" rIns="0" tIns="0" bIns="0">
+            <a:spAutoFit/>
+          </a:bodyPr>
+          <a:lstStyle/>
+          <a:p>
+            <a:pPr algn="l"/>
+            <a:r>
+              <a:rPr sz="900" b="0" i="0">
+                <a:solidFill>
+                  <a:srgbClr val="5F6E7D"/>
+                </a:solidFill>
+                <a:latin typeface="Consolas"/>
+                <a:ea typeface="Microsoft JhengHei"/>
+              </a:rPr>
+              <a:t>Clawer C Data Normalization Engine — b11402037 · b11402053</a:t>
+            </a:r>
+          </a:p>
+        </p:txBody>
+      </p:sp>
+      <p:sp>
+        <p:nvSpPr>
+          <p:cNvPr id="12" name="TextBox 11"/>
+          <p:cNvSpPr txBox="1"/>
+          <p:nvPr/>
+        </p:nvSpPr>
+        <p:spPr>
+          <a:xfrm>
+            <a:off x="10607040" y="6473952"/>
+            <a:ext cx="941832" cy="274320"/>
+          </a:xfrm>
+          <a:prstGeom prst="rect">
+            <a:avLst/>
+          </a:prstGeom>
+          <a:noFill/>
+        </p:spPr>
+        <p:txBody>
+          <a:bodyPr wrap="square" anchor="t" lIns="0" rIns="0" tIns="0" bIns="0">
+            <a:spAutoFit/>
+          </a:bodyPr>
+          <a:lstStyle/>
+          <a:p>
+            <a:pPr algn="r"/>
+            <a:r>
+              <a:rPr sz="900" b="0" i="0">
+                <a:solidFill>
+                  <a:srgbClr val="5F6E7D"/>
+                </a:solidFill>
+                <a:latin typeface="Consolas"/>
+                <a:ea typeface="Microsoft JhengHei"/>
+              </a:rPr>
+              <a:t>6 / 10</a:t>
+            </a:r>
+          </a:p>
+        </p:txBody>
+      </p:sp>
+    </p:spTree>
+  </p:cSld>
+  <p:clrMapOvr>
+    <a:masterClrMapping/>
+  </p:clrMapOvr>
+</p:sld>
+</file>
+
+<file path=ppt/slides/slide7.xml><?xml version="1.0" encoding="utf-8"?>
 <p:sld xmlns:a="http://schemas.openxmlformats.org/drawingml/2006/main" xmlns:p="http://schemas.openxmlformats.org/presentationml/2006/main" xmlns:r="http://schemas.openxmlformats.org/officeDocument/2006/relationships">
   <p:cSld>
     <p:spTree>
@@ -10312,1830 +11737,7 @@
                 <a:latin typeface="Consolas"/>
                 <a:ea typeface="Microsoft JhengHei"/>
               </a:rPr>
-              <a:t>6 / 9</a:t>
-            </a:r>
-          </a:p>
-        </p:txBody>
-      </p:sp>
-    </p:spTree>
-  </p:cSld>
-  <p:clrMapOvr>
-    <a:masterClrMapping/>
-  </p:clrMapOvr>
-</p:sld>
-</file>
-
-<file path=ppt/slides/slide7.xml><?xml version="1.0" encoding="utf-8"?>
-<p:sld xmlns:a="http://schemas.openxmlformats.org/drawingml/2006/main" xmlns:p="http://schemas.openxmlformats.org/presentationml/2006/main" xmlns:r="http://schemas.openxmlformats.org/officeDocument/2006/relationships">
-  <p:cSld>
-    <p:spTree>
-      <p:nvGrpSpPr>
-        <p:cNvPr id="1" name=""/>
-        <p:cNvGrpSpPr/>
-        <p:nvPr/>
-      </p:nvGrpSpPr>
-      <p:grpSpPr/>
-      <p:sp>
-        <p:nvSpPr>
-          <p:cNvPr id="2" name="Rectangle 1"/>
-          <p:cNvSpPr/>
-          <p:nvPr/>
-        </p:nvSpPr>
-        <p:spPr>
-          <a:xfrm>
-            <a:off x="0" y="0"/>
-            <a:ext cx="12191695" cy="6858000"/>
-          </a:xfrm>
-          <a:prstGeom prst="rect">
-            <a:avLst/>
-          </a:prstGeom>
-          <a:solidFill>
-            <a:srgbClr val="FFFFFF"/>
-          </a:solidFill>
-          <a:ln>
-            <a:noFill/>
-          </a:ln>
-          <a:effectLst/>
-        </p:spPr>
-        <p:style>
-          <a:lnRef idx="1">
-            <a:schemeClr val="accent1"/>
-          </a:lnRef>
-          <a:fillRef idx="3">
-            <a:schemeClr val="accent1"/>
-          </a:fillRef>
-          <a:effectRef idx="2">
-            <a:schemeClr val="accent1"/>
-          </a:effectRef>
-          <a:fontRef idx="minor">
-            <a:schemeClr val="lt1"/>
-          </a:fontRef>
-        </p:style>
-        <p:txBody>
-          <a:bodyPr rtlCol="0" anchor="ctr"/>
-          <a:lstStyle/>
-          <a:p>
-            <a:pPr algn="ctr"/>
-          </a:p>
-        </p:txBody>
-      </p:sp>
-      <p:sp>
-        <p:nvSpPr>
-          <p:cNvPr id="3" name="TextBox 2"/>
-          <p:cNvSpPr txBox="1"/>
-          <p:nvPr/>
-        </p:nvSpPr>
-        <p:spPr>
-          <a:xfrm>
-            <a:off x="640080" y="384048"/>
-            <a:ext cx="10972800" cy="274320"/>
-          </a:xfrm>
-          <a:prstGeom prst="rect">
-            <a:avLst/>
-          </a:prstGeom>
-          <a:noFill/>
-        </p:spPr>
-        <p:txBody>
-          <a:bodyPr wrap="square" anchor="t" lIns="0" rIns="0" tIns="0" bIns="0">
-            <a:spAutoFit/>
-          </a:bodyPr>
-          <a:lstStyle/>
-          <a:p>
-            <a:pPr algn="l"/>
-            <a:r>
-              <a:rPr sz="1200" b="1" i="0" spc="160">
-                <a:solidFill>
-                  <a:srgbClr val="0E8C8B"/>
-                </a:solidFill>
-                <a:latin typeface="Consolas"/>
-                <a:ea typeface="Microsoft JhengHei"/>
-              </a:rPr>
-              <a:t>03 · IMPLEMENTATION</a:t>
-            </a:r>
-          </a:p>
-        </p:txBody>
-      </p:sp>
-      <p:sp>
-        <p:nvSpPr>
-          <p:cNvPr id="4" name="TextBox 3"/>
-          <p:cNvSpPr txBox="1"/>
-          <p:nvPr/>
-        </p:nvSpPr>
-        <p:spPr>
-          <a:xfrm>
-            <a:off x="640080" y="658368"/>
-            <a:ext cx="10972800" cy="566928"/>
-          </a:xfrm>
-          <a:prstGeom prst="rect">
-            <a:avLst/>
-          </a:prstGeom>
-          <a:noFill/>
-        </p:spPr>
-        <p:txBody>
-          <a:bodyPr wrap="square" anchor="t" lIns="0" rIns="0" tIns="0" bIns="0">
-            <a:spAutoFit/>
-          </a:bodyPr>
-          <a:lstStyle/>
-          <a:p>
-            <a:pPr algn="l"/>
-            <a:r>
-              <a:rPr sz="2700" b="1" i="0">
-                <a:solidFill>
-                  <a:srgbClr val="22303F"/>
-                </a:solidFill>
-                <a:latin typeface="Microsoft JhengHei"/>
-                <a:ea typeface="Microsoft JhengHei"/>
-              </a:rPr>
-              <a:t>實作 — 弱點導向測試與驗證</a:t>
-            </a:r>
-          </a:p>
-        </p:txBody>
-      </p:sp>
-      <p:sp>
-        <p:nvSpPr>
-          <p:cNvPr id="5" name="Rectangle 4"/>
-          <p:cNvSpPr/>
-          <p:nvPr/>
-        </p:nvSpPr>
-        <p:spPr>
-          <a:xfrm>
-            <a:off x="640080" y="1490472"/>
-            <a:ext cx="118872" cy="118872"/>
-          </a:xfrm>
-          <a:prstGeom prst="rect">
-            <a:avLst/>
-          </a:prstGeom>
-          <a:solidFill>
-            <a:srgbClr val="0E8C8B"/>
-          </a:solidFill>
-          <a:ln>
-            <a:noFill/>
-          </a:ln>
-          <a:effectLst/>
-        </p:spPr>
-        <p:style>
-          <a:lnRef idx="1">
-            <a:schemeClr val="accent1"/>
-          </a:lnRef>
-          <a:fillRef idx="3">
-            <a:schemeClr val="accent1"/>
-          </a:fillRef>
-          <a:effectRef idx="2">
-            <a:schemeClr val="accent1"/>
-          </a:effectRef>
-          <a:fontRef idx="minor">
-            <a:schemeClr val="lt1"/>
-          </a:fontRef>
-        </p:style>
-        <p:txBody>
-          <a:bodyPr rtlCol="0" anchor="ctr"/>
-          <a:lstStyle/>
-          <a:p>
-            <a:pPr algn="ctr"/>
-          </a:p>
-        </p:txBody>
-      </p:sp>
-      <p:sp>
-        <p:nvSpPr>
-          <p:cNvPr id="6" name="TextBox 5"/>
-          <p:cNvSpPr txBox="1"/>
-          <p:nvPr/>
-        </p:nvSpPr>
-        <p:spPr>
-          <a:xfrm>
-            <a:off x="859536" y="1403604"/>
-            <a:ext cx="5486400" cy="310896"/>
-          </a:xfrm>
-          <a:prstGeom prst="rect">
-            <a:avLst/>
-          </a:prstGeom>
-          <a:noFill/>
-        </p:spPr>
-        <p:txBody>
-          <a:bodyPr wrap="square" anchor="t" lIns="0" rIns="0" tIns="0" bIns="0">
-            <a:spAutoFit/>
-          </a:bodyPr>
-          <a:lstStyle/>
-          <a:p>
-            <a:pPr algn="l"/>
-            <a:r>
-              <a:rPr sz="1550" b="1" i="0">
-                <a:solidFill>
-                  <a:srgbClr val="22303F"/>
-                </a:solidFill>
-                <a:latin typeface="Microsoft JhengHei"/>
-                <a:ea typeface="Microsoft JhengHei"/>
-              </a:rPr>
-              <a:t>測試方法論（每輪 Session）</a:t>
-            </a:r>
-          </a:p>
-        </p:txBody>
-      </p:sp>
-      <p:sp>
-        <p:nvSpPr>
-          <p:cNvPr id="7" name="Rounded Rectangle 6"/>
-          <p:cNvSpPr/>
-          <p:nvPr/>
-        </p:nvSpPr>
-        <p:spPr>
-          <a:xfrm>
-            <a:off x="640080" y="1847088"/>
-            <a:ext cx="475488" cy="475488"/>
-          </a:xfrm>
-          <a:prstGeom prst="roundRect">
-            <a:avLst>
-              <a:gd name="adj" fmla="val 14000"/>
-            </a:avLst>
-          </a:prstGeom>
-          <a:solidFill>
-            <a:srgbClr val="1B2A41"/>
-          </a:solidFill>
-          <a:ln>
-            <a:noFill/>
-          </a:ln>
-          <a:effectLst/>
-        </p:spPr>
-        <p:style>
-          <a:lnRef idx="1">
-            <a:schemeClr val="accent1"/>
-          </a:lnRef>
-          <a:fillRef idx="3">
-            <a:schemeClr val="accent1"/>
-          </a:fillRef>
-          <a:effectRef idx="2">
-            <a:schemeClr val="accent1"/>
-          </a:effectRef>
-          <a:fontRef idx="minor">
-            <a:schemeClr val="lt1"/>
-          </a:fontRef>
-        </p:style>
-        <p:txBody>
-          <a:bodyPr rtlCol="0" anchor="ctr"/>
-          <a:lstStyle/>
-          <a:p>
-            <a:pPr algn="ctr"/>
-          </a:p>
-        </p:txBody>
-      </p:sp>
-      <p:sp>
-        <p:nvSpPr>
-          <p:cNvPr id="8" name="TextBox 7"/>
-          <p:cNvSpPr txBox="1"/>
-          <p:nvPr/>
-        </p:nvSpPr>
-        <p:spPr>
-          <a:xfrm>
-            <a:off x="640080" y="1915668"/>
-            <a:ext cx="475488" cy="329184"/>
-          </a:xfrm>
-          <a:prstGeom prst="rect">
-            <a:avLst/>
-          </a:prstGeom>
-          <a:noFill/>
-        </p:spPr>
-        <p:txBody>
-          <a:bodyPr wrap="square" anchor="t" lIns="0" rIns="0" tIns="0" bIns="0">
-            <a:spAutoFit/>
-          </a:bodyPr>
-          <a:lstStyle/>
-          <a:p>
-            <a:pPr algn="ctr"/>
-            <a:r>
-              <a:rPr sz="1500" b="1" i="0">
-                <a:solidFill>
-                  <a:srgbClr val="3FD0B6"/>
-                </a:solidFill>
-                <a:latin typeface="Consolas"/>
-                <a:ea typeface="Microsoft JhengHei"/>
-              </a:rPr>
-              <a:t>1</a:t>
-            </a:r>
-          </a:p>
-        </p:txBody>
-      </p:sp>
-      <p:sp>
-        <p:nvSpPr>
-          <p:cNvPr id="9" name="TextBox 8"/>
-          <p:cNvSpPr txBox="1"/>
-          <p:nvPr/>
-        </p:nvSpPr>
-        <p:spPr>
-          <a:xfrm>
-            <a:off x="1298448" y="1828800"/>
-            <a:ext cx="4480560" cy="274320"/>
-          </a:xfrm>
-          <a:prstGeom prst="rect">
-            <a:avLst/>
-          </a:prstGeom>
-          <a:noFill/>
-        </p:spPr>
-        <p:txBody>
-          <a:bodyPr wrap="square" anchor="t" lIns="0" rIns="0" tIns="0" bIns="0">
-            <a:spAutoFit/>
-          </a:bodyPr>
-          <a:lstStyle/>
-          <a:p>
-            <a:pPr algn="l"/>
-            <a:r>
-              <a:rPr sz="1350" b="1" i="0">
-                <a:solidFill>
-                  <a:srgbClr val="22303F"/>
-                </a:solidFill>
-                <a:latin typeface="Microsoft JhengHei"/>
-                <a:ea typeface="Microsoft JhengHei"/>
-              </a:rPr>
-              <a:t>靜態分析</a:t>
-            </a:r>
-          </a:p>
-        </p:txBody>
-      </p:sp>
-      <p:sp>
-        <p:nvSpPr>
-          <p:cNvPr id="10" name="TextBox 9"/>
-          <p:cNvSpPr txBox="1"/>
-          <p:nvPr/>
-        </p:nvSpPr>
-        <p:spPr>
-          <a:xfrm>
-            <a:off x="1298448" y="2103120"/>
-            <a:ext cx="4480560" cy="274320"/>
-          </a:xfrm>
-          <a:prstGeom prst="rect">
-            <a:avLst/>
-          </a:prstGeom>
-          <a:noFill/>
-        </p:spPr>
-        <p:txBody>
-          <a:bodyPr wrap="square" anchor="t" lIns="0" rIns="0" tIns="0" bIns="0">
-            <a:spAutoFit/>
-          </a:bodyPr>
-          <a:lstStyle/>
-          <a:p>
-            <a:pPr algn="l"/>
-            <a:r>
-              <a:rPr sz="1050" b="0" i="0">
-                <a:solidFill>
-                  <a:srgbClr val="5F6E7D"/>
-                </a:solidFill>
-                <a:latin typeface="Microsoft JhengHei"/>
-                <a:ea typeface="Microsoft JhengHei"/>
-              </a:rPr>
-              <a:t>通讀模組程式碼，標記可疑邏輯</a:t>
-            </a:r>
-          </a:p>
-        </p:txBody>
-      </p:sp>
-      <p:sp>
-        <p:nvSpPr>
-          <p:cNvPr id="11" name="Rounded Rectangle 10"/>
-          <p:cNvSpPr/>
-          <p:nvPr/>
-        </p:nvSpPr>
-        <p:spPr>
-          <a:xfrm>
-            <a:off x="640080" y="2560320"/>
-            <a:ext cx="475488" cy="475488"/>
-          </a:xfrm>
-          <a:prstGeom prst="roundRect">
-            <a:avLst>
-              <a:gd name="adj" fmla="val 14000"/>
-            </a:avLst>
-          </a:prstGeom>
-          <a:solidFill>
-            <a:srgbClr val="1B2A41"/>
-          </a:solidFill>
-          <a:ln>
-            <a:noFill/>
-          </a:ln>
-          <a:effectLst/>
-        </p:spPr>
-        <p:style>
-          <a:lnRef idx="1">
-            <a:schemeClr val="accent1"/>
-          </a:lnRef>
-          <a:fillRef idx="3">
-            <a:schemeClr val="accent1"/>
-          </a:fillRef>
-          <a:effectRef idx="2">
-            <a:schemeClr val="accent1"/>
-          </a:effectRef>
-          <a:fontRef idx="minor">
-            <a:schemeClr val="lt1"/>
-          </a:fontRef>
-        </p:style>
-        <p:txBody>
-          <a:bodyPr rtlCol="0" anchor="ctr"/>
-          <a:lstStyle/>
-          <a:p>
-            <a:pPr algn="ctr"/>
-          </a:p>
-        </p:txBody>
-      </p:sp>
-      <p:sp>
-        <p:nvSpPr>
-          <p:cNvPr id="12" name="TextBox 11"/>
-          <p:cNvSpPr txBox="1"/>
-          <p:nvPr/>
-        </p:nvSpPr>
-        <p:spPr>
-          <a:xfrm>
-            <a:off x="640080" y="2628900"/>
-            <a:ext cx="475488" cy="329184"/>
-          </a:xfrm>
-          <a:prstGeom prst="rect">
-            <a:avLst/>
-          </a:prstGeom>
-          <a:noFill/>
-        </p:spPr>
-        <p:txBody>
-          <a:bodyPr wrap="square" anchor="t" lIns="0" rIns="0" tIns="0" bIns="0">
-            <a:spAutoFit/>
-          </a:bodyPr>
-          <a:lstStyle/>
-          <a:p>
-            <a:pPr algn="ctr"/>
-            <a:r>
-              <a:rPr sz="1500" b="1" i="0">
-                <a:solidFill>
-                  <a:srgbClr val="3FD0B6"/>
-                </a:solidFill>
-                <a:latin typeface="Consolas"/>
-                <a:ea typeface="Microsoft JhengHei"/>
-              </a:rPr>
-              <a:t>2</a:t>
-            </a:r>
-          </a:p>
-        </p:txBody>
-      </p:sp>
-      <p:sp>
-        <p:nvSpPr>
-          <p:cNvPr id="13" name="TextBox 12"/>
-          <p:cNvSpPr txBox="1"/>
-          <p:nvPr/>
-        </p:nvSpPr>
-        <p:spPr>
-          <a:xfrm>
-            <a:off x="1298448" y="2542032"/>
-            <a:ext cx="4480560" cy="274320"/>
-          </a:xfrm>
-          <a:prstGeom prst="rect">
-            <a:avLst/>
-          </a:prstGeom>
-          <a:noFill/>
-        </p:spPr>
-        <p:txBody>
-          <a:bodyPr wrap="square" anchor="t" lIns="0" rIns="0" tIns="0" bIns="0">
-            <a:spAutoFit/>
-          </a:bodyPr>
-          <a:lstStyle/>
-          <a:p>
-            <a:pPr algn="l"/>
-            <a:r>
-              <a:rPr sz="1350" b="1" i="0">
-                <a:solidFill>
-                  <a:srgbClr val="22303F"/>
-                </a:solidFill>
-                <a:latin typeface="Microsoft JhengHei"/>
-                <a:ea typeface="Microsoft JhengHei"/>
-              </a:rPr>
-              <a:t>探針程式</a:t>
-            </a:r>
-          </a:p>
-        </p:txBody>
-      </p:sp>
-      <p:sp>
-        <p:nvSpPr>
-          <p:cNvPr id="14" name="TextBox 13"/>
-          <p:cNvSpPr txBox="1"/>
-          <p:nvPr/>
-        </p:nvSpPr>
-        <p:spPr>
-          <a:xfrm>
-            <a:off x="1298448" y="2816352"/>
-            <a:ext cx="4480560" cy="274320"/>
-          </a:xfrm>
-          <a:prstGeom prst="rect">
-            <a:avLst/>
-          </a:prstGeom>
-          <a:noFill/>
-        </p:spPr>
-        <p:txBody>
-          <a:bodyPr wrap="square" anchor="t" lIns="0" rIns="0" tIns="0" bIns="0">
-            <a:spAutoFit/>
-          </a:bodyPr>
-          <a:lstStyle/>
-          <a:p>
-            <a:pPr algn="l"/>
-            <a:r>
-              <a:rPr sz="1050" b="0" i="0">
-                <a:solidFill>
-                  <a:srgbClr val="5F6E7D"/>
-                </a:solidFill>
-                <a:latin typeface="Microsoft JhengHei"/>
-                <a:ea typeface="Microsoft JhengHei"/>
-              </a:rPr>
-              <a:t>撰寫 probe 重現可疑行為</a:t>
-            </a:r>
-          </a:p>
-        </p:txBody>
-      </p:sp>
-      <p:sp>
-        <p:nvSpPr>
-          <p:cNvPr id="15" name="Rounded Rectangle 14"/>
-          <p:cNvSpPr/>
-          <p:nvPr/>
-        </p:nvSpPr>
-        <p:spPr>
-          <a:xfrm>
-            <a:off x="640080" y="3273552"/>
-            <a:ext cx="475488" cy="475488"/>
-          </a:xfrm>
-          <a:prstGeom prst="roundRect">
-            <a:avLst>
-              <a:gd name="adj" fmla="val 14000"/>
-            </a:avLst>
-          </a:prstGeom>
-          <a:solidFill>
-            <a:srgbClr val="1B2A41"/>
-          </a:solidFill>
-          <a:ln>
-            <a:noFill/>
-          </a:ln>
-          <a:effectLst/>
-        </p:spPr>
-        <p:style>
-          <a:lnRef idx="1">
-            <a:schemeClr val="accent1"/>
-          </a:lnRef>
-          <a:fillRef idx="3">
-            <a:schemeClr val="accent1"/>
-          </a:fillRef>
-          <a:effectRef idx="2">
-            <a:schemeClr val="accent1"/>
-          </a:effectRef>
-          <a:fontRef idx="minor">
-            <a:schemeClr val="lt1"/>
-          </a:fontRef>
-        </p:style>
-        <p:txBody>
-          <a:bodyPr rtlCol="0" anchor="ctr"/>
-          <a:lstStyle/>
-          <a:p>
-            <a:pPr algn="ctr"/>
-          </a:p>
-        </p:txBody>
-      </p:sp>
-      <p:sp>
-        <p:nvSpPr>
-          <p:cNvPr id="16" name="TextBox 15"/>
-          <p:cNvSpPr txBox="1"/>
-          <p:nvPr/>
-        </p:nvSpPr>
-        <p:spPr>
-          <a:xfrm>
-            <a:off x="640080" y="3342132"/>
-            <a:ext cx="475488" cy="329184"/>
-          </a:xfrm>
-          <a:prstGeom prst="rect">
-            <a:avLst/>
-          </a:prstGeom>
-          <a:noFill/>
-        </p:spPr>
-        <p:txBody>
-          <a:bodyPr wrap="square" anchor="t" lIns="0" rIns="0" tIns="0" bIns="0">
-            <a:spAutoFit/>
-          </a:bodyPr>
-          <a:lstStyle/>
-          <a:p>
-            <a:pPr algn="ctr"/>
-            <a:r>
-              <a:rPr sz="1500" b="1" i="0">
-                <a:solidFill>
-                  <a:srgbClr val="3FD0B6"/>
-                </a:solidFill>
-                <a:latin typeface="Consolas"/>
-                <a:ea typeface="Microsoft JhengHei"/>
-              </a:rPr>
-              <a:t>3</a:t>
-            </a:r>
-          </a:p>
-        </p:txBody>
-      </p:sp>
-      <p:sp>
-        <p:nvSpPr>
-          <p:cNvPr id="17" name="TextBox 16"/>
-          <p:cNvSpPr txBox="1"/>
-          <p:nvPr/>
-        </p:nvSpPr>
-        <p:spPr>
-          <a:xfrm>
-            <a:off x="1298448" y="3255264"/>
-            <a:ext cx="4480560" cy="274320"/>
-          </a:xfrm>
-          <a:prstGeom prst="rect">
-            <a:avLst/>
-          </a:prstGeom>
-          <a:noFill/>
-        </p:spPr>
-        <p:txBody>
-          <a:bodyPr wrap="square" anchor="t" lIns="0" rIns="0" tIns="0" bIns="0">
-            <a:spAutoFit/>
-          </a:bodyPr>
-          <a:lstStyle/>
-          <a:p>
-            <a:pPr algn="l"/>
-            <a:r>
-              <a:rPr sz="1350" b="1" i="0">
-                <a:solidFill>
-                  <a:srgbClr val="22303F"/>
-                </a:solidFill>
-                <a:latin typeface="Microsoft JhengHei"/>
-                <a:ea typeface="Microsoft JhengHei"/>
-              </a:rPr>
-              <a:t>修正</a:t>
-            </a:r>
-          </a:p>
-        </p:txBody>
-      </p:sp>
-      <p:sp>
-        <p:nvSpPr>
-          <p:cNvPr id="18" name="TextBox 17"/>
-          <p:cNvSpPr txBox="1"/>
-          <p:nvPr/>
-        </p:nvSpPr>
-        <p:spPr>
-          <a:xfrm>
-            <a:off x="1298448" y="3529584"/>
-            <a:ext cx="4480560" cy="274320"/>
-          </a:xfrm>
-          <a:prstGeom prst="rect">
-            <a:avLst/>
-          </a:prstGeom>
-          <a:noFill/>
-        </p:spPr>
-        <p:txBody>
-          <a:bodyPr wrap="square" anchor="t" lIns="0" rIns="0" tIns="0" bIns="0">
-            <a:spAutoFit/>
-          </a:bodyPr>
-          <a:lstStyle/>
-          <a:p>
-            <a:pPr algn="l"/>
-            <a:r>
-              <a:rPr sz="1050" b="0" i="0">
-                <a:solidFill>
-                  <a:srgbClr val="5F6E7D"/>
-                </a:solidFill>
-                <a:latin typeface="Microsoft JhengHei"/>
-                <a:ea typeface="Microsoft JhengHei"/>
-              </a:rPr>
-              <a:t>最小修改修復根因</a:t>
-            </a:r>
-          </a:p>
-        </p:txBody>
-      </p:sp>
-      <p:sp>
-        <p:nvSpPr>
-          <p:cNvPr id="19" name="Rounded Rectangle 18"/>
-          <p:cNvSpPr/>
-          <p:nvPr/>
-        </p:nvSpPr>
-        <p:spPr>
-          <a:xfrm>
-            <a:off x="640080" y="3986783"/>
-            <a:ext cx="475488" cy="475488"/>
-          </a:xfrm>
-          <a:prstGeom prst="roundRect">
-            <a:avLst>
-              <a:gd name="adj" fmla="val 14000"/>
-            </a:avLst>
-          </a:prstGeom>
-          <a:solidFill>
-            <a:srgbClr val="1B2A41"/>
-          </a:solidFill>
-          <a:ln>
-            <a:noFill/>
-          </a:ln>
-          <a:effectLst/>
-        </p:spPr>
-        <p:style>
-          <a:lnRef idx="1">
-            <a:schemeClr val="accent1"/>
-          </a:lnRef>
-          <a:fillRef idx="3">
-            <a:schemeClr val="accent1"/>
-          </a:fillRef>
-          <a:effectRef idx="2">
-            <a:schemeClr val="accent1"/>
-          </a:effectRef>
-          <a:fontRef idx="minor">
-            <a:schemeClr val="lt1"/>
-          </a:fontRef>
-        </p:style>
-        <p:txBody>
-          <a:bodyPr rtlCol="0" anchor="ctr"/>
-          <a:lstStyle/>
-          <a:p>
-            <a:pPr algn="ctr"/>
-          </a:p>
-        </p:txBody>
-      </p:sp>
-      <p:sp>
-        <p:nvSpPr>
-          <p:cNvPr id="20" name="TextBox 19"/>
-          <p:cNvSpPr txBox="1"/>
-          <p:nvPr/>
-        </p:nvSpPr>
-        <p:spPr>
-          <a:xfrm>
-            <a:off x="640080" y="4055363"/>
-            <a:ext cx="475488" cy="329184"/>
-          </a:xfrm>
-          <a:prstGeom prst="rect">
-            <a:avLst/>
-          </a:prstGeom>
-          <a:noFill/>
-        </p:spPr>
-        <p:txBody>
-          <a:bodyPr wrap="square" anchor="t" lIns="0" rIns="0" tIns="0" bIns="0">
-            <a:spAutoFit/>
-          </a:bodyPr>
-          <a:lstStyle/>
-          <a:p>
-            <a:pPr algn="ctr"/>
-            <a:r>
-              <a:rPr sz="1500" b="1" i="0">
-                <a:solidFill>
-                  <a:srgbClr val="3FD0B6"/>
-                </a:solidFill>
-                <a:latin typeface="Consolas"/>
-                <a:ea typeface="Microsoft JhengHei"/>
-              </a:rPr>
-              <a:t>4</a:t>
-            </a:r>
-          </a:p>
-        </p:txBody>
-      </p:sp>
-      <p:sp>
-        <p:nvSpPr>
-          <p:cNvPr id="21" name="TextBox 20"/>
-          <p:cNvSpPr txBox="1"/>
-          <p:nvPr/>
-        </p:nvSpPr>
-        <p:spPr>
-          <a:xfrm>
-            <a:off x="1298448" y="3968496"/>
-            <a:ext cx="4480560" cy="274320"/>
-          </a:xfrm>
-          <a:prstGeom prst="rect">
-            <a:avLst/>
-          </a:prstGeom>
-          <a:noFill/>
-        </p:spPr>
-        <p:txBody>
-          <a:bodyPr wrap="square" anchor="t" lIns="0" rIns="0" tIns="0" bIns="0">
-            <a:spAutoFit/>
-          </a:bodyPr>
-          <a:lstStyle/>
-          <a:p>
-            <a:pPr algn="l"/>
-            <a:r>
-              <a:rPr sz="1350" b="1" i="0">
-                <a:solidFill>
-                  <a:srgbClr val="22303F"/>
-                </a:solidFill>
-                <a:latin typeface="Microsoft JhengHei"/>
-                <a:ea typeface="Microsoft JhengHei"/>
-              </a:rPr>
-              <a:t>回歸驗證</a:t>
-            </a:r>
-          </a:p>
-        </p:txBody>
-      </p:sp>
-      <p:sp>
-        <p:nvSpPr>
-          <p:cNvPr id="22" name="TextBox 21"/>
-          <p:cNvSpPr txBox="1"/>
-          <p:nvPr/>
-        </p:nvSpPr>
-        <p:spPr>
-          <a:xfrm>
-            <a:off x="1298448" y="4242816"/>
-            <a:ext cx="4480560" cy="274320"/>
-          </a:xfrm>
-          <a:prstGeom prst="rect">
-            <a:avLst/>
-          </a:prstGeom>
-          <a:noFill/>
-        </p:spPr>
-        <p:txBody>
-          <a:bodyPr wrap="square" anchor="t" lIns="0" rIns="0" tIns="0" bIns="0">
-            <a:spAutoFit/>
-          </a:bodyPr>
-          <a:lstStyle/>
-          <a:p>
-            <a:pPr algn="l"/>
-            <a:r>
-              <a:rPr sz="1050" b="0" i="0">
-                <a:solidFill>
-                  <a:srgbClr val="5F6E7D"/>
-                </a:solidFill>
-                <a:latin typeface="Microsoft JhengHei"/>
-                <a:ea typeface="Microsoft JhengHei"/>
-              </a:rPr>
-              <a:t>新增 regression 套件全量重跑</a:t>
-            </a:r>
-          </a:p>
-        </p:txBody>
-      </p:sp>
-      <p:sp>
-        <p:nvSpPr>
-          <p:cNvPr id="23" name="Rounded Rectangle 22"/>
-          <p:cNvSpPr/>
-          <p:nvPr/>
-        </p:nvSpPr>
-        <p:spPr>
-          <a:xfrm>
-            <a:off x="640080" y="4864608"/>
-            <a:ext cx="5394960" cy="1170432"/>
-          </a:xfrm>
-          <a:prstGeom prst="roundRect">
-            <a:avLst>
-              <a:gd name="adj" fmla="val 6000"/>
-            </a:avLst>
-          </a:prstGeom>
-          <a:solidFill>
-            <a:srgbClr val="E8F4F2"/>
-          </a:solidFill>
-          <a:ln>
-            <a:noFill/>
-          </a:ln>
-          <a:effectLst/>
-        </p:spPr>
-        <p:style>
-          <a:lnRef idx="1">
-            <a:schemeClr val="accent1"/>
-          </a:lnRef>
-          <a:fillRef idx="3">
-            <a:schemeClr val="accent1"/>
-          </a:fillRef>
-          <a:effectRef idx="2">
-            <a:schemeClr val="accent1"/>
-          </a:effectRef>
-          <a:fontRef idx="minor">
-            <a:schemeClr val="lt1"/>
-          </a:fontRef>
-        </p:style>
-        <p:txBody>
-          <a:bodyPr rtlCol="0" anchor="ctr"/>
-          <a:lstStyle/>
-          <a:p>
-            <a:pPr algn="ctr"/>
-          </a:p>
-        </p:txBody>
-      </p:sp>
-      <p:sp>
-        <p:nvSpPr>
-          <p:cNvPr id="24" name="Rectangle 23"/>
-          <p:cNvSpPr/>
-          <p:nvPr/>
-        </p:nvSpPr>
-        <p:spPr>
-          <a:xfrm>
-            <a:off x="640080" y="4864608"/>
-            <a:ext cx="64008" cy="1170432"/>
-          </a:xfrm>
-          <a:prstGeom prst="rect">
-            <a:avLst/>
-          </a:prstGeom>
-          <a:solidFill>
-            <a:srgbClr val="0E8C8B"/>
-          </a:solidFill>
-          <a:ln>
-            <a:noFill/>
-          </a:ln>
-          <a:effectLst/>
-        </p:spPr>
-        <p:style>
-          <a:lnRef idx="1">
-            <a:schemeClr val="accent1"/>
-          </a:lnRef>
-          <a:fillRef idx="3">
-            <a:schemeClr val="accent1"/>
-          </a:fillRef>
-          <a:effectRef idx="2">
-            <a:schemeClr val="accent1"/>
-          </a:effectRef>
-          <a:fontRef idx="minor">
-            <a:schemeClr val="lt1"/>
-          </a:fontRef>
-        </p:style>
-        <p:txBody>
-          <a:bodyPr rtlCol="0" anchor="ctr"/>
-          <a:lstStyle/>
-          <a:p>
-            <a:pPr algn="ctr"/>
-          </a:p>
-        </p:txBody>
-      </p:sp>
-      <p:sp>
-        <p:nvSpPr>
-          <p:cNvPr id="25" name="TextBox 24"/>
-          <p:cNvSpPr txBox="1"/>
-          <p:nvPr/>
-        </p:nvSpPr>
-        <p:spPr>
-          <a:xfrm>
-            <a:off x="896112" y="4992624"/>
-            <a:ext cx="4983480" cy="914400"/>
-          </a:xfrm>
-          <a:prstGeom prst="rect">
-            <a:avLst/>
-          </a:prstGeom>
-          <a:noFill/>
-        </p:spPr>
-        <p:txBody>
-          <a:bodyPr wrap="square" anchor="t" lIns="0" rIns="0" tIns="0" bIns="0">
-            <a:spAutoFit/>
-          </a:bodyPr>
-          <a:lstStyle/>
-          <a:p>
-            <a:pPr algn="l">
-              <a:spcAft>
-                <a:spcPts val="400"/>
-              </a:spcAft>
-            </a:pPr>
-            <a:r>
-              <a:rPr sz="1250" b="1" i="0">
-                <a:solidFill>
-                  <a:srgbClr val="22303F"/>
-                </a:solidFill>
-                <a:latin typeface="Microsoft JhengHei"/>
-                <a:ea typeface="Microsoft JhengHei"/>
-              </a:rPr>
-              <a:t>累計 6 輪 Session、17 項修正（A–T）</a:t>
-            </a:r>
-          </a:p>
-          <a:p>
-            <a:pPr algn="l"/>
-            <a:r>
-              <a:rPr sz="1050" b="0" i="0">
-                <a:solidFill>
-                  <a:srgbClr val="5F6E7D"/>
-                </a:solidFill>
-                <a:latin typeface="Consolas"/>
-                <a:ea typeface="Microsoft JhengHei"/>
-              </a:rPr>
-              <a:t>例：Fix S — parse_score(".5") 誤判為 5.0 → 修正為 0.5</a:t>
-            </a:r>
-          </a:p>
-        </p:txBody>
-      </p:sp>
-      <p:sp>
-        <p:nvSpPr>
-          <p:cNvPr id="26" name="TextBox 25"/>
-          <p:cNvSpPr txBox="1"/>
-          <p:nvPr/>
-        </p:nvSpPr>
-        <p:spPr>
-          <a:xfrm>
-            <a:off x="6446520" y="1389888"/>
-            <a:ext cx="5102352" cy="777240"/>
-          </a:xfrm>
-          <a:prstGeom prst="rect">
-            <a:avLst/>
-          </a:prstGeom>
-          <a:noFill/>
-        </p:spPr>
-        <p:txBody>
-          <a:bodyPr wrap="square" anchor="t" lIns="0" rIns="0" tIns="0" bIns="0">
-            <a:spAutoFit/>
-          </a:bodyPr>
-          <a:lstStyle/>
-          <a:p>
-            <a:pPr algn="l"/>
-            <a:r>
-              <a:rPr sz="4800" b="1" i="0">
-                <a:solidFill>
-                  <a:srgbClr val="0E8C8B"/>
-                </a:solidFill>
-                <a:latin typeface="Consolas"/>
-                <a:ea typeface="Microsoft JhengHei"/>
-              </a:rPr>
-              <a:t>602 / 602</a:t>
-            </a:r>
-          </a:p>
-        </p:txBody>
-      </p:sp>
-      <p:sp>
-        <p:nvSpPr>
-          <p:cNvPr id="27" name="TextBox 26"/>
-          <p:cNvSpPr txBox="1"/>
-          <p:nvPr/>
-        </p:nvSpPr>
-        <p:spPr>
-          <a:xfrm>
-            <a:off x="6446520" y="2212848"/>
-            <a:ext cx="5102352" cy="274320"/>
-          </a:xfrm>
-          <a:prstGeom prst="rect">
-            <a:avLst/>
-          </a:prstGeom>
-          <a:noFill/>
-        </p:spPr>
-        <p:txBody>
-          <a:bodyPr wrap="square" anchor="t" lIns="0" rIns="0" tIns="0" bIns="0">
-            <a:spAutoFit/>
-          </a:bodyPr>
-          <a:lstStyle/>
-          <a:p>
-            <a:pPr algn="l"/>
-            <a:r>
-              <a:rPr sz="1250" b="1" i="0">
-                <a:solidFill>
-                  <a:srgbClr val="22303F"/>
-                </a:solidFill>
-                <a:latin typeface="Microsoft JhengHei"/>
-                <a:ea typeface="Microsoft JhengHei"/>
-              </a:rPr>
-              <a:t>九個測試套件全數通過（make test_all）</a:t>
-            </a:r>
-          </a:p>
-        </p:txBody>
-      </p:sp>
-      <p:sp>
-        <p:nvSpPr>
-          <p:cNvPr id="28" name="Rectangle 27"/>
-          <p:cNvSpPr/>
-          <p:nvPr/>
-        </p:nvSpPr>
-        <p:spPr>
-          <a:xfrm>
-            <a:off x="6446520" y="2670048"/>
-            <a:ext cx="5102352" cy="457200"/>
-          </a:xfrm>
-          <a:prstGeom prst="rect">
-            <a:avLst/>
-          </a:prstGeom>
-          <a:solidFill>
-            <a:srgbClr val="F3F7F9"/>
-          </a:solidFill>
-          <a:ln w="6350">
-            <a:solidFill>
-              <a:srgbClr val="D8E1E7"/>
-            </a:solidFill>
-          </a:ln>
-          <a:effectLst/>
-        </p:spPr>
-        <p:style>
-          <a:lnRef idx="1">
-            <a:schemeClr val="accent1"/>
-          </a:lnRef>
-          <a:fillRef idx="3">
-            <a:schemeClr val="accent1"/>
-          </a:fillRef>
-          <a:effectRef idx="2">
-            <a:schemeClr val="accent1"/>
-          </a:effectRef>
-          <a:fontRef idx="minor">
-            <a:schemeClr val="lt1"/>
-          </a:fontRef>
-        </p:style>
-        <p:txBody>
-          <a:bodyPr rtlCol="0" anchor="ctr"/>
-          <a:lstStyle/>
-          <a:p>
-            <a:pPr algn="ctr"/>
-          </a:p>
-        </p:txBody>
-      </p:sp>
-      <p:sp>
-        <p:nvSpPr>
-          <p:cNvPr id="29" name="TextBox 28"/>
-          <p:cNvSpPr txBox="1"/>
-          <p:nvPr/>
-        </p:nvSpPr>
-        <p:spPr>
-          <a:xfrm>
-            <a:off x="6629400" y="2761488"/>
-            <a:ext cx="3291840" cy="274320"/>
-          </a:xfrm>
-          <a:prstGeom prst="rect">
-            <a:avLst/>
-          </a:prstGeom>
-          <a:noFill/>
-        </p:spPr>
-        <p:txBody>
-          <a:bodyPr wrap="square" anchor="t" lIns="0" rIns="0" tIns="0" bIns="0">
-            <a:spAutoFit/>
-          </a:bodyPr>
-          <a:lstStyle/>
-          <a:p>
-            <a:pPr algn="l"/>
-            <a:r>
-              <a:rPr sz="1150" b="0" i="0">
-                <a:solidFill>
-                  <a:srgbClr val="22303F"/>
-                </a:solidFill>
-                <a:latin typeface="Consolas"/>
-                <a:ea typeface="Microsoft JhengHei"/>
-              </a:rPr>
-              <a:t>test_normalizer</a:t>
-            </a:r>
-          </a:p>
-        </p:txBody>
-      </p:sp>
-      <p:sp>
-        <p:nvSpPr>
-          <p:cNvPr id="30" name="TextBox 29"/>
-          <p:cNvSpPr txBox="1"/>
-          <p:nvPr/>
-        </p:nvSpPr>
-        <p:spPr>
-          <a:xfrm>
-            <a:off x="9857232" y="2761488"/>
-            <a:ext cx="1508760" cy="274320"/>
-          </a:xfrm>
-          <a:prstGeom prst="rect">
-            <a:avLst/>
-          </a:prstGeom>
-          <a:noFill/>
-        </p:spPr>
-        <p:txBody>
-          <a:bodyPr wrap="square" anchor="t" lIns="0" rIns="0" tIns="0" bIns="0">
-            <a:spAutoFit/>
-          </a:bodyPr>
-          <a:lstStyle/>
-          <a:p>
-            <a:pPr algn="r"/>
-            <a:r>
-              <a:rPr sz="1150" b="1" i="0">
-                <a:solidFill>
-                  <a:srgbClr val="0E8C8B"/>
-                </a:solidFill>
-                <a:latin typeface="Consolas"/>
-                <a:ea typeface="Microsoft JhengHei"/>
-              </a:rPr>
-              <a:t>17 / 17</a:t>
-            </a:r>
-          </a:p>
-        </p:txBody>
-      </p:sp>
-      <p:sp>
-        <p:nvSpPr>
-          <p:cNvPr id="31" name="Rectangle 30"/>
-          <p:cNvSpPr/>
-          <p:nvPr/>
-        </p:nvSpPr>
-        <p:spPr>
-          <a:xfrm>
-            <a:off x="6446520" y="3218688"/>
-            <a:ext cx="5102352" cy="457200"/>
-          </a:xfrm>
-          <a:prstGeom prst="rect">
-            <a:avLst/>
-          </a:prstGeom>
-          <a:solidFill>
-            <a:srgbClr val="FFFFFF"/>
-          </a:solidFill>
-          <a:ln w="6350">
-            <a:solidFill>
-              <a:srgbClr val="D8E1E7"/>
-            </a:solidFill>
-          </a:ln>
-          <a:effectLst/>
-        </p:spPr>
-        <p:style>
-          <a:lnRef idx="1">
-            <a:schemeClr val="accent1"/>
-          </a:lnRef>
-          <a:fillRef idx="3">
-            <a:schemeClr val="accent1"/>
-          </a:fillRef>
-          <a:effectRef idx="2">
-            <a:schemeClr val="accent1"/>
-          </a:effectRef>
-          <a:fontRef idx="minor">
-            <a:schemeClr val="lt1"/>
-          </a:fontRef>
-        </p:style>
-        <p:txBody>
-          <a:bodyPr rtlCol="0" anchor="ctr"/>
-          <a:lstStyle/>
-          <a:p>
-            <a:pPr algn="ctr"/>
-          </a:p>
-        </p:txBody>
-      </p:sp>
-      <p:sp>
-        <p:nvSpPr>
-          <p:cNvPr id="32" name="TextBox 31"/>
-          <p:cNvSpPr txBox="1"/>
-          <p:nvPr/>
-        </p:nvSpPr>
-        <p:spPr>
-          <a:xfrm>
-            <a:off x="6629400" y="3310128"/>
-            <a:ext cx="3291840" cy="274320"/>
-          </a:xfrm>
-          <a:prstGeom prst="rect">
-            <a:avLst/>
-          </a:prstGeom>
-          <a:noFill/>
-        </p:spPr>
-        <p:txBody>
-          <a:bodyPr wrap="square" anchor="t" lIns="0" rIns="0" tIns="0" bIns="0">
-            <a:spAutoFit/>
-          </a:bodyPr>
-          <a:lstStyle/>
-          <a:p>
-            <a:pPr algn="l"/>
-            <a:r>
-              <a:rPr sz="1150" b="0" i="0">
-                <a:solidFill>
-                  <a:srgbClr val="22303F"/>
-                </a:solidFill>
-                <a:latin typeface="Consolas"/>
-                <a:ea typeface="Microsoft JhengHei"/>
-              </a:rPr>
-              <a:t>test_extreme</a:t>
-            </a:r>
-          </a:p>
-        </p:txBody>
-      </p:sp>
-      <p:sp>
-        <p:nvSpPr>
-          <p:cNvPr id="33" name="TextBox 32"/>
-          <p:cNvSpPr txBox="1"/>
-          <p:nvPr/>
-        </p:nvSpPr>
-        <p:spPr>
-          <a:xfrm>
-            <a:off x="9857232" y="3310128"/>
-            <a:ext cx="1508760" cy="274320"/>
-          </a:xfrm>
-          <a:prstGeom prst="rect">
-            <a:avLst/>
-          </a:prstGeom>
-          <a:noFill/>
-        </p:spPr>
-        <p:txBody>
-          <a:bodyPr wrap="square" anchor="t" lIns="0" rIns="0" tIns="0" bIns="0">
-            <a:spAutoFit/>
-          </a:bodyPr>
-          <a:lstStyle/>
-          <a:p>
-            <a:pPr algn="r"/>
-            <a:r>
-              <a:rPr sz="1150" b="1" i="0">
-                <a:solidFill>
-                  <a:srgbClr val="0E8C8B"/>
-                </a:solidFill>
-                <a:latin typeface="Consolas"/>
-                <a:ea typeface="Microsoft JhengHei"/>
-              </a:rPr>
-              <a:t>139 / 139</a:t>
-            </a:r>
-          </a:p>
-        </p:txBody>
-      </p:sp>
-      <p:sp>
-        <p:nvSpPr>
-          <p:cNvPr id="34" name="Rectangle 33"/>
-          <p:cNvSpPr/>
-          <p:nvPr/>
-        </p:nvSpPr>
-        <p:spPr>
-          <a:xfrm>
-            <a:off x="6446520" y="3767328"/>
-            <a:ext cx="5102352" cy="457200"/>
-          </a:xfrm>
-          <a:prstGeom prst="rect">
-            <a:avLst/>
-          </a:prstGeom>
-          <a:solidFill>
-            <a:srgbClr val="F3F7F9"/>
-          </a:solidFill>
-          <a:ln w="6350">
-            <a:solidFill>
-              <a:srgbClr val="D8E1E7"/>
-            </a:solidFill>
-          </a:ln>
-          <a:effectLst/>
-        </p:spPr>
-        <p:style>
-          <a:lnRef idx="1">
-            <a:schemeClr val="accent1"/>
-          </a:lnRef>
-          <a:fillRef idx="3">
-            <a:schemeClr val="accent1"/>
-          </a:fillRef>
-          <a:effectRef idx="2">
-            <a:schemeClr val="accent1"/>
-          </a:effectRef>
-          <a:fontRef idx="minor">
-            <a:schemeClr val="lt1"/>
-          </a:fontRef>
-        </p:style>
-        <p:txBody>
-          <a:bodyPr rtlCol="0" anchor="ctr"/>
-          <a:lstStyle/>
-          <a:p>
-            <a:pPr algn="ctr"/>
-          </a:p>
-        </p:txBody>
-      </p:sp>
-      <p:sp>
-        <p:nvSpPr>
-          <p:cNvPr id="35" name="TextBox 34"/>
-          <p:cNvSpPr txBox="1"/>
-          <p:nvPr/>
-        </p:nvSpPr>
-        <p:spPr>
-          <a:xfrm>
-            <a:off x="6629400" y="3858768"/>
-            <a:ext cx="3291840" cy="274320"/>
-          </a:xfrm>
-          <a:prstGeom prst="rect">
-            <a:avLst/>
-          </a:prstGeom>
-          <a:noFill/>
-        </p:spPr>
-        <p:txBody>
-          <a:bodyPr wrap="square" anchor="t" lIns="0" rIns="0" tIns="0" bIns="0">
-            <a:spAutoFit/>
-          </a:bodyPr>
-          <a:lstStyle/>
-          <a:p>
-            <a:pPr algn="l"/>
-            <a:r>
-              <a:rPr sz="1150" b="0" i="0">
-                <a:solidFill>
-                  <a:srgbClr val="22303F"/>
-                </a:solidFill>
-                <a:latin typeface="Consolas"/>
-                <a:ea typeface="Microsoft JhengHei"/>
-              </a:rPr>
-              <a:t>test_scale</a:t>
-            </a:r>
-          </a:p>
-        </p:txBody>
-      </p:sp>
-      <p:sp>
-        <p:nvSpPr>
-          <p:cNvPr id="36" name="TextBox 35"/>
-          <p:cNvSpPr txBox="1"/>
-          <p:nvPr/>
-        </p:nvSpPr>
-        <p:spPr>
-          <a:xfrm>
-            <a:off x="9857232" y="3858768"/>
-            <a:ext cx="1508760" cy="274320"/>
-          </a:xfrm>
-          <a:prstGeom prst="rect">
-            <a:avLst/>
-          </a:prstGeom>
-          <a:noFill/>
-        </p:spPr>
-        <p:txBody>
-          <a:bodyPr wrap="square" anchor="t" lIns="0" rIns="0" tIns="0" bIns="0">
-            <a:spAutoFit/>
-          </a:bodyPr>
-          <a:lstStyle/>
-          <a:p>
-            <a:pPr algn="r"/>
-            <a:r>
-              <a:rPr sz="1150" b="1" i="0">
-                <a:solidFill>
-                  <a:srgbClr val="0E8C8B"/>
-                </a:solidFill>
-                <a:latin typeface="Consolas"/>
-                <a:ea typeface="Microsoft JhengHei"/>
-              </a:rPr>
-              <a:t>31 / 31</a:t>
-            </a:r>
-          </a:p>
-        </p:txBody>
-      </p:sp>
-      <p:sp>
-        <p:nvSpPr>
-          <p:cNvPr id="37" name="Rectangle 36"/>
-          <p:cNvSpPr/>
-          <p:nvPr/>
-        </p:nvSpPr>
-        <p:spPr>
-          <a:xfrm>
-            <a:off x="6446520" y="4315968"/>
-            <a:ext cx="5102352" cy="457200"/>
-          </a:xfrm>
-          <a:prstGeom prst="rect">
-            <a:avLst/>
-          </a:prstGeom>
-          <a:solidFill>
-            <a:srgbClr val="FFFFFF"/>
-          </a:solidFill>
-          <a:ln w="6350">
-            <a:solidFill>
-              <a:srgbClr val="D8E1E7"/>
-            </a:solidFill>
-          </a:ln>
-          <a:effectLst/>
-        </p:spPr>
-        <p:style>
-          <a:lnRef idx="1">
-            <a:schemeClr val="accent1"/>
-          </a:lnRef>
-          <a:fillRef idx="3">
-            <a:schemeClr val="accent1"/>
-          </a:fillRef>
-          <a:effectRef idx="2">
-            <a:schemeClr val="accent1"/>
-          </a:effectRef>
-          <a:fontRef idx="minor">
-            <a:schemeClr val="lt1"/>
-          </a:fontRef>
-        </p:style>
-        <p:txBody>
-          <a:bodyPr rtlCol="0" anchor="ctr"/>
-          <a:lstStyle/>
-          <a:p>
-            <a:pPr algn="ctr"/>
-          </a:p>
-        </p:txBody>
-      </p:sp>
-      <p:sp>
-        <p:nvSpPr>
-          <p:cNvPr id="38" name="TextBox 37"/>
-          <p:cNvSpPr txBox="1"/>
-          <p:nvPr/>
-        </p:nvSpPr>
-        <p:spPr>
-          <a:xfrm>
-            <a:off x="6629400" y="4407407"/>
-            <a:ext cx="3291840" cy="274320"/>
-          </a:xfrm>
-          <a:prstGeom prst="rect">
-            <a:avLst/>
-          </a:prstGeom>
-          <a:noFill/>
-        </p:spPr>
-        <p:txBody>
-          <a:bodyPr wrap="square" anchor="t" lIns="0" rIns="0" tIns="0" bIns="0">
-            <a:spAutoFit/>
-          </a:bodyPr>
-          <a:lstStyle/>
-          <a:p>
-            <a:pPr algn="l"/>
-            <a:r>
-              <a:rPr sz="1150" b="0" i="0">
-                <a:solidFill>
-                  <a:srgbClr val="22303F"/>
-                </a:solidFill>
-                <a:latin typeface="Consolas"/>
-                <a:ea typeface="Microsoft JhengHei"/>
-              </a:rPr>
-              <a:t>test_weakness</a:t>
-            </a:r>
-          </a:p>
-        </p:txBody>
-      </p:sp>
-      <p:sp>
-        <p:nvSpPr>
-          <p:cNvPr id="39" name="TextBox 38"/>
-          <p:cNvSpPr txBox="1"/>
-          <p:nvPr/>
-        </p:nvSpPr>
-        <p:spPr>
-          <a:xfrm>
-            <a:off x="9857232" y="4407407"/>
-            <a:ext cx="1508760" cy="274320"/>
-          </a:xfrm>
-          <a:prstGeom prst="rect">
-            <a:avLst/>
-          </a:prstGeom>
-          <a:noFill/>
-        </p:spPr>
-        <p:txBody>
-          <a:bodyPr wrap="square" anchor="t" lIns="0" rIns="0" tIns="0" bIns="0">
-            <a:spAutoFit/>
-          </a:bodyPr>
-          <a:lstStyle/>
-          <a:p>
-            <a:pPr algn="r"/>
-            <a:r>
-              <a:rPr sz="1150" b="1" i="0">
-                <a:solidFill>
-                  <a:srgbClr val="0E8C8B"/>
-                </a:solidFill>
-                <a:latin typeface="Consolas"/>
-                <a:ea typeface="Microsoft JhengHei"/>
-              </a:rPr>
-              <a:t>43 / 43</a:t>
-            </a:r>
-          </a:p>
-        </p:txBody>
-      </p:sp>
-      <p:sp>
-        <p:nvSpPr>
-          <p:cNvPr id="40" name="Rectangle 39"/>
-          <p:cNvSpPr/>
-          <p:nvPr/>
-        </p:nvSpPr>
-        <p:spPr>
-          <a:xfrm>
-            <a:off x="6446520" y="4864608"/>
-            <a:ext cx="5102352" cy="457200"/>
-          </a:xfrm>
-          <a:prstGeom prst="rect">
-            <a:avLst/>
-          </a:prstGeom>
-          <a:solidFill>
-            <a:srgbClr val="F3F7F9"/>
-          </a:solidFill>
-          <a:ln w="6350">
-            <a:solidFill>
-              <a:srgbClr val="D8E1E7"/>
-            </a:solidFill>
-          </a:ln>
-          <a:effectLst/>
-        </p:spPr>
-        <p:style>
-          <a:lnRef idx="1">
-            <a:schemeClr val="accent1"/>
-          </a:lnRef>
-          <a:fillRef idx="3">
-            <a:schemeClr val="accent1"/>
-          </a:fillRef>
-          <a:effectRef idx="2">
-            <a:schemeClr val="accent1"/>
-          </a:effectRef>
-          <a:fontRef idx="minor">
-            <a:schemeClr val="lt1"/>
-          </a:fontRef>
-        </p:style>
-        <p:txBody>
-          <a:bodyPr rtlCol="0" anchor="ctr"/>
-          <a:lstStyle/>
-          <a:p>
-            <a:pPr algn="ctr"/>
-          </a:p>
-        </p:txBody>
-      </p:sp>
-      <p:sp>
-        <p:nvSpPr>
-          <p:cNvPr id="41" name="TextBox 40"/>
-          <p:cNvSpPr txBox="1"/>
-          <p:nvPr/>
-        </p:nvSpPr>
-        <p:spPr>
-          <a:xfrm>
-            <a:off x="6629400" y="4956048"/>
-            <a:ext cx="3291840" cy="274320"/>
-          </a:xfrm>
-          <a:prstGeom prst="rect">
-            <a:avLst/>
-          </a:prstGeom>
-          <a:noFill/>
-        </p:spPr>
-        <p:txBody>
-          <a:bodyPr wrap="square" anchor="t" lIns="0" rIns="0" tIns="0" bIns="0">
-            <a:spAutoFit/>
-          </a:bodyPr>
-          <a:lstStyle/>
-          <a:p>
-            <a:pPr algn="l"/>
-            <a:r>
-              <a:rPr sz="1150" b="0" i="0">
-                <a:solidFill>
-                  <a:srgbClr val="22303F"/>
-                </a:solidFill>
-                <a:latin typeface="Consolas"/>
-                <a:ea typeface="Microsoft JhengHei"/>
-              </a:rPr>
-              <a:t>test_regression2 – 6</a:t>
-            </a:r>
-          </a:p>
-        </p:txBody>
-      </p:sp>
-      <p:sp>
-        <p:nvSpPr>
-          <p:cNvPr id="42" name="TextBox 41"/>
-          <p:cNvSpPr txBox="1"/>
-          <p:nvPr/>
-        </p:nvSpPr>
-        <p:spPr>
-          <a:xfrm>
-            <a:off x="9857232" y="4956048"/>
-            <a:ext cx="1508760" cy="274320"/>
-          </a:xfrm>
-          <a:prstGeom prst="rect">
-            <a:avLst/>
-          </a:prstGeom>
-          <a:noFill/>
-        </p:spPr>
-        <p:txBody>
-          <a:bodyPr wrap="square" anchor="t" lIns="0" rIns="0" tIns="0" bIns="0">
-            <a:spAutoFit/>
-          </a:bodyPr>
-          <a:lstStyle/>
-          <a:p>
-            <a:pPr algn="r"/>
-            <a:r>
-              <a:rPr sz="1150" b="1" i="0">
-                <a:solidFill>
-                  <a:srgbClr val="0E8C8B"/>
-                </a:solidFill>
-                <a:latin typeface="Consolas"/>
-                <a:ea typeface="Microsoft JhengHei"/>
-              </a:rPr>
-              <a:t>372 / 372</a:t>
-            </a:r>
-          </a:p>
-        </p:txBody>
-      </p:sp>
-      <p:sp>
-        <p:nvSpPr>
-          <p:cNvPr id="43" name="Rectangle 42"/>
-          <p:cNvSpPr/>
-          <p:nvPr/>
-        </p:nvSpPr>
-        <p:spPr>
-          <a:xfrm>
-            <a:off x="6446520" y="5413248"/>
-            <a:ext cx="5102352" cy="512064"/>
-          </a:xfrm>
-          <a:prstGeom prst="rect">
-            <a:avLst/>
-          </a:prstGeom>
-          <a:solidFill>
-            <a:srgbClr val="1B2A41"/>
-          </a:solidFill>
-          <a:ln>
-            <a:noFill/>
-          </a:ln>
-          <a:effectLst/>
-        </p:spPr>
-        <p:style>
-          <a:lnRef idx="1">
-            <a:schemeClr val="accent1"/>
-          </a:lnRef>
-          <a:fillRef idx="3">
-            <a:schemeClr val="accent1"/>
-          </a:fillRef>
-          <a:effectRef idx="2">
-            <a:schemeClr val="accent1"/>
-          </a:effectRef>
-          <a:fontRef idx="minor">
-            <a:schemeClr val="lt1"/>
-          </a:fontRef>
-        </p:style>
-        <p:txBody>
-          <a:bodyPr rtlCol="0" anchor="ctr"/>
-          <a:lstStyle/>
-          <a:p>
-            <a:pPr algn="ctr"/>
-          </a:p>
-        </p:txBody>
-      </p:sp>
-      <p:sp>
-        <p:nvSpPr>
-          <p:cNvPr id="44" name="TextBox 43"/>
-          <p:cNvSpPr txBox="1"/>
-          <p:nvPr/>
-        </p:nvSpPr>
-        <p:spPr>
-          <a:xfrm>
-            <a:off x="6629400" y="5522976"/>
-            <a:ext cx="3291840" cy="274320"/>
-          </a:xfrm>
-          <a:prstGeom prst="rect">
-            <a:avLst/>
-          </a:prstGeom>
-          <a:noFill/>
-        </p:spPr>
-        <p:txBody>
-          <a:bodyPr wrap="square" anchor="t" lIns="0" rIns="0" tIns="0" bIns="0">
-            <a:spAutoFit/>
-          </a:bodyPr>
-          <a:lstStyle/>
-          <a:p>
-            <a:pPr algn="l"/>
-            <a:r>
-              <a:rPr sz="1200" b="1" i="0">
-                <a:solidFill>
-                  <a:srgbClr val="FFFFFF"/>
-                </a:solidFill>
-                <a:latin typeface="Microsoft JhengHei"/>
-                <a:ea typeface="Microsoft JhengHei"/>
-              </a:rPr>
-              <a:t>合計</a:t>
-            </a:r>
-          </a:p>
-        </p:txBody>
-      </p:sp>
-      <p:sp>
-        <p:nvSpPr>
-          <p:cNvPr id="45" name="TextBox 44"/>
-          <p:cNvSpPr txBox="1"/>
-          <p:nvPr/>
-        </p:nvSpPr>
-        <p:spPr>
-          <a:xfrm>
-            <a:off x="9857232" y="5522976"/>
-            <a:ext cx="1508760" cy="274320"/>
-          </a:xfrm>
-          <a:prstGeom prst="rect">
-            <a:avLst/>
-          </a:prstGeom>
-          <a:noFill/>
-        </p:spPr>
-        <p:txBody>
-          <a:bodyPr wrap="square" anchor="t" lIns="0" rIns="0" tIns="0" bIns="0">
-            <a:spAutoFit/>
-          </a:bodyPr>
-          <a:lstStyle/>
-          <a:p>
-            <a:pPr algn="r"/>
-            <a:r>
-              <a:rPr sz="1200" b="1" i="0">
-                <a:solidFill>
-                  <a:srgbClr val="3FD0B6"/>
-                </a:solidFill>
-                <a:latin typeface="Consolas"/>
-                <a:ea typeface="Microsoft JhengHei"/>
-              </a:rPr>
-              <a:t>602 / 602</a:t>
-            </a:r>
-          </a:p>
-        </p:txBody>
-      </p:sp>
-      <p:sp>
-        <p:nvSpPr>
-          <p:cNvPr id="46" name="TextBox 45"/>
-          <p:cNvSpPr txBox="1"/>
-          <p:nvPr/>
-        </p:nvSpPr>
-        <p:spPr>
-          <a:xfrm>
-            <a:off x="640080" y="6473952"/>
-            <a:ext cx="7315200" cy="274320"/>
-          </a:xfrm>
-          <a:prstGeom prst="rect">
-            <a:avLst/>
-          </a:prstGeom>
-          <a:noFill/>
-        </p:spPr>
-        <p:txBody>
-          <a:bodyPr wrap="square" anchor="t" lIns="0" rIns="0" tIns="0" bIns="0">
-            <a:spAutoFit/>
-          </a:bodyPr>
-          <a:lstStyle/>
-          <a:p>
-            <a:pPr algn="l"/>
-            <a:r>
-              <a:rPr sz="900" b="0" i="0">
-                <a:solidFill>
-                  <a:srgbClr val="5F6E7D"/>
-                </a:solidFill>
-                <a:latin typeface="Consolas"/>
-                <a:ea typeface="Microsoft JhengHei"/>
-              </a:rPr>
-              <a:t>Clawer C Data Normalization Engine — b11402037 · b11402053</a:t>
-            </a:r>
-          </a:p>
-        </p:txBody>
-      </p:sp>
-      <p:sp>
-        <p:nvSpPr>
-          <p:cNvPr id="47" name="TextBox 46"/>
-          <p:cNvSpPr txBox="1"/>
-          <p:nvPr/>
-        </p:nvSpPr>
-        <p:spPr>
-          <a:xfrm>
-            <a:off x="10607040" y="6473952"/>
-            <a:ext cx="941832" cy="274320"/>
-          </a:xfrm>
-          <a:prstGeom prst="rect">
-            <a:avLst/>
-          </a:prstGeom>
-          <a:noFill/>
-        </p:spPr>
-        <p:txBody>
-          <a:bodyPr wrap="square" anchor="t" lIns="0" rIns="0" tIns="0" bIns="0">
-            <a:spAutoFit/>
-          </a:bodyPr>
-          <a:lstStyle/>
-          <a:p>
-            <a:pPr algn="r"/>
-            <a:r>
-              <a:rPr sz="900" b="0" i="0">
-                <a:solidFill>
-                  <a:srgbClr val="5F6E7D"/>
-                </a:solidFill>
-                <a:latin typeface="Consolas"/>
-                <a:ea typeface="Microsoft JhengHei"/>
-              </a:rPr>
-              <a:t>7 / 9</a:t>
+              <a:t>7 / 10</a:t>
             </a:r>
           </a:p>
         </p:txBody>
@@ -12233,7 +11835,7 @@
                 <a:latin typeface="Consolas"/>
                 <a:ea typeface="Microsoft JhengHei"/>
               </a:rPr>
-              <a:t>04 · CONCLUSION</a:t>
+              <a:t>03 · IMPLEMENTATION</a:t>
             </a:r>
           </a:p>
         </p:txBody>
@@ -12269,69 +11871,21 @@
                 <a:latin typeface="Microsoft JhengHei"/>
                 <a:ea typeface="Microsoft JhengHei"/>
               </a:rPr>
-              <a:t>結論 — 成果、限制與未來工作</a:t>
-            </a:r>
-          </a:p>
-        </p:txBody>
-      </p:sp>
-      <p:sp>
-        <p:nvSpPr>
-          <p:cNvPr id="5" name="Rounded Rectangle 4"/>
+              <a:t>實作 — 弱點導向測試與驗證</a:t>
+            </a:r>
+          </a:p>
+        </p:txBody>
+      </p:sp>
+      <p:sp>
+        <p:nvSpPr>
+          <p:cNvPr id="5" name="Rectangle 4"/>
           <p:cNvSpPr/>
           <p:nvPr/>
         </p:nvSpPr>
         <p:spPr>
           <a:xfrm>
-            <a:off x="640080" y="1481328"/>
-            <a:ext cx="3511296" cy="3931920"/>
-          </a:xfrm>
-          <a:prstGeom prst="roundRect">
-            <a:avLst>
-              <a:gd name="adj" fmla="val 5000"/>
-            </a:avLst>
-          </a:prstGeom>
-          <a:solidFill>
-            <a:srgbClr val="F3F7F9"/>
-          </a:solidFill>
-          <a:ln w="9525">
-            <a:solidFill>
-              <a:srgbClr val="D8E1E7"/>
-            </a:solidFill>
-          </a:ln>
-          <a:effectLst/>
-        </p:spPr>
-        <p:style>
-          <a:lnRef idx="1">
-            <a:schemeClr val="accent1"/>
-          </a:lnRef>
-          <a:fillRef idx="3">
-            <a:schemeClr val="accent1"/>
-          </a:fillRef>
-          <a:effectRef idx="2">
-            <a:schemeClr val="accent1"/>
-          </a:effectRef>
-          <a:fontRef idx="minor">
-            <a:schemeClr val="lt1"/>
-          </a:fontRef>
-        </p:style>
-        <p:txBody>
-          <a:bodyPr rtlCol="0" anchor="ctr"/>
-          <a:lstStyle/>
-          <a:p>
-            <a:pPr algn="ctr"/>
-          </a:p>
-        </p:txBody>
-      </p:sp>
-      <p:sp>
-        <p:nvSpPr>
-          <p:cNvPr id="6" name="Rectangle 5"/>
-          <p:cNvSpPr/>
-          <p:nvPr/>
-        </p:nvSpPr>
-        <p:spPr>
-          <a:xfrm>
-            <a:off x="640080" y="1481328"/>
-            <a:ext cx="3511296" cy="566928"/>
+            <a:off x="640080" y="1490472"/>
+            <a:ext cx="118872" cy="118872"/>
           </a:xfrm>
           <a:prstGeom prst="rect">
             <a:avLst/>
@@ -12368,14 +11922,14 @@
       </p:sp>
       <p:sp>
         <p:nvSpPr>
-          <p:cNvPr id="7" name="TextBox 6"/>
+          <p:cNvPr id="6" name="TextBox 5"/>
           <p:cNvSpPr txBox="1"/>
           <p:nvPr/>
         </p:nvSpPr>
         <p:spPr>
           <a:xfrm>
-            <a:off x="868680" y="1609344"/>
-            <a:ext cx="3054096" cy="310896"/>
+            <a:off x="859536" y="1403604"/>
+            <a:ext cx="5486400" cy="310896"/>
           </a:xfrm>
           <a:prstGeom prst="rect">
             <a:avLst/>
@@ -12390,403 +11944,33 @@
           <a:p>
             <a:pPr algn="l"/>
             <a:r>
-              <a:rPr sz="1450" b="1" i="0">
-                <a:solidFill>
-                  <a:srgbClr val="FFFFFF"/>
+              <a:rPr sz="1550" b="1" i="0">
+                <a:solidFill>
+                  <a:srgbClr val="22303F"/>
                 </a:solidFill>
                 <a:latin typeface="Microsoft JhengHei"/>
                 <a:ea typeface="Microsoft JhengHei"/>
               </a:rPr>
-              <a:t>主要成果</a:t>
-            </a:r>
-          </a:p>
-        </p:txBody>
-      </p:sp>
-      <p:sp>
-        <p:nvSpPr>
-          <p:cNvPr id="8" name="TextBox 7"/>
-          <p:cNvSpPr txBox="1"/>
-          <p:nvPr/>
-        </p:nvSpPr>
-        <p:spPr>
-          <a:xfrm>
-            <a:off x="896112" y="2286000"/>
-            <a:ext cx="2999232" cy="3017520"/>
-          </a:xfrm>
-          <a:prstGeom prst="rect">
-            <a:avLst/>
-          </a:prstGeom>
-          <a:noFill/>
-        </p:spPr>
-        <p:txBody>
-          <a:bodyPr wrap="square" anchor="t" lIns="0" rIns="0" tIns="0" bIns="0">
-            <a:spAutoFit/>
-          </a:bodyPr>
-          <a:lstStyle/>
-          <a:p>
-            <a:pPr algn="l" marL="164592" indent="-164592">
-              <a:lnSpc>
-                <a:spcPct val="122000"/>
-              </a:lnSpc>
-              <a:spcAft>
-                <a:spcPts val="1000"/>
-              </a:spcAft>
-              <a:buClr>
-                <a:srgbClr val="0E8C8B"/>
-              </a:buClr>
-              <a:buFont typeface="Arial"/>
-              <a:buChar char="▪"/>
-            </a:pPr>
-            <a:r>
-              <a:rPr sz="1150" b="0" i="0">
-                <a:solidFill>
-                  <a:srgbClr val="22303F"/>
-                </a:solidFill>
-                <a:latin typeface="Microsoft JhengHei"/>
-                <a:ea typeface="Microsoft JhengHei"/>
-              </a:rPr>
-              <a:t>完成 C11 正規化引擎：reader → 四大解析模組 → writer 完整 pipeline</a:t>
-            </a:r>
-          </a:p>
-          <a:p>
-            <a:pPr algn="l" marL="164592" indent="-164592">
-              <a:lnSpc>
-                <a:spcPct val="122000"/>
-              </a:lnSpc>
-              <a:spcAft>
-                <a:spcPts val="1000"/>
-              </a:spcAft>
-              <a:buClr>
-                <a:srgbClr val="0E8C8B"/>
-              </a:buClr>
-              <a:buFont typeface="Arial"/>
-              <a:buChar char="▪"/>
-            </a:pPr>
-            <a:r>
-              <a:rPr sz="1150" b="0" i="0">
-                <a:solidFill>
-                  <a:srgbClr val="22303F"/>
-                </a:solidFill>
-                <a:latin typeface="Microsoft JhengHei"/>
-                <a:ea typeface="Microsoft JhengHei"/>
-              </a:rPr>
-              <a:t>602 項單元／回歸測試全數通過，涵蓋極端值、規模與弱點情境</a:t>
-            </a:r>
-          </a:p>
-          <a:p>
-            <a:pPr algn="l" marL="164592" indent="-164592">
-              <a:lnSpc>
-                <a:spcPct val="122000"/>
-              </a:lnSpc>
-              <a:spcAft>
-                <a:spcPts val="1000"/>
-              </a:spcAft>
-              <a:buClr>
-                <a:srgbClr val="0E8C8B"/>
-              </a:buClr>
-              <a:buFont typeface="Arial"/>
-              <a:buChar char="▪"/>
-            </a:pPr>
-            <a:r>
-              <a:rPr sz="1150" b="0" i="0">
-                <a:solidFill>
-                  <a:srgbClr val="22303F"/>
-                </a:solidFill>
-                <a:latin typeface="Microsoft JhengHei"/>
-                <a:ea typeface="Microsoft JhengHei"/>
-              </a:rPr>
-              <a:t>6 輪弱點導向修正（A–T 共 17 項）建立回歸防護網</a:t>
-            </a:r>
-          </a:p>
-        </p:txBody>
-      </p:sp>
-      <p:sp>
-        <p:nvSpPr>
-          <p:cNvPr id="9" name="Rounded Rectangle 8"/>
+              <a:t>測試方法論（每輪 Session）</a:t>
+            </a:r>
+          </a:p>
+        </p:txBody>
+      </p:sp>
+      <p:sp>
+        <p:nvSpPr>
+          <p:cNvPr id="7" name="Rounded Rectangle 6"/>
           <p:cNvSpPr/>
           <p:nvPr/>
         </p:nvSpPr>
         <p:spPr>
           <a:xfrm>
-            <a:off x="4334256" y="1481328"/>
-            <a:ext cx="3511296" cy="3931920"/>
+            <a:off x="640080" y="1847088"/>
+            <a:ext cx="475488" cy="475488"/>
           </a:xfrm>
           <a:prstGeom prst="roundRect">
             <a:avLst>
-              <a:gd name="adj" fmla="val 5000"/>
+              <a:gd name="adj" fmla="val 14000"/>
             </a:avLst>
-          </a:prstGeom>
-          <a:solidFill>
-            <a:srgbClr val="F3F7F9"/>
-          </a:solidFill>
-          <a:ln w="9525">
-            <a:solidFill>
-              <a:srgbClr val="D8E1E7"/>
-            </a:solidFill>
-          </a:ln>
-          <a:effectLst/>
-        </p:spPr>
-        <p:style>
-          <a:lnRef idx="1">
-            <a:schemeClr val="accent1"/>
-          </a:lnRef>
-          <a:fillRef idx="3">
-            <a:schemeClr val="accent1"/>
-          </a:fillRef>
-          <a:effectRef idx="2">
-            <a:schemeClr val="accent1"/>
-          </a:effectRef>
-          <a:fontRef idx="minor">
-            <a:schemeClr val="lt1"/>
-          </a:fontRef>
-        </p:style>
-        <p:txBody>
-          <a:bodyPr rtlCol="0" anchor="ctr"/>
-          <a:lstStyle/>
-          <a:p>
-            <a:pPr algn="ctr"/>
-          </a:p>
-        </p:txBody>
-      </p:sp>
-      <p:sp>
-        <p:nvSpPr>
-          <p:cNvPr id="10" name="Rectangle 9"/>
-          <p:cNvSpPr/>
-          <p:nvPr/>
-        </p:nvSpPr>
-        <p:spPr>
-          <a:xfrm>
-            <a:off x="4334256" y="1481328"/>
-            <a:ext cx="3511296" cy="566928"/>
-          </a:xfrm>
-          <a:prstGeom prst="rect">
-            <a:avLst/>
-          </a:prstGeom>
-          <a:solidFill>
-            <a:srgbClr val="C0564A"/>
-          </a:solidFill>
-          <a:ln>
-            <a:noFill/>
-          </a:ln>
-          <a:effectLst/>
-        </p:spPr>
-        <p:style>
-          <a:lnRef idx="1">
-            <a:schemeClr val="accent1"/>
-          </a:lnRef>
-          <a:fillRef idx="3">
-            <a:schemeClr val="accent1"/>
-          </a:fillRef>
-          <a:effectRef idx="2">
-            <a:schemeClr val="accent1"/>
-          </a:effectRef>
-          <a:fontRef idx="minor">
-            <a:schemeClr val="lt1"/>
-          </a:fontRef>
-        </p:style>
-        <p:txBody>
-          <a:bodyPr rtlCol="0" anchor="ctr"/>
-          <a:lstStyle/>
-          <a:p>
-            <a:pPr algn="ctr"/>
-          </a:p>
-        </p:txBody>
-      </p:sp>
-      <p:sp>
-        <p:nvSpPr>
-          <p:cNvPr id="11" name="TextBox 10"/>
-          <p:cNvSpPr txBox="1"/>
-          <p:nvPr/>
-        </p:nvSpPr>
-        <p:spPr>
-          <a:xfrm>
-            <a:off x="4562856" y="1609344"/>
-            <a:ext cx="3054096" cy="310896"/>
-          </a:xfrm>
-          <a:prstGeom prst="rect">
-            <a:avLst/>
-          </a:prstGeom>
-          <a:noFill/>
-        </p:spPr>
-        <p:txBody>
-          <a:bodyPr wrap="square" anchor="t" lIns="0" rIns="0" tIns="0" bIns="0">
-            <a:spAutoFit/>
-          </a:bodyPr>
-          <a:lstStyle/>
-          <a:p>
-            <a:pPr algn="l"/>
-            <a:r>
-              <a:rPr sz="1450" b="1" i="0">
-                <a:solidFill>
-                  <a:srgbClr val="FFFFFF"/>
-                </a:solidFill>
-                <a:latin typeface="Microsoft JhengHei"/>
-                <a:ea typeface="Microsoft JhengHei"/>
-              </a:rPr>
-              <a:t>已知限制</a:t>
-            </a:r>
-          </a:p>
-        </p:txBody>
-      </p:sp>
-      <p:sp>
-        <p:nvSpPr>
-          <p:cNvPr id="12" name="TextBox 11"/>
-          <p:cNvSpPr txBox="1"/>
-          <p:nvPr/>
-        </p:nvSpPr>
-        <p:spPr>
-          <a:xfrm>
-            <a:off x="4590288" y="2286000"/>
-            <a:ext cx="2999232" cy="3017520"/>
-          </a:xfrm>
-          <a:prstGeom prst="rect">
-            <a:avLst/>
-          </a:prstGeom>
-          <a:noFill/>
-        </p:spPr>
-        <p:txBody>
-          <a:bodyPr wrap="square" anchor="t" lIns="0" rIns="0" tIns="0" bIns="0">
-            <a:spAutoFit/>
-          </a:bodyPr>
-          <a:lstStyle/>
-          <a:p>
-            <a:pPr algn="l" marL="164592" indent="-164592">
-              <a:lnSpc>
-                <a:spcPct val="122000"/>
-              </a:lnSpc>
-              <a:spcAft>
-                <a:spcPts val="1000"/>
-              </a:spcAft>
-              <a:buClr>
-                <a:srgbClr val="C0564A"/>
-              </a:buClr>
-              <a:buFont typeface="Arial"/>
-              <a:buChar char="▪"/>
-            </a:pPr>
-            <a:r>
-              <a:rPr sz="1150" b="0" i="0">
-                <a:solidFill>
-                  <a:srgbClr val="22303F"/>
-                </a:solidFill>
-                <a:latin typeface="Microsoft JhengHei"/>
-                <a:ea typeface="Microsoft JhengHei"/>
-              </a:rPr>
-              <a:t>ASCII-only：É / ä / ã 等非 ASCII 字元直接傳遞，不做 Unicode 正規化</a:t>
-            </a:r>
-          </a:p>
-          <a:p>
-            <a:pPr algn="l" marL="164592" indent="-164592">
-              <a:lnSpc>
-                <a:spcPct val="122000"/>
-              </a:lnSpc>
-              <a:spcAft>
-                <a:spcPts val="1000"/>
-              </a:spcAft>
-              <a:buClr>
-                <a:srgbClr val="C0564A"/>
-              </a:buClr>
-              <a:buFont typeface="Arial"/>
-              <a:buChar char="▪"/>
-            </a:pPr>
-            <a:r>
-              <a:rPr sz="1150" b="0" i="0">
-                <a:solidFill>
-                  <a:srgbClr val="22303F"/>
-                </a:solidFill>
-                <a:latin typeface="Microsoft JhengHei"/>
-                <a:ea typeface="Microsoft JhengHei"/>
-              </a:rPr>
-              <a:t>requirement_parser 尚未實作（GMAT / GRE / GPA / IELTS / TOEFL / Duolingo）</a:t>
-            </a:r>
-          </a:p>
-          <a:p>
-            <a:pPr algn="l" marL="164592" indent="-164592">
-              <a:lnSpc>
-                <a:spcPct val="122000"/>
-              </a:lnSpc>
-              <a:spcAft>
-                <a:spcPts val="1000"/>
-              </a:spcAft>
-              <a:buClr>
-                <a:srgbClr val="C0564A"/>
-              </a:buClr>
-              <a:buFont typeface="Arial"/>
-              <a:buChar char="▪"/>
-            </a:pPr>
-            <a:r>
-              <a:rPr sz="1150" b="0" i="0">
-                <a:solidFill>
-                  <a:srgbClr val="22303F"/>
-                </a:solidFill>
-                <a:latin typeface="Microsoft JhengHei"/>
-                <a:ea typeface="Microsoft JhengHei"/>
-              </a:rPr>
-              <a:t>%.2f 捨入：99.999 輸出為 100.00（超出滿分）</a:t>
-            </a:r>
-          </a:p>
-        </p:txBody>
-      </p:sp>
-      <p:sp>
-        <p:nvSpPr>
-          <p:cNvPr id="13" name="Rounded Rectangle 12"/>
-          <p:cNvSpPr/>
-          <p:nvPr/>
-        </p:nvSpPr>
-        <p:spPr>
-          <a:xfrm>
-            <a:off x="8028431" y="1481328"/>
-            <a:ext cx="3511296" cy="3931920"/>
-          </a:xfrm>
-          <a:prstGeom prst="roundRect">
-            <a:avLst>
-              <a:gd name="adj" fmla="val 5000"/>
-            </a:avLst>
-          </a:prstGeom>
-          <a:solidFill>
-            <a:srgbClr val="F3F7F9"/>
-          </a:solidFill>
-          <a:ln w="9525">
-            <a:solidFill>
-              <a:srgbClr val="D8E1E7"/>
-            </a:solidFill>
-          </a:ln>
-          <a:effectLst/>
-        </p:spPr>
-        <p:style>
-          <a:lnRef idx="1">
-            <a:schemeClr val="accent1"/>
-          </a:lnRef>
-          <a:fillRef idx="3">
-            <a:schemeClr val="accent1"/>
-          </a:fillRef>
-          <a:effectRef idx="2">
-            <a:schemeClr val="accent1"/>
-          </a:effectRef>
-          <a:fontRef idx="minor">
-            <a:schemeClr val="lt1"/>
-          </a:fontRef>
-        </p:style>
-        <p:txBody>
-          <a:bodyPr rtlCol="0" anchor="ctr"/>
-          <a:lstStyle/>
-          <a:p>
-            <a:pPr algn="ctr"/>
-          </a:p>
-        </p:txBody>
-      </p:sp>
-      <p:sp>
-        <p:nvSpPr>
-          <p:cNvPr id="14" name="Rectangle 13"/>
-          <p:cNvSpPr/>
-          <p:nvPr/>
-        </p:nvSpPr>
-        <p:spPr>
-          <a:xfrm>
-            <a:off x="8028431" y="1481328"/>
-            <a:ext cx="3511296" cy="566928"/>
-          </a:xfrm>
-          <a:prstGeom prst="rect">
-            <a:avLst/>
           </a:prstGeom>
           <a:solidFill>
             <a:srgbClr val="1B2A41"/>
@@ -12820,14 +12004,14 @@
       </p:sp>
       <p:sp>
         <p:nvSpPr>
-          <p:cNvPr id="15" name="TextBox 14"/>
+          <p:cNvPr id="8" name="TextBox 7"/>
           <p:cNvSpPr txBox="1"/>
           <p:nvPr/>
         </p:nvSpPr>
         <p:spPr>
           <a:xfrm>
-            <a:off x="8257031" y="1609344"/>
-            <a:ext cx="3054096" cy="310896"/>
+            <a:off x="640080" y="1915668"/>
+            <a:ext cx="475488" cy="329184"/>
           </a:xfrm>
           <a:prstGeom prst="rect">
             <a:avLst/>
@@ -12840,30 +12024,30 @@
           </a:bodyPr>
           <a:lstStyle/>
           <a:p>
-            <a:pPr algn="l"/>
-            <a:r>
-              <a:rPr sz="1450" b="1" i="0">
-                <a:solidFill>
-                  <a:srgbClr val="FFFFFF"/>
-                </a:solidFill>
-                <a:latin typeface="Microsoft JhengHei"/>
-                <a:ea typeface="Microsoft JhengHei"/>
-              </a:rPr>
-              <a:t>未來工作</a:t>
-            </a:r>
-          </a:p>
-        </p:txBody>
-      </p:sp>
-      <p:sp>
-        <p:nvSpPr>
-          <p:cNvPr id="16" name="TextBox 15"/>
+            <a:pPr algn="ctr"/>
+            <a:r>
+              <a:rPr sz="1500" b="1" i="0">
+                <a:solidFill>
+                  <a:srgbClr val="3FD0B6"/>
+                </a:solidFill>
+                <a:latin typeface="Consolas"/>
+                <a:ea typeface="Microsoft JhengHei"/>
+              </a:rPr>
+              <a:t>1</a:t>
+            </a:r>
+          </a:p>
+        </p:txBody>
+      </p:sp>
+      <p:sp>
+        <p:nvSpPr>
+          <p:cNvPr id="9" name="TextBox 8"/>
           <p:cNvSpPr txBox="1"/>
           <p:nvPr/>
         </p:nvSpPr>
         <p:spPr>
           <a:xfrm>
-            <a:off x="8284463" y="2286000"/>
-            <a:ext cx="2999232" cy="3017520"/>
+            <a:off x="1298448" y="1828800"/>
+            <a:ext cx="4480560" cy="274320"/>
           </a:xfrm>
           <a:prstGeom prst="rect">
             <a:avLst/>
@@ -12876,96 +12060,70 @@
           </a:bodyPr>
           <a:lstStyle/>
           <a:p>
-            <a:pPr algn="l" marL="164592" indent="-164592">
-              <a:lnSpc>
-                <a:spcPct val="122000"/>
-              </a:lnSpc>
-              <a:spcAft>
-                <a:spcPts val="1000"/>
-              </a:spcAft>
-              <a:buClr>
-                <a:srgbClr val="1B2A41"/>
-              </a:buClr>
-              <a:buFont typeface="Arial"/>
-              <a:buChar char="▪"/>
-            </a:pPr>
-            <a:r>
-              <a:rPr sz="1150" b="0" i="0">
+            <a:pPr algn="l"/>
+            <a:r>
+              <a:rPr sz="1350" b="1" i="0">
                 <a:solidFill>
                   <a:srgbClr val="22303F"/>
                 </a:solidFill>
                 <a:latin typeface="Microsoft JhengHei"/>
                 <a:ea typeface="Microsoft JhengHei"/>
               </a:rPr>
-              <a:t>引入 utf8proc / ICU 處理非 ASCII 字元正規化</a:t>
-            </a:r>
-          </a:p>
-          <a:p>
-            <a:pPr algn="l" marL="164592" indent="-164592">
-              <a:lnSpc>
-                <a:spcPct val="122000"/>
-              </a:lnSpc>
-              <a:spcAft>
-                <a:spcPts val="1000"/>
-              </a:spcAft>
-              <a:buClr>
-                <a:srgbClr val="1B2A41"/>
-              </a:buClr>
-              <a:buFont typeface="Arial"/>
-              <a:buChar char="▪"/>
-            </a:pPr>
-            <a:r>
-              <a:rPr sz="1150" b="0" i="0">
-                <a:solidFill>
-                  <a:srgbClr val="22303F"/>
+              <a:t>靜態分析</a:t>
+            </a:r>
+          </a:p>
+        </p:txBody>
+      </p:sp>
+      <p:sp>
+        <p:nvSpPr>
+          <p:cNvPr id="10" name="TextBox 9"/>
+          <p:cNvSpPr txBox="1"/>
+          <p:nvPr/>
+        </p:nvSpPr>
+        <p:spPr>
+          <a:xfrm>
+            <a:off x="1298448" y="2103120"/>
+            <a:ext cx="4480560" cy="274320"/>
+          </a:xfrm>
+          <a:prstGeom prst="rect">
+            <a:avLst/>
+          </a:prstGeom>
+          <a:noFill/>
+        </p:spPr>
+        <p:txBody>
+          <a:bodyPr wrap="square" anchor="t" lIns="0" rIns="0" tIns="0" bIns="0">
+            <a:spAutoFit/>
+          </a:bodyPr>
+          <a:lstStyle/>
+          <a:p>
+            <a:pPr algn="l"/>
+            <a:r>
+              <a:rPr sz="1050" b="0" i="0">
+                <a:solidFill>
+                  <a:srgbClr val="5F6E7D"/>
                 </a:solidFill>
                 <a:latin typeface="Microsoft JhengHei"/>
                 <a:ea typeface="Microsoft JhengHei"/>
               </a:rPr>
-              <a:t>國家別名表外部化：從 mapping 檔載入，取代硬編碼</a:t>
-            </a:r>
-          </a:p>
-          <a:p>
-            <a:pPr algn="l" marL="164592" indent="-164592">
-              <a:lnSpc>
-                <a:spcPct val="122000"/>
-              </a:lnSpc>
-              <a:spcAft>
-                <a:spcPts val="1000"/>
-              </a:spcAft>
-              <a:buClr>
-                <a:srgbClr val="1B2A41"/>
-              </a:buClr>
-              <a:buFont typeface="Arial"/>
-              <a:buChar char="▪"/>
-            </a:pPr>
-            <a:r>
-              <a:rPr sz="1150" b="0" i="0">
-                <a:solidFill>
-                  <a:srgbClr val="22303F"/>
-                </a:solidFill>
-                <a:latin typeface="Microsoft JhengHei"/>
-                <a:ea typeface="Microsoft JhengHei"/>
-              </a:rPr>
-              <a:t>CI 整合（爬蟲 → 引擎 → 資料庫）並提供 libnormalizer 函式庫介面</a:t>
-            </a:r>
-          </a:p>
-        </p:txBody>
-      </p:sp>
-      <p:sp>
-        <p:nvSpPr>
-          <p:cNvPr id="17" name="Rounded Rectangle 16"/>
+              <a:t>通讀模組程式碼，標記可疑邏輯</a:t>
+            </a:r>
+          </a:p>
+        </p:txBody>
+      </p:sp>
+      <p:sp>
+        <p:nvSpPr>
+          <p:cNvPr id="11" name="Rounded Rectangle 10"/>
           <p:cNvSpPr/>
           <p:nvPr/>
         </p:nvSpPr>
         <p:spPr>
           <a:xfrm>
-            <a:off x="640080" y="5650992"/>
-            <a:ext cx="10908792" cy="566928"/>
+            <a:off x="640080" y="2560320"/>
+            <a:ext cx="475488" cy="475488"/>
           </a:xfrm>
           <a:prstGeom prst="roundRect">
             <a:avLst>
-              <a:gd name="adj" fmla="val 8000"/>
+              <a:gd name="adj" fmla="val 14000"/>
             </a:avLst>
           </a:prstGeom>
           <a:solidFill>
@@ -13000,14 +12158,14 @@
       </p:sp>
       <p:sp>
         <p:nvSpPr>
-          <p:cNvPr id="18" name="TextBox 17"/>
+          <p:cNvPr id="12" name="TextBox 11"/>
           <p:cNvSpPr txBox="1"/>
           <p:nvPr/>
         </p:nvSpPr>
         <p:spPr>
           <a:xfrm>
-            <a:off x="640080" y="5788152"/>
-            <a:ext cx="10908792" cy="310896"/>
+            <a:off x="640080" y="2628900"/>
+            <a:ext cx="475488" cy="329184"/>
           </a:xfrm>
           <a:prstGeom prst="rect">
             <a:avLst/>
@@ -13022,28 +12180,28 @@
           <a:p>
             <a:pPr algn="ctr"/>
             <a:r>
-              <a:rPr sz="1400" b="1" i="0">
+              <a:rPr sz="1500" b="1" i="0">
                 <a:solidFill>
                   <a:srgbClr val="3FD0B6"/>
                 </a:solidFill>
-                <a:latin typeface="Microsoft JhengHei"/>
-                <a:ea typeface="Microsoft JhengHei"/>
-              </a:rPr>
-              <a:t>以小而可驗證的 C 核心，換取資料管線中可預期的正規化行為。</a:t>
-            </a:r>
-          </a:p>
-        </p:txBody>
-      </p:sp>
-      <p:sp>
-        <p:nvSpPr>
-          <p:cNvPr id="19" name="TextBox 18"/>
+                <a:latin typeface="Consolas"/>
+                <a:ea typeface="Microsoft JhengHei"/>
+              </a:rPr>
+              <a:t>2</a:t>
+            </a:r>
+          </a:p>
+        </p:txBody>
+      </p:sp>
+      <p:sp>
+        <p:nvSpPr>
+          <p:cNvPr id="13" name="TextBox 12"/>
           <p:cNvSpPr txBox="1"/>
           <p:nvPr/>
         </p:nvSpPr>
         <p:spPr>
           <a:xfrm>
-            <a:off x="640080" y="6473952"/>
-            <a:ext cx="7315200" cy="274320"/>
+            <a:off x="1298448" y="2542032"/>
+            <a:ext cx="4480560" cy="274320"/>
           </a:xfrm>
           <a:prstGeom prst="rect">
             <a:avLst/>
@@ -13058,28 +12216,28 @@
           <a:p>
             <a:pPr algn="l"/>
             <a:r>
-              <a:rPr sz="900" b="0" i="0">
-                <a:solidFill>
-                  <a:srgbClr val="5F6E7D"/>
-                </a:solidFill>
-                <a:latin typeface="Consolas"/>
-                <a:ea typeface="Microsoft JhengHei"/>
-              </a:rPr>
-              <a:t>Clawer C Data Normalization Engine — b11402037 · b11402053</a:t>
-            </a:r>
-          </a:p>
-        </p:txBody>
-      </p:sp>
-      <p:sp>
-        <p:nvSpPr>
-          <p:cNvPr id="20" name="TextBox 19"/>
+              <a:rPr sz="1350" b="1" i="0">
+                <a:solidFill>
+                  <a:srgbClr val="22303F"/>
+                </a:solidFill>
+                <a:latin typeface="Microsoft JhengHei"/>
+                <a:ea typeface="Microsoft JhengHei"/>
+              </a:rPr>
+              <a:t>探針程式</a:t>
+            </a:r>
+          </a:p>
+        </p:txBody>
+      </p:sp>
+      <p:sp>
+        <p:nvSpPr>
+          <p:cNvPr id="14" name="TextBox 13"/>
           <p:cNvSpPr txBox="1"/>
           <p:nvPr/>
         </p:nvSpPr>
         <p:spPr>
           <a:xfrm>
-            <a:off x="10607040" y="6473952"/>
-            <a:ext cx="941832" cy="274320"/>
+            <a:off x="1298448" y="2816352"/>
+            <a:ext cx="4480560" cy="274320"/>
           </a:xfrm>
           <a:prstGeom prst="rect">
             <a:avLst/>
@@ -13092,8 +12250,1273 @@
           </a:bodyPr>
           <a:lstStyle/>
           <a:p>
+            <a:pPr algn="l"/>
+            <a:r>
+              <a:rPr sz="1050" b="0" i="0">
+                <a:solidFill>
+                  <a:srgbClr val="5F6E7D"/>
+                </a:solidFill>
+                <a:latin typeface="Microsoft JhengHei"/>
+                <a:ea typeface="Microsoft JhengHei"/>
+              </a:rPr>
+              <a:t>撰寫 probe 重現可疑行為</a:t>
+            </a:r>
+          </a:p>
+        </p:txBody>
+      </p:sp>
+      <p:sp>
+        <p:nvSpPr>
+          <p:cNvPr id="15" name="Rounded Rectangle 14"/>
+          <p:cNvSpPr/>
+          <p:nvPr/>
+        </p:nvSpPr>
+        <p:spPr>
+          <a:xfrm>
+            <a:off x="640080" y="3273552"/>
+            <a:ext cx="475488" cy="475488"/>
+          </a:xfrm>
+          <a:prstGeom prst="roundRect">
+            <a:avLst>
+              <a:gd name="adj" fmla="val 14000"/>
+            </a:avLst>
+          </a:prstGeom>
+          <a:solidFill>
+            <a:srgbClr val="1B2A41"/>
+          </a:solidFill>
+          <a:ln>
+            <a:noFill/>
+          </a:ln>
+          <a:effectLst/>
+        </p:spPr>
+        <p:style>
+          <a:lnRef idx="1">
+            <a:schemeClr val="accent1"/>
+          </a:lnRef>
+          <a:fillRef idx="3">
+            <a:schemeClr val="accent1"/>
+          </a:fillRef>
+          <a:effectRef idx="2">
+            <a:schemeClr val="accent1"/>
+          </a:effectRef>
+          <a:fontRef idx="minor">
+            <a:schemeClr val="lt1"/>
+          </a:fontRef>
+        </p:style>
+        <p:txBody>
+          <a:bodyPr rtlCol="0" anchor="ctr"/>
+          <a:lstStyle/>
+          <a:p>
+            <a:pPr algn="ctr"/>
+          </a:p>
+        </p:txBody>
+      </p:sp>
+      <p:sp>
+        <p:nvSpPr>
+          <p:cNvPr id="16" name="TextBox 15"/>
+          <p:cNvSpPr txBox="1"/>
+          <p:nvPr/>
+        </p:nvSpPr>
+        <p:spPr>
+          <a:xfrm>
+            <a:off x="640080" y="3342132"/>
+            <a:ext cx="475488" cy="329184"/>
+          </a:xfrm>
+          <a:prstGeom prst="rect">
+            <a:avLst/>
+          </a:prstGeom>
+          <a:noFill/>
+        </p:spPr>
+        <p:txBody>
+          <a:bodyPr wrap="square" anchor="t" lIns="0" rIns="0" tIns="0" bIns="0">
+            <a:spAutoFit/>
+          </a:bodyPr>
+          <a:lstStyle/>
+          <a:p>
+            <a:pPr algn="ctr"/>
+            <a:r>
+              <a:rPr sz="1500" b="1" i="0">
+                <a:solidFill>
+                  <a:srgbClr val="3FD0B6"/>
+                </a:solidFill>
+                <a:latin typeface="Consolas"/>
+                <a:ea typeface="Microsoft JhengHei"/>
+              </a:rPr>
+              <a:t>3</a:t>
+            </a:r>
+          </a:p>
+        </p:txBody>
+      </p:sp>
+      <p:sp>
+        <p:nvSpPr>
+          <p:cNvPr id="17" name="TextBox 16"/>
+          <p:cNvSpPr txBox="1"/>
+          <p:nvPr/>
+        </p:nvSpPr>
+        <p:spPr>
+          <a:xfrm>
+            <a:off x="1298448" y="3255264"/>
+            <a:ext cx="4480560" cy="274320"/>
+          </a:xfrm>
+          <a:prstGeom prst="rect">
+            <a:avLst/>
+          </a:prstGeom>
+          <a:noFill/>
+        </p:spPr>
+        <p:txBody>
+          <a:bodyPr wrap="square" anchor="t" lIns="0" rIns="0" tIns="0" bIns="0">
+            <a:spAutoFit/>
+          </a:bodyPr>
+          <a:lstStyle/>
+          <a:p>
+            <a:pPr algn="l"/>
+            <a:r>
+              <a:rPr sz="1350" b="1" i="0">
+                <a:solidFill>
+                  <a:srgbClr val="22303F"/>
+                </a:solidFill>
+                <a:latin typeface="Microsoft JhengHei"/>
+                <a:ea typeface="Microsoft JhengHei"/>
+              </a:rPr>
+              <a:t>修正</a:t>
+            </a:r>
+          </a:p>
+        </p:txBody>
+      </p:sp>
+      <p:sp>
+        <p:nvSpPr>
+          <p:cNvPr id="18" name="TextBox 17"/>
+          <p:cNvSpPr txBox="1"/>
+          <p:nvPr/>
+        </p:nvSpPr>
+        <p:spPr>
+          <a:xfrm>
+            <a:off x="1298448" y="3529584"/>
+            <a:ext cx="4480560" cy="274320"/>
+          </a:xfrm>
+          <a:prstGeom prst="rect">
+            <a:avLst/>
+          </a:prstGeom>
+          <a:noFill/>
+        </p:spPr>
+        <p:txBody>
+          <a:bodyPr wrap="square" anchor="t" lIns="0" rIns="0" tIns="0" bIns="0">
+            <a:spAutoFit/>
+          </a:bodyPr>
+          <a:lstStyle/>
+          <a:p>
+            <a:pPr algn="l"/>
+            <a:r>
+              <a:rPr sz="1050" b="0" i="0">
+                <a:solidFill>
+                  <a:srgbClr val="5F6E7D"/>
+                </a:solidFill>
+                <a:latin typeface="Microsoft JhengHei"/>
+                <a:ea typeface="Microsoft JhengHei"/>
+              </a:rPr>
+              <a:t>最小修改修復根因</a:t>
+            </a:r>
+          </a:p>
+        </p:txBody>
+      </p:sp>
+      <p:sp>
+        <p:nvSpPr>
+          <p:cNvPr id="19" name="Rounded Rectangle 18"/>
+          <p:cNvSpPr/>
+          <p:nvPr/>
+        </p:nvSpPr>
+        <p:spPr>
+          <a:xfrm>
+            <a:off x="640080" y="3986783"/>
+            <a:ext cx="475488" cy="475488"/>
+          </a:xfrm>
+          <a:prstGeom prst="roundRect">
+            <a:avLst>
+              <a:gd name="adj" fmla="val 14000"/>
+            </a:avLst>
+          </a:prstGeom>
+          <a:solidFill>
+            <a:srgbClr val="1B2A41"/>
+          </a:solidFill>
+          <a:ln>
+            <a:noFill/>
+          </a:ln>
+          <a:effectLst/>
+        </p:spPr>
+        <p:style>
+          <a:lnRef idx="1">
+            <a:schemeClr val="accent1"/>
+          </a:lnRef>
+          <a:fillRef idx="3">
+            <a:schemeClr val="accent1"/>
+          </a:fillRef>
+          <a:effectRef idx="2">
+            <a:schemeClr val="accent1"/>
+          </a:effectRef>
+          <a:fontRef idx="minor">
+            <a:schemeClr val="lt1"/>
+          </a:fontRef>
+        </p:style>
+        <p:txBody>
+          <a:bodyPr rtlCol="0" anchor="ctr"/>
+          <a:lstStyle/>
+          <a:p>
+            <a:pPr algn="ctr"/>
+          </a:p>
+        </p:txBody>
+      </p:sp>
+      <p:sp>
+        <p:nvSpPr>
+          <p:cNvPr id="20" name="TextBox 19"/>
+          <p:cNvSpPr txBox="1"/>
+          <p:nvPr/>
+        </p:nvSpPr>
+        <p:spPr>
+          <a:xfrm>
+            <a:off x="640080" y="4055363"/>
+            <a:ext cx="475488" cy="329184"/>
+          </a:xfrm>
+          <a:prstGeom prst="rect">
+            <a:avLst/>
+          </a:prstGeom>
+          <a:noFill/>
+        </p:spPr>
+        <p:txBody>
+          <a:bodyPr wrap="square" anchor="t" lIns="0" rIns="0" tIns="0" bIns="0">
+            <a:spAutoFit/>
+          </a:bodyPr>
+          <a:lstStyle/>
+          <a:p>
+            <a:pPr algn="ctr"/>
+            <a:r>
+              <a:rPr sz="1500" b="1" i="0">
+                <a:solidFill>
+                  <a:srgbClr val="3FD0B6"/>
+                </a:solidFill>
+                <a:latin typeface="Consolas"/>
+                <a:ea typeface="Microsoft JhengHei"/>
+              </a:rPr>
+              <a:t>4</a:t>
+            </a:r>
+          </a:p>
+        </p:txBody>
+      </p:sp>
+      <p:sp>
+        <p:nvSpPr>
+          <p:cNvPr id="21" name="TextBox 20"/>
+          <p:cNvSpPr txBox="1"/>
+          <p:nvPr/>
+        </p:nvSpPr>
+        <p:spPr>
+          <a:xfrm>
+            <a:off x="1298448" y="3968496"/>
+            <a:ext cx="4480560" cy="274320"/>
+          </a:xfrm>
+          <a:prstGeom prst="rect">
+            <a:avLst/>
+          </a:prstGeom>
+          <a:noFill/>
+        </p:spPr>
+        <p:txBody>
+          <a:bodyPr wrap="square" anchor="t" lIns="0" rIns="0" tIns="0" bIns="0">
+            <a:spAutoFit/>
+          </a:bodyPr>
+          <a:lstStyle/>
+          <a:p>
+            <a:pPr algn="l"/>
+            <a:r>
+              <a:rPr sz="1350" b="1" i="0">
+                <a:solidFill>
+                  <a:srgbClr val="22303F"/>
+                </a:solidFill>
+                <a:latin typeface="Microsoft JhengHei"/>
+                <a:ea typeface="Microsoft JhengHei"/>
+              </a:rPr>
+              <a:t>回歸驗證</a:t>
+            </a:r>
+          </a:p>
+        </p:txBody>
+      </p:sp>
+      <p:sp>
+        <p:nvSpPr>
+          <p:cNvPr id="22" name="TextBox 21"/>
+          <p:cNvSpPr txBox="1"/>
+          <p:nvPr/>
+        </p:nvSpPr>
+        <p:spPr>
+          <a:xfrm>
+            <a:off x="1298448" y="4242816"/>
+            <a:ext cx="4480560" cy="274320"/>
+          </a:xfrm>
+          <a:prstGeom prst="rect">
+            <a:avLst/>
+          </a:prstGeom>
+          <a:noFill/>
+        </p:spPr>
+        <p:txBody>
+          <a:bodyPr wrap="square" anchor="t" lIns="0" rIns="0" tIns="0" bIns="0">
+            <a:spAutoFit/>
+          </a:bodyPr>
+          <a:lstStyle/>
+          <a:p>
+            <a:pPr algn="l"/>
+            <a:r>
+              <a:rPr sz="1050" b="0" i="0">
+                <a:solidFill>
+                  <a:srgbClr val="5F6E7D"/>
+                </a:solidFill>
+                <a:latin typeface="Microsoft JhengHei"/>
+                <a:ea typeface="Microsoft JhengHei"/>
+              </a:rPr>
+              <a:t>新增 regression 套件全量重跑</a:t>
+            </a:r>
+          </a:p>
+        </p:txBody>
+      </p:sp>
+      <p:sp>
+        <p:nvSpPr>
+          <p:cNvPr id="23" name="Rounded Rectangle 22"/>
+          <p:cNvSpPr/>
+          <p:nvPr/>
+        </p:nvSpPr>
+        <p:spPr>
+          <a:xfrm>
+            <a:off x="640080" y="4864608"/>
+            <a:ext cx="5394960" cy="1170432"/>
+          </a:xfrm>
+          <a:prstGeom prst="roundRect">
+            <a:avLst>
+              <a:gd name="adj" fmla="val 6000"/>
+            </a:avLst>
+          </a:prstGeom>
+          <a:solidFill>
+            <a:srgbClr val="E8F4F2"/>
+          </a:solidFill>
+          <a:ln>
+            <a:noFill/>
+          </a:ln>
+          <a:effectLst/>
+        </p:spPr>
+        <p:style>
+          <a:lnRef idx="1">
+            <a:schemeClr val="accent1"/>
+          </a:lnRef>
+          <a:fillRef idx="3">
+            <a:schemeClr val="accent1"/>
+          </a:fillRef>
+          <a:effectRef idx="2">
+            <a:schemeClr val="accent1"/>
+          </a:effectRef>
+          <a:fontRef idx="minor">
+            <a:schemeClr val="lt1"/>
+          </a:fontRef>
+        </p:style>
+        <p:txBody>
+          <a:bodyPr rtlCol="0" anchor="ctr"/>
+          <a:lstStyle/>
+          <a:p>
+            <a:pPr algn="ctr"/>
+          </a:p>
+        </p:txBody>
+      </p:sp>
+      <p:sp>
+        <p:nvSpPr>
+          <p:cNvPr id="24" name="Rectangle 23"/>
+          <p:cNvSpPr/>
+          <p:nvPr/>
+        </p:nvSpPr>
+        <p:spPr>
+          <a:xfrm>
+            <a:off x="640080" y="4864608"/>
+            <a:ext cx="64008" cy="1170432"/>
+          </a:xfrm>
+          <a:prstGeom prst="rect">
+            <a:avLst/>
+          </a:prstGeom>
+          <a:solidFill>
+            <a:srgbClr val="0E8C8B"/>
+          </a:solidFill>
+          <a:ln>
+            <a:noFill/>
+          </a:ln>
+          <a:effectLst/>
+        </p:spPr>
+        <p:style>
+          <a:lnRef idx="1">
+            <a:schemeClr val="accent1"/>
+          </a:lnRef>
+          <a:fillRef idx="3">
+            <a:schemeClr val="accent1"/>
+          </a:fillRef>
+          <a:effectRef idx="2">
+            <a:schemeClr val="accent1"/>
+          </a:effectRef>
+          <a:fontRef idx="minor">
+            <a:schemeClr val="lt1"/>
+          </a:fontRef>
+        </p:style>
+        <p:txBody>
+          <a:bodyPr rtlCol="0" anchor="ctr"/>
+          <a:lstStyle/>
+          <a:p>
+            <a:pPr algn="ctr"/>
+          </a:p>
+        </p:txBody>
+      </p:sp>
+      <p:sp>
+        <p:nvSpPr>
+          <p:cNvPr id="25" name="TextBox 24"/>
+          <p:cNvSpPr txBox="1"/>
+          <p:nvPr/>
+        </p:nvSpPr>
+        <p:spPr>
+          <a:xfrm>
+            <a:off x="896112" y="4992624"/>
+            <a:ext cx="4983480" cy="914400"/>
+          </a:xfrm>
+          <a:prstGeom prst="rect">
+            <a:avLst/>
+          </a:prstGeom>
+          <a:noFill/>
+        </p:spPr>
+        <p:txBody>
+          <a:bodyPr wrap="square" anchor="t" lIns="0" rIns="0" tIns="0" bIns="0">
+            <a:spAutoFit/>
+          </a:bodyPr>
+          <a:lstStyle/>
+          <a:p>
+            <a:pPr algn="l">
+              <a:spcAft>
+                <a:spcPts val="400"/>
+              </a:spcAft>
+            </a:pPr>
+            <a:r>
+              <a:rPr sz="1250" b="1" i="0">
+                <a:solidFill>
+                  <a:srgbClr val="22303F"/>
+                </a:solidFill>
+                <a:latin typeface="Microsoft JhengHei"/>
+                <a:ea typeface="Microsoft JhengHei"/>
+              </a:rPr>
+              <a:t>累計 6 輪 Session、17 項修正（A–T）</a:t>
+            </a:r>
+          </a:p>
+          <a:p>
+            <a:pPr algn="l"/>
+            <a:r>
+              <a:rPr sz="1050" b="0" i="0">
+                <a:solidFill>
+                  <a:srgbClr val="5F6E7D"/>
+                </a:solidFill>
+                <a:latin typeface="Consolas"/>
+                <a:ea typeface="Microsoft JhengHei"/>
+              </a:rPr>
+              <a:t>例：Fix S — parse_score(".5") 誤判為 5.0 → 修正為 0.5</a:t>
+            </a:r>
+          </a:p>
+        </p:txBody>
+      </p:sp>
+      <p:sp>
+        <p:nvSpPr>
+          <p:cNvPr id="26" name="TextBox 25"/>
+          <p:cNvSpPr txBox="1"/>
+          <p:nvPr/>
+        </p:nvSpPr>
+        <p:spPr>
+          <a:xfrm>
+            <a:off x="6446520" y="1389888"/>
+            <a:ext cx="5102352" cy="777240"/>
+          </a:xfrm>
+          <a:prstGeom prst="rect">
+            <a:avLst/>
+          </a:prstGeom>
+          <a:noFill/>
+        </p:spPr>
+        <p:txBody>
+          <a:bodyPr wrap="square" anchor="t" lIns="0" rIns="0" tIns="0" bIns="0">
+            <a:spAutoFit/>
+          </a:bodyPr>
+          <a:lstStyle/>
+          <a:p>
+            <a:pPr algn="l"/>
+            <a:r>
+              <a:rPr sz="4800" b="1" i="0">
+                <a:solidFill>
+                  <a:srgbClr val="0E8C8B"/>
+                </a:solidFill>
+                <a:latin typeface="Consolas"/>
+                <a:ea typeface="Microsoft JhengHei"/>
+              </a:rPr>
+              <a:t>602 / 602</a:t>
+            </a:r>
+          </a:p>
+        </p:txBody>
+      </p:sp>
+      <p:sp>
+        <p:nvSpPr>
+          <p:cNvPr id="27" name="TextBox 26"/>
+          <p:cNvSpPr txBox="1"/>
+          <p:nvPr/>
+        </p:nvSpPr>
+        <p:spPr>
+          <a:xfrm>
+            <a:off x="6446520" y="2212848"/>
+            <a:ext cx="5102352" cy="274320"/>
+          </a:xfrm>
+          <a:prstGeom prst="rect">
+            <a:avLst/>
+          </a:prstGeom>
+          <a:noFill/>
+        </p:spPr>
+        <p:txBody>
+          <a:bodyPr wrap="square" anchor="t" lIns="0" rIns="0" tIns="0" bIns="0">
+            <a:spAutoFit/>
+          </a:bodyPr>
+          <a:lstStyle/>
+          <a:p>
+            <a:pPr algn="l"/>
+            <a:r>
+              <a:rPr sz="1250" b="1" i="0">
+                <a:solidFill>
+                  <a:srgbClr val="22303F"/>
+                </a:solidFill>
+                <a:latin typeface="Microsoft JhengHei"/>
+                <a:ea typeface="Microsoft JhengHei"/>
+              </a:rPr>
+              <a:t>九個測試套件全數通過（make test_all）</a:t>
+            </a:r>
+          </a:p>
+        </p:txBody>
+      </p:sp>
+      <p:sp>
+        <p:nvSpPr>
+          <p:cNvPr id="28" name="Rectangle 27"/>
+          <p:cNvSpPr/>
+          <p:nvPr/>
+        </p:nvSpPr>
+        <p:spPr>
+          <a:xfrm>
+            <a:off x="6446520" y="2670048"/>
+            <a:ext cx="5102352" cy="457200"/>
+          </a:xfrm>
+          <a:prstGeom prst="rect">
+            <a:avLst/>
+          </a:prstGeom>
+          <a:solidFill>
+            <a:srgbClr val="F3F7F9"/>
+          </a:solidFill>
+          <a:ln w="6350">
+            <a:solidFill>
+              <a:srgbClr val="D8E1E7"/>
+            </a:solidFill>
+          </a:ln>
+          <a:effectLst/>
+        </p:spPr>
+        <p:style>
+          <a:lnRef idx="1">
+            <a:schemeClr val="accent1"/>
+          </a:lnRef>
+          <a:fillRef idx="3">
+            <a:schemeClr val="accent1"/>
+          </a:fillRef>
+          <a:effectRef idx="2">
+            <a:schemeClr val="accent1"/>
+          </a:effectRef>
+          <a:fontRef idx="minor">
+            <a:schemeClr val="lt1"/>
+          </a:fontRef>
+        </p:style>
+        <p:txBody>
+          <a:bodyPr rtlCol="0" anchor="ctr"/>
+          <a:lstStyle/>
+          <a:p>
+            <a:pPr algn="ctr"/>
+          </a:p>
+        </p:txBody>
+      </p:sp>
+      <p:sp>
+        <p:nvSpPr>
+          <p:cNvPr id="29" name="TextBox 28"/>
+          <p:cNvSpPr txBox="1"/>
+          <p:nvPr/>
+        </p:nvSpPr>
+        <p:spPr>
+          <a:xfrm>
+            <a:off x="6629400" y="2761488"/>
+            <a:ext cx="3291840" cy="274320"/>
+          </a:xfrm>
+          <a:prstGeom prst="rect">
+            <a:avLst/>
+          </a:prstGeom>
+          <a:noFill/>
+        </p:spPr>
+        <p:txBody>
+          <a:bodyPr wrap="square" anchor="t" lIns="0" rIns="0" tIns="0" bIns="0">
+            <a:spAutoFit/>
+          </a:bodyPr>
+          <a:lstStyle/>
+          <a:p>
+            <a:pPr algn="l"/>
+            <a:r>
+              <a:rPr sz="1150" b="0" i="0">
+                <a:solidFill>
+                  <a:srgbClr val="22303F"/>
+                </a:solidFill>
+                <a:latin typeface="Consolas"/>
+                <a:ea typeface="Microsoft JhengHei"/>
+              </a:rPr>
+              <a:t>test_normalizer</a:t>
+            </a:r>
+          </a:p>
+        </p:txBody>
+      </p:sp>
+      <p:sp>
+        <p:nvSpPr>
+          <p:cNvPr id="30" name="TextBox 29"/>
+          <p:cNvSpPr txBox="1"/>
+          <p:nvPr/>
+        </p:nvSpPr>
+        <p:spPr>
+          <a:xfrm>
+            <a:off x="9857232" y="2761488"/>
+            <a:ext cx="1508760" cy="274320"/>
+          </a:xfrm>
+          <a:prstGeom prst="rect">
+            <a:avLst/>
+          </a:prstGeom>
+          <a:noFill/>
+        </p:spPr>
+        <p:txBody>
+          <a:bodyPr wrap="square" anchor="t" lIns="0" rIns="0" tIns="0" bIns="0">
+            <a:spAutoFit/>
+          </a:bodyPr>
+          <a:lstStyle/>
+          <a:p>
             <a:pPr algn="r"/>
             <a:r>
+              <a:rPr sz="1150" b="1" i="0">
+                <a:solidFill>
+                  <a:srgbClr val="0E8C8B"/>
+                </a:solidFill>
+                <a:latin typeface="Consolas"/>
+                <a:ea typeface="Microsoft JhengHei"/>
+              </a:rPr>
+              <a:t>17 / 17</a:t>
+            </a:r>
+          </a:p>
+        </p:txBody>
+      </p:sp>
+      <p:sp>
+        <p:nvSpPr>
+          <p:cNvPr id="31" name="Rectangle 30"/>
+          <p:cNvSpPr/>
+          <p:nvPr/>
+        </p:nvSpPr>
+        <p:spPr>
+          <a:xfrm>
+            <a:off x="6446520" y="3218688"/>
+            <a:ext cx="5102352" cy="457200"/>
+          </a:xfrm>
+          <a:prstGeom prst="rect">
+            <a:avLst/>
+          </a:prstGeom>
+          <a:solidFill>
+            <a:srgbClr val="FFFFFF"/>
+          </a:solidFill>
+          <a:ln w="6350">
+            <a:solidFill>
+              <a:srgbClr val="D8E1E7"/>
+            </a:solidFill>
+          </a:ln>
+          <a:effectLst/>
+        </p:spPr>
+        <p:style>
+          <a:lnRef idx="1">
+            <a:schemeClr val="accent1"/>
+          </a:lnRef>
+          <a:fillRef idx="3">
+            <a:schemeClr val="accent1"/>
+          </a:fillRef>
+          <a:effectRef idx="2">
+            <a:schemeClr val="accent1"/>
+          </a:effectRef>
+          <a:fontRef idx="minor">
+            <a:schemeClr val="lt1"/>
+          </a:fontRef>
+        </p:style>
+        <p:txBody>
+          <a:bodyPr rtlCol="0" anchor="ctr"/>
+          <a:lstStyle/>
+          <a:p>
+            <a:pPr algn="ctr"/>
+          </a:p>
+        </p:txBody>
+      </p:sp>
+      <p:sp>
+        <p:nvSpPr>
+          <p:cNvPr id="32" name="TextBox 31"/>
+          <p:cNvSpPr txBox="1"/>
+          <p:nvPr/>
+        </p:nvSpPr>
+        <p:spPr>
+          <a:xfrm>
+            <a:off x="6629400" y="3310128"/>
+            <a:ext cx="3291840" cy="274320"/>
+          </a:xfrm>
+          <a:prstGeom prst="rect">
+            <a:avLst/>
+          </a:prstGeom>
+          <a:noFill/>
+        </p:spPr>
+        <p:txBody>
+          <a:bodyPr wrap="square" anchor="t" lIns="0" rIns="0" tIns="0" bIns="0">
+            <a:spAutoFit/>
+          </a:bodyPr>
+          <a:lstStyle/>
+          <a:p>
+            <a:pPr algn="l"/>
+            <a:r>
+              <a:rPr sz="1150" b="0" i="0">
+                <a:solidFill>
+                  <a:srgbClr val="22303F"/>
+                </a:solidFill>
+                <a:latin typeface="Consolas"/>
+                <a:ea typeface="Microsoft JhengHei"/>
+              </a:rPr>
+              <a:t>test_extreme</a:t>
+            </a:r>
+          </a:p>
+        </p:txBody>
+      </p:sp>
+      <p:sp>
+        <p:nvSpPr>
+          <p:cNvPr id="33" name="TextBox 32"/>
+          <p:cNvSpPr txBox="1"/>
+          <p:nvPr/>
+        </p:nvSpPr>
+        <p:spPr>
+          <a:xfrm>
+            <a:off x="9857232" y="3310128"/>
+            <a:ext cx="1508760" cy="274320"/>
+          </a:xfrm>
+          <a:prstGeom prst="rect">
+            <a:avLst/>
+          </a:prstGeom>
+          <a:noFill/>
+        </p:spPr>
+        <p:txBody>
+          <a:bodyPr wrap="square" anchor="t" lIns="0" rIns="0" tIns="0" bIns="0">
+            <a:spAutoFit/>
+          </a:bodyPr>
+          <a:lstStyle/>
+          <a:p>
+            <a:pPr algn="r"/>
+            <a:r>
+              <a:rPr sz="1150" b="1" i="0">
+                <a:solidFill>
+                  <a:srgbClr val="0E8C8B"/>
+                </a:solidFill>
+                <a:latin typeface="Consolas"/>
+                <a:ea typeface="Microsoft JhengHei"/>
+              </a:rPr>
+              <a:t>139 / 139</a:t>
+            </a:r>
+          </a:p>
+        </p:txBody>
+      </p:sp>
+      <p:sp>
+        <p:nvSpPr>
+          <p:cNvPr id="34" name="Rectangle 33"/>
+          <p:cNvSpPr/>
+          <p:nvPr/>
+        </p:nvSpPr>
+        <p:spPr>
+          <a:xfrm>
+            <a:off x="6446520" y="3767328"/>
+            <a:ext cx="5102352" cy="457200"/>
+          </a:xfrm>
+          <a:prstGeom prst="rect">
+            <a:avLst/>
+          </a:prstGeom>
+          <a:solidFill>
+            <a:srgbClr val="F3F7F9"/>
+          </a:solidFill>
+          <a:ln w="6350">
+            <a:solidFill>
+              <a:srgbClr val="D8E1E7"/>
+            </a:solidFill>
+          </a:ln>
+          <a:effectLst/>
+        </p:spPr>
+        <p:style>
+          <a:lnRef idx="1">
+            <a:schemeClr val="accent1"/>
+          </a:lnRef>
+          <a:fillRef idx="3">
+            <a:schemeClr val="accent1"/>
+          </a:fillRef>
+          <a:effectRef idx="2">
+            <a:schemeClr val="accent1"/>
+          </a:effectRef>
+          <a:fontRef idx="minor">
+            <a:schemeClr val="lt1"/>
+          </a:fontRef>
+        </p:style>
+        <p:txBody>
+          <a:bodyPr rtlCol="0" anchor="ctr"/>
+          <a:lstStyle/>
+          <a:p>
+            <a:pPr algn="ctr"/>
+          </a:p>
+        </p:txBody>
+      </p:sp>
+      <p:sp>
+        <p:nvSpPr>
+          <p:cNvPr id="35" name="TextBox 34"/>
+          <p:cNvSpPr txBox="1"/>
+          <p:nvPr/>
+        </p:nvSpPr>
+        <p:spPr>
+          <a:xfrm>
+            <a:off x="6629400" y="3858768"/>
+            <a:ext cx="3291840" cy="274320"/>
+          </a:xfrm>
+          <a:prstGeom prst="rect">
+            <a:avLst/>
+          </a:prstGeom>
+          <a:noFill/>
+        </p:spPr>
+        <p:txBody>
+          <a:bodyPr wrap="square" anchor="t" lIns="0" rIns="0" tIns="0" bIns="0">
+            <a:spAutoFit/>
+          </a:bodyPr>
+          <a:lstStyle/>
+          <a:p>
+            <a:pPr algn="l"/>
+            <a:r>
+              <a:rPr sz="1150" b="0" i="0">
+                <a:solidFill>
+                  <a:srgbClr val="22303F"/>
+                </a:solidFill>
+                <a:latin typeface="Consolas"/>
+                <a:ea typeface="Microsoft JhengHei"/>
+              </a:rPr>
+              <a:t>test_scale</a:t>
+            </a:r>
+          </a:p>
+        </p:txBody>
+      </p:sp>
+      <p:sp>
+        <p:nvSpPr>
+          <p:cNvPr id="36" name="TextBox 35"/>
+          <p:cNvSpPr txBox="1"/>
+          <p:nvPr/>
+        </p:nvSpPr>
+        <p:spPr>
+          <a:xfrm>
+            <a:off x="9857232" y="3858768"/>
+            <a:ext cx="1508760" cy="274320"/>
+          </a:xfrm>
+          <a:prstGeom prst="rect">
+            <a:avLst/>
+          </a:prstGeom>
+          <a:noFill/>
+        </p:spPr>
+        <p:txBody>
+          <a:bodyPr wrap="square" anchor="t" lIns="0" rIns="0" tIns="0" bIns="0">
+            <a:spAutoFit/>
+          </a:bodyPr>
+          <a:lstStyle/>
+          <a:p>
+            <a:pPr algn="r"/>
+            <a:r>
+              <a:rPr sz="1150" b="1" i="0">
+                <a:solidFill>
+                  <a:srgbClr val="0E8C8B"/>
+                </a:solidFill>
+                <a:latin typeface="Consolas"/>
+                <a:ea typeface="Microsoft JhengHei"/>
+              </a:rPr>
+              <a:t>31 / 31</a:t>
+            </a:r>
+          </a:p>
+        </p:txBody>
+      </p:sp>
+      <p:sp>
+        <p:nvSpPr>
+          <p:cNvPr id="37" name="Rectangle 36"/>
+          <p:cNvSpPr/>
+          <p:nvPr/>
+        </p:nvSpPr>
+        <p:spPr>
+          <a:xfrm>
+            <a:off x="6446520" y="4315968"/>
+            <a:ext cx="5102352" cy="457200"/>
+          </a:xfrm>
+          <a:prstGeom prst="rect">
+            <a:avLst/>
+          </a:prstGeom>
+          <a:solidFill>
+            <a:srgbClr val="FFFFFF"/>
+          </a:solidFill>
+          <a:ln w="6350">
+            <a:solidFill>
+              <a:srgbClr val="D8E1E7"/>
+            </a:solidFill>
+          </a:ln>
+          <a:effectLst/>
+        </p:spPr>
+        <p:style>
+          <a:lnRef idx="1">
+            <a:schemeClr val="accent1"/>
+          </a:lnRef>
+          <a:fillRef idx="3">
+            <a:schemeClr val="accent1"/>
+          </a:fillRef>
+          <a:effectRef idx="2">
+            <a:schemeClr val="accent1"/>
+          </a:effectRef>
+          <a:fontRef idx="minor">
+            <a:schemeClr val="lt1"/>
+          </a:fontRef>
+        </p:style>
+        <p:txBody>
+          <a:bodyPr rtlCol="0" anchor="ctr"/>
+          <a:lstStyle/>
+          <a:p>
+            <a:pPr algn="ctr"/>
+          </a:p>
+        </p:txBody>
+      </p:sp>
+      <p:sp>
+        <p:nvSpPr>
+          <p:cNvPr id="38" name="TextBox 37"/>
+          <p:cNvSpPr txBox="1"/>
+          <p:nvPr/>
+        </p:nvSpPr>
+        <p:spPr>
+          <a:xfrm>
+            <a:off x="6629400" y="4407407"/>
+            <a:ext cx="3291840" cy="274320"/>
+          </a:xfrm>
+          <a:prstGeom prst="rect">
+            <a:avLst/>
+          </a:prstGeom>
+          <a:noFill/>
+        </p:spPr>
+        <p:txBody>
+          <a:bodyPr wrap="square" anchor="t" lIns="0" rIns="0" tIns="0" bIns="0">
+            <a:spAutoFit/>
+          </a:bodyPr>
+          <a:lstStyle/>
+          <a:p>
+            <a:pPr algn="l"/>
+            <a:r>
+              <a:rPr sz="1150" b="0" i="0">
+                <a:solidFill>
+                  <a:srgbClr val="22303F"/>
+                </a:solidFill>
+                <a:latin typeface="Consolas"/>
+                <a:ea typeface="Microsoft JhengHei"/>
+              </a:rPr>
+              <a:t>test_weakness</a:t>
+            </a:r>
+          </a:p>
+        </p:txBody>
+      </p:sp>
+      <p:sp>
+        <p:nvSpPr>
+          <p:cNvPr id="39" name="TextBox 38"/>
+          <p:cNvSpPr txBox="1"/>
+          <p:nvPr/>
+        </p:nvSpPr>
+        <p:spPr>
+          <a:xfrm>
+            <a:off x="9857232" y="4407407"/>
+            <a:ext cx="1508760" cy="274320"/>
+          </a:xfrm>
+          <a:prstGeom prst="rect">
+            <a:avLst/>
+          </a:prstGeom>
+          <a:noFill/>
+        </p:spPr>
+        <p:txBody>
+          <a:bodyPr wrap="square" anchor="t" lIns="0" rIns="0" tIns="0" bIns="0">
+            <a:spAutoFit/>
+          </a:bodyPr>
+          <a:lstStyle/>
+          <a:p>
+            <a:pPr algn="r"/>
+            <a:r>
+              <a:rPr sz="1150" b="1" i="0">
+                <a:solidFill>
+                  <a:srgbClr val="0E8C8B"/>
+                </a:solidFill>
+                <a:latin typeface="Consolas"/>
+                <a:ea typeface="Microsoft JhengHei"/>
+              </a:rPr>
+              <a:t>43 / 43</a:t>
+            </a:r>
+          </a:p>
+        </p:txBody>
+      </p:sp>
+      <p:sp>
+        <p:nvSpPr>
+          <p:cNvPr id="40" name="Rectangle 39"/>
+          <p:cNvSpPr/>
+          <p:nvPr/>
+        </p:nvSpPr>
+        <p:spPr>
+          <a:xfrm>
+            <a:off x="6446520" y="4864608"/>
+            <a:ext cx="5102352" cy="457200"/>
+          </a:xfrm>
+          <a:prstGeom prst="rect">
+            <a:avLst/>
+          </a:prstGeom>
+          <a:solidFill>
+            <a:srgbClr val="F3F7F9"/>
+          </a:solidFill>
+          <a:ln w="6350">
+            <a:solidFill>
+              <a:srgbClr val="D8E1E7"/>
+            </a:solidFill>
+          </a:ln>
+          <a:effectLst/>
+        </p:spPr>
+        <p:style>
+          <a:lnRef idx="1">
+            <a:schemeClr val="accent1"/>
+          </a:lnRef>
+          <a:fillRef idx="3">
+            <a:schemeClr val="accent1"/>
+          </a:fillRef>
+          <a:effectRef idx="2">
+            <a:schemeClr val="accent1"/>
+          </a:effectRef>
+          <a:fontRef idx="minor">
+            <a:schemeClr val="lt1"/>
+          </a:fontRef>
+        </p:style>
+        <p:txBody>
+          <a:bodyPr rtlCol="0" anchor="ctr"/>
+          <a:lstStyle/>
+          <a:p>
+            <a:pPr algn="ctr"/>
+          </a:p>
+        </p:txBody>
+      </p:sp>
+      <p:sp>
+        <p:nvSpPr>
+          <p:cNvPr id="41" name="TextBox 40"/>
+          <p:cNvSpPr txBox="1"/>
+          <p:nvPr/>
+        </p:nvSpPr>
+        <p:spPr>
+          <a:xfrm>
+            <a:off x="6629400" y="4956048"/>
+            <a:ext cx="3291840" cy="274320"/>
+          </a:xfrm>
+          <a:prstGeom prst="rect">
+            <a:avLst/>
+          </a:prstGeom>
+          <a:noFill/>
+        </p:spPr>
+        <p:txBody>
+          <a:bodyPr wrap="square" anchor="t" lIns="0" rIns="0" tIns="0" bIns="0">
+            <a:spAutoFit/>
+          </a:bodyPr>
+          <a:lstStyle/>
+          <a:p>
+            <a:pPr algn="l"/>
+            <a:r>
+              <a:rPr sz="1150" b="0" i="0">
+                <a:solidFill>
+                  <a:srgbClr val="22303F"/>
+                </a:solidFill>
+                <a:latin typeface="Consolas"/>
+                <a:ea typeface="Microsoft JhengHei"/>
+              </a:rPr>
+              <a:t>test_regression2 – 6</a:t>
+            </a:r>
+          </a:p>
+        </p:txBody>
+      </p:sp>
+      <p:sp>
+        <p:nvSpPr>
+          <p:cNvPr id="42" name="TextBox 41"/>
+          <p:cNvSpPr txBox="1"/>
+          <p:nvPr/>
+        </p:nvSpPr>
+        <p:spPr>
+          <a:xfrm>
+            <a:off x="9857232" y="4956048"/>
+            <a:ext cx="1508760" cy="274320"/>
+          </a:xfrm>
+          <a:prstGeom prst="rect">
+            <a:avLst/>
+          </a:prstGeom>
+          <a:noFill/>
+        </p:spPr>
+        <p:txBody>
+          <a:bodyPr wrap="square" anchor="t" lIns="0" rIns="0" tIns="0" bIns="0">
+            <a:spAutoFit/>
+          </a:bodyPr>
+          <a:lstStyle/>
+          <a:p>
+            <a:pPr algn="r"/>
+            <a:r>
+              <a:rPr sz="1150" b="1" i="0">
+                <a:solidFill>
+                  <a:srgbClr val="0E8C8B"/>
+                </a:solidFill>
+                <a:latin typeface="Consolas"/>
+                <a:ea typeface="Microsoft JhengHei"/>
+              </a:rPr>
+              <a:t>372 / 372</a:t>
+            </a:r>
+          </a:p>
+        </p:txBody>
+      </p:sp>
+      <p:sp>
+        <p:nvSpPr>
+          <p:cNvPr id="43" name="Rectangle 42"/>
+          <p:cNvSpPr/>
+          <p:nvPr/>
+        </p:nvSpPr>
+        <p:spPr>
+          <a:xfrm>
+            <a:off x="6446520" y="5413248"/>
+            <a:ext cx="5102352" cy="512064"/>
+          </a:xfrm>
+          <a:prstGeom prst="rect">
+            <a:avLst/>
+          </a:prstGeom>
+          <a:solidFill>
+            <a:srgbClr val="1B2A41"/>
+          </a:solidFill>
+          <a:ln>
+            <a:noFill/>
+          </a:ln>
+          <a:effectLst/>
+        </p:spPr>
+        <p:style>
+          <a:lnRef idx="1">
+            <a:schemeClr val="accent1"/>
+          </a:lnRef>
+          <a:fillRef idx="3">
+            <a:schemeClr val="accent1"/>
+          </a:fillRef>
+          <a:effectRef idx="2">
+            <a:schemeClr val="accent1"/>
+          </a:effectRef>
+          <a:fontRef idx="minor">
+            <a:schemeClr val="lt1"/>
+          </a:fontRef>
+        </p:style>
+        <p:txBody>
+          <a:bodyPr rtlCol="0" anchor="ctr"/>
+          <a:lstStyle/>
+          <a:p>
+            <a:pPr algn="ctr"/>
+          </a:p>
+        </p:txBody>
+      </p:sp>
+      <p:sp>
+        <p:nvSpPr>
+          <p:cNvPr id="44" name="TextBox 43"/>
+          <p:cNvSpPr txBox="1"/>
+          <p:nvPr/>
+        </p:nvSpPr>
+        <p:spPr>
+          <a:xfrm>
+            <a:off x="6629400" y="5522976"/>
+            <a:ext cx="3291840" cy="274320"/>
+          </a:xfrm>
+          <a:prstGeom prst="rect">
+            <a:avLst/>
+          </a:prstGeom>
+          <a:noFill/>
+        </p:spPr>
+        <p:txBody>
+          <a:bodyPr wrap="square" anchor="t" lIns="0" rIns="0" tIns="0" bIns="0">
+            <a:spAutoFit/>
+          </a:bodyPr>
+          <a:lstStyle/>
+          <a:p>
+            <a:pPr algn="l"/>
+            <a:r>
+              <a:rPr sz="1200" b="1" i="0">
+                <a:solidFill>
+                  <a:srgbClr val="FFFFFF"/>
+                </a:solidFill>
+                <a:latin typeface="Microsoft JhengHei"/>
+                <a:ea typeface="Microsoft JhengHei"/>
+              </a:rPr>
+              <a:t>合計</a:t>
+            </a:r>
+          </a:p>
+        </p:txBody>
+      </p:sp>
+      <p:sp>
+        <p:nvSpPr>
+          <p:cNvPr id="45" name="TextBox 44"/>
+          <p:cNvSpPr txBox="1"/>
+          <p:nvPr/>
+        </p:nvSpPr>
+        <p:spPr>
+          <a:xfrm>
+            <a:off x="9857232" y="5522976"/>
+            <a:ext cx="1508760" cy="274320"/>
+          </a:xfrm>
+          <a:prstGeom prst="rect">
+            <a:avLst/>
+          </a:prstGeom>
+          <a:noFill/>
+        </p:spPr>
+        <p:txBody>
+          <a:bodyPr wrap="square" anchor="t" lIns="0" rIns="0" tIns="0" bIns="0">
+            <a:spAutoFit/>
+          </a:bodyPr>
+          <a:lstStyle/>
+          <a:p>
+            <a:pPr algn="r"/>
+            <a:r>
+              <a:rPr sz="1200" b="1" i="0">
+                <a:solidFill>
+                  <a:srgbClr val="3FD0B6"/>
+                </a:solidFill>
+                <a:latin typeface="Consolas"/>
+                <a:ea typeface="Microsoft JhengHei"/>
+              </a:rPr>
+              <a:t>602 / 602</a:t>
+            </a:r>
+          </a:p>
+        </p:txBody>
+      </p:sp>
+      <p:sp>
+        <p:nvSpPr>
+          <p:cNvPr id="46" name="TextBox 45"/>
+          <p:cNvSpPr txBox="1"/>
+          <p:nvPr/>
+        </p:nvSpPr>
+        <p:spPr>
+          <a:xfrm>
+            <a:off x="640080" y="6473952"/>
+            <a:ext cx="7315200" cy="274320"/>
+          </a:xfrm>
+          <a:prstGeom prst="rect">
+            <a:avLst/>
+          </a:prstGeom>
+          <a:noFill/>
+        </p:spPr>
+        <p:txBody>
+          <a:bodyPr wrap="square" anchor="t" lIns="0" rIns="0" tIns="0" bIns="0">
+            <a:spAutoFit/>
+          </a:bodyPr>
+          <a:lstStyle/>
+          <a:p>
+            <a:pPr algn="l"/>
+            <a:r>
               <a:rPr sz="900" b="0" i="0">
                 <a:solidFill>
                   <a:srgbClr val="5F6E7D"/>
@@ -13101,7 +13524,43 @@
                 <a:latin typeface="Consolas"/>
                 <a:ea typeface="Microsoft JhengHei"/>
               </a:rPr>
-              <a:t>8 / 9</a:t>
+              <a:t>Clawer C Data Normalization Engine — b11402037 · b11402053</a:t>
+            </a:r>
+          </a:p>
+        </p:txBody>
+      </p:sp>
+      <p:sp>
+        <p:nvSpPr>
+          <p:cNvPr id="47" name="TextBox 46"/>
+          <p:cNvSpPr txBox="1"/>
+          <p:nvPr/>
+        </p:nvSpPr>
+        <p:spPr>
+          <a:xfrm>
+            <a:off x="10607040" y="6473952"/>
+            <a:ext cx="941832" cy="274320"/>
+          </a:xfrm>
+          <a:prstGeom prst="rect">
+            <a:avLst/>
+          </a:prstGeom>
+          <a:noFill/>
+        </p:spPr>
+        <p:txBody>
+          <a:bodyPr wrap="square" anchor="t" lIns="0" rIns="0" tIns="0" bIns="0">
+            <a:spAutoFit/>
+          </a:bodyPr>
+          <a:lstStyle/>
+          <a:p>
+            <a:pPr algn="r"/>
+            <a:r>
+              <a:rPr sz="900" b="0" i="0">
+                <a:solidFill>
+                  <a:srgbClr val="5F6E7D"/>
+                </a:solidFill>
+                <a:latin typeface="Consolas"/>
+                <a:ea typeface="Microsoft JhengHei"/>
+              </a:rPr>
+              <a:t>8 / 10</a:t>
             </a:r>
           </a:p>
         </p:txBody>
@@ -13139,6 +13598,622 @@
             <a:avLst/>
           </a:prstGeom>
           <a:solidFill>
+            <a:srgbClr val="FFFFFF"/>
+          </a:solidFill>
+          <a:ln>
+            <a:noFill/>
+          </a:ln>
+          <a:effectLst/>
+        </p:spPr>
+        <p:style>
+          <a:lnRef idx="1">
+            <a:schemeClr val="accent1"/>
+          </a:lnRef>
+          <a:fillRef idx="3">
+            <a:schemeClr val="accent1"/>
+          </a:fillRef>
+          <a:effectRef idx="2">
+            <a:schemeClr val="accent1"/>
+          </a:effectRef>
+          <a:fontRef idx="minor">
+            <a:schemeClr val="lt1"/>
+          </a:fontRef>
+        </p:style>
+        <p:txBody>
+          <a:bodyPr rtlCol="0" anchor="ctr"/>
+          <a:lstStyle/>
+          <a:p>
+            <a:pPr algn="ctr"/>
+          </a:p>
+        </p:txBody>
+      </p:sp>
+      <p:sp>
+        <p:nvSpPr>
+          <p:cNvPr id="3" name="TextBox 2"/>
+          <p:cNvSpPr txBox="1"/>
+          <p:nvPr/>
+        </p:nvSpPr>
+        <p:spPr>
+          <a:xfrm>
+            <a:off x="640080" y="384048"/>
+            <a:ext cx="10972800" cy="274320"/>
+          </a:xfrm>
+          <a:prstGeom prst="rect">
+            <a:avLst/>
+          </a:prstGeom>
+          <a:noFill/>
+        </p:spPr>
+        <p:txBody>
+          <a:bodyPr wrap="square" anchor="t" lIns="0" rIns="0" tIns="0" bIns="0">
+            <a:spAutoFit/>
+          </a:bodyPr>
+          <a:lstStyle/>
+          <a:p>
+            <a:pPr algn="l"/>
+            <a:r>
+              <a:rPr sz="1200" b="1" i="0" spc="160">
+                <a:solidFill>
+                  <a:srgbClr val="0E8C8B"/>
+                </a:solidFill>
+                <a:latin typeface="Consolas"/>
+                <a:ea typeface="Microsoft JhengHei"/>
+              </a:rPr>
+              <a:t>04 · CONCLUSION</a:t>
+            </a:r>
+          </a:p>
+        </p:txBody>
+      </p:sp>
+      <p:sp>
+        <p:nvSpPr>
+          <p:cNvPr id="4" name="TextBox 3"/>
+          <p:cNvSpPr txBox="1"/>
+          <p:nvPr/>
+        </p:nvSpPr>
+        <p:spPr>
+          <a:xfrm>
+            <a:off x="640080" y="658368"/>
+            <a:ext cx="10972800" cy="566928"/>
+          </a:xfrm>
+          <a:prstGeom prst="rect">
+            <a:avLst/>
+          </a:prstGeom>
+          <a:noFill/>
+        </p:spPr>
+        <p:txBody>
+          <a:bodyPr wrap="square" anchor="t" lIns="0" rIns="0" tIns="0" bIns="0">
+            <a:spAutoFit/>
+          </a:bodyPr>
+          <a:lstStyle/>
+          <a:p>
+            <a:pPr algn="l"/>
+            <a:r>
+              <a:rPr sz="2700" b="1" i="0">
+                <a:solidFill>
+                  <a:srgbClr val="22303F"/>
+                </a:solidFill>
+                <a:latin typeface="Microsoft JhengHei"/>
+                <a:ea typeface="Microsoft JhengHei"/>
+              </a:rPr>
+              <a:t>結論 — 成果、限制與未來工作</a:t>
+            </a:r>
+          </a:p>
+        </p:txBody>
+      </p:sp>
+      <p:sp>
+        <p:nvSpPr>
+          <p:cNvPr id="5" name="Rounded Rectangle 4"/>
+          <p:cNvSpPr/>
+          <p:nvPr/>
+        </p:nvSpPr>
+        <p:spPr>
+          <a:xfrm>
+            <a:off x="640080" y="1481328"/>
+            <a:ext cx="3511296" cy="3931920"/>
+          </a:xfrm>
+          <a:prstGeom prst="roundRect">
+            <a:avLst>
+              <a:gd name="adj" fmla="val 5000"/>
+            </a:avLst>
+          </a:prstGeom>
+          <a:solidFill>
+            <a:srgbClr val="F3F7F9"/>
+          </a:solidFill>
+          <a:ln w="9525">
+            <a:solidFill>
+              <a:srgbClr val="D8E1E7"/>
+            </a:solidFill>
+          </a:ln>
+          <a:effectLst/>
+        </p:spPr>
+        <p:style>
+          <a:lnRef idx="1">
+            <a:schemeClr val="accent1"/>
+          </a:lnRef>
+          <a:fillRef idx="3">
+            <a:schemeClr val="accent1"/>
+          </a:fillRef>
+          <a:effectRef idx="2">
+            <a:schemeClr val="accent1"/>
+          </a:effectRef>
+          <a:fontRef idx="minor">
+            <a:schemeClr val="lt1"/>
+          </a:fontRef>
+        </p:style>
+        <p:txBody>
+          <a:bodyPr rtlCol="0" anchor="ctr"/>
+          <a:lstStyle/>
+          <a:p>
+            <a:pPr algn="ctr"/>
+          </a:p>
+        </p:txBody>
+      </p:sp>
+      <p:sp>
+        <p:nvSpPr>
+          <p:cNvPr id="6" name="Rectangle 5"/>
+          <p:cNvSpPr/>
+          <p:nvPr/>
+        </p:nvSpPr>
+        <p:spPr>
+          <a:xfrm>
+            <a:off x="640080" y="1481328"/>
+            <a:ext cx="3511296" cy="566928"/>
+          </a:xfrm>
+          <a:prstGeom prst="rect">
+            <a:avLst/>
+          </a:prstGeom>
+          <a:solidFill>
+            <a:srgbClr val="0E8C8B"/>
+          </a:solidFill>
+          <a:ln>
+            <a:noFill/>
+          </a:ln>
+          <a:effectLst/>
+        </p:spPr>
+        <p:style>
+          <a:lnRef idx="1">
+            <a:schemeClr val="accent1"/>
+          </a:lnRef>
+          <a:fillRef idx="3">
+            <a:schemeClr val="accent1"/>
+          </a:fillRef>
+          <a:effectRef idx="2">
+            <a:schemeClr val="accent1"/>
+          </a:effectRef>
+          <a:fontRef idx="minor">
+            <a:schemeClr val="lt1"/>
+          </a:fontRef>
+        </p:style>
+        <p:txBody>
+          <a:bodyPr rtlCol="0" anchor="ctr"/>
+          <a:lstStyle/>
+          <a:p>
+            <a:pPr algn="ctr"/>
+          </a:p>
+        </p:txBody>
+      </p:sp>
+      <p:sp>
+        <p:nvSpPr>
+          <p:cNvPr id="7" name="TextBox 6"/>
+          <p:cNvSpPr txBox="1"/>
+          <p:nvPr/>
+        </p:nvSpPr>
+        <p:spPr>
+          <a:xfrm>
+            <a:off x="868680" y="1609344"/>
+            <a:ext cx="3054096" cy="310896"/>
+          </a:xfrm>
+          <a:prstGeom prst="rect">
+            <a:avLst/>
+          </a:prstGeom>
+          <a:noFill/>
+        </p:spPr>
+        <p:txBody>
+          <a:bodyPr wrap="square" anchor="t" lIns="0" rIns="0" tIns="0" bIns="0">
+            <a:spAutoFit/>
+          </a:bodyPr>
+          <a:lstStyle/>
+          <a:p>
+            <a:pPr algn="l"/>
+            <a:r>
+              <a:rPr sz="1450" b="1" i="0">
+                <a:solidFill>
+                  <a:srgbClr val="FFFFFF"/>
+                </a:solidFill>
+                <a:latin typeface="Microsoft JhengHei"/>
+                <a:ea typeface="Microsoft JhengHei"/>
+              </a:rPr>
+              <a:t>主要成果</a:t>
+            </a:r>
+          </a:p>
+        </p:txBody>
+      </p:sp>
+      <p:sp>
+        <p:nvSpPr>
+          <p:cNvPr id="8" name="TextBox 7"/>
+          <p:cNvSpPr txBox="1"/>
+          <p:nvPr/>
+        </p:nvSpPr>
+        <p:spPr>
+          <a:xfrm>
+            <a:off x="896112" y="2286000"/>
+            <a:ext cx="2999232" cy="3017520"/>
+          </a:xfrm>
+          <a:prstGeom prst="rect">
+            <a:avLst/>
+          </a:prstGeom>
+          <a:noFill/>
+        </p:spPr>
+        <p:txBody>
+          <a:bodyPr wrap="square" anchor="t" lIns="0" rIns="0" tIns="0" bIns="0">
+            <a:spAutoFit/>
+          </a:bodyPr>
+          <a:lstStyle/>
+          <a:p>
+            <a:pPr algn="l" marL="164592" indent="-164592">
+              <a:lnSpc>
+                <a:spcPct val="122000"/>
+              </a:lnSpc>
+              <a:spcAft>
+                <a:spcPts val="1000"/>
+              </a:spcAft>
+              <a:buClr>
+                <a:srgbClr val="0E8C8B"/>
+              </a:buClr>
+              <a:buFont typeface="Arial"/>
+              <a:buChar char="▪"/>
+            </a:pPr>
+            <a:r>
+              <a:rPr sz="1150" b="0" i="0">
+                <a:solidFill>
+                  <a:srgbClr val="22303F"/>
+                </a:solidFill>
+                <a:latin typeface="Microsoft JhengHei"/>
+                <a:ea typeface="Microsoft JhengHei"/>
+              </a:rPr>
+              <a:t>完成 C11 正規化引擎：reader → 四大解析模組 → writer 完整 pipeline</a:t>
+            </a:r>
+          </a:p>
+          <a:p>
+            <a:pPr algn="l" marL="164592" indent="-164592">
+              <a:lnSpc>
+                <a:spcPct val="122000"/>
+              </a:lnSpc>
+              <a:spcAft>
+                <a:spcPts val="1000"/>
+              </a:spcAft>
+              <a:buClr>
+                <a:srgbClr val="0E8C8B"/>
+              </a:buClr>
+              <a:buFont typeface="Arial"/>
+              <a:buChar char="▪"/>
+            </a:pPr>
+            <a:r>
+              <a:rPr sz="1150" b="0" i="0">
+                <a:solidFill>
+                  <a:srgbClr val="22303F"/>
+                </a:solidFill>
+                <a:latin typeface="Microsoft JhengHei"/>
+                <a:ea typeface="Microsoft JhengHei"/>
+              </a:rPr>
+              <a:t>602 項單元／回歸測試全數通過，涵蓋極端值、規模與弱點情境</a:t>
+            </a:r>
+          </a:p>
+          <a:p>
+            <a:pPr algn="l" marL="164592" indent="-164592">
+              <a:lnSpc>
+                <a:spcPct val="122000"/>
+              </a:lnSpc>
+              <a:spcAft>
+                <a:spcPts val="1000"/>
+              </a:spcAft>
+              <a:buClr>
+                <a:srgbClr val="0E8C8B"/>
+              </a:buClr>
+              <a:buFont typeface="Arial"/>
+              <a:buChar char="▪"/>
+            </a:pPr>
+            <a:r>
+              <a:rPr sz="1150" b="0" i="0">
+                <a:solidFill>
+                  <a:srgbClr val="22303F"/>
+                </a:solidFill>
+                <a:latin typeface="Microsoft JhengHei"/>
+                <a:ea typeface="Microsoft JhengHei"/>
+              </a:rPr>
+              <a:t>6 輪弱點導向修正（A–T 共 17 項）建立回歸防護網</a:t>
+            </a:r>
+          </a:p>
+        </p:txBody>
+      </p:sp>
+      <p:sp>
+        <p:nvSpPr>
+          <p:cNvPr id="9" name="Rounded Rectangle 8"/>
+          <p:cNvSpPr/>
+          <p:nvPr/>
+        </p:nvSpPr>
+        <p:spPr>
+          <a:xfrm>
+            <a:off x="4334256" y="1481328"/>
+            <a:ext cx="3511296" cy="3931920"/>
+          </a:xfrm>
+          <a:prstGeom prst="roundRect">
+            <a:avLst>
+              <a:gd name="adj" fmla="val 5000"/>
+            </a:avLst>
+          </a:prstGeom>
+          <a:solidFill>
+            <a:srgbClr val="F3F7F9"/>
+          </a:solidFill>
+          <a:ln w="9525">
+            <a:solidFill>
+              <a:srgbClr val="D8E1E7"/>
+            </a:solidFill>
+          </a:ln>
+          <a:effectLst/>
+        </p:spPr>
+        <p:style>
+          <a:lnRef idx="1">
+            <a:schemeClr val="accent1"/>
+          </a:lnRef>
+          <a:fillRef idx="3">
+            <a:schemeClr val="accent1"/>
+          </a:fillRef>
+          <a:effectRef idx="2">
+            <a:schemeClr val="accent1"/>
+          </a:effectRef>
+          <a:fontRef idx="minor">
+            <a:schemeClr val="lt1"/>
+          </a:fontRef>
+        </p:style>
+        <p:txBody>
+          <a:bodyPr rtlCol="0" anchor="ctr"/>
+          <a:lstStyle/>
+          <a:p>
+            <a:pPr algn="ctr"/>
+          </a:p>
+        </p:txBody>
+      </p:sp>
+      <p:sp>
+        <p:nvSpPr>
+          <p:cNvPr id="10" name="Rectangle 9"/>
+          <p:cNvSpPr/>
+          <p:nvPr/>
+        </p:nvSpPr>
+        <p:spPr>
+          <a:xfrm>
+            <a:off x="4334256" y="1481328"/>
+            <a:ext cx="3511296" cy="566928"/>
+          </a:xfrm>
+          <a:prstGeom prst="rect">
+            <a:avLst/>
+          </a:prstGeom>
+          <a:solidFill>
+            <a:srgbClr val="C0564A"/>
+          </a:solidFill>
+          <a:ln>
+            <a:noFill/>
+          </a:ln>
+          <a:effectLst/>
+        </p:spPr>
+        <p:style>
+          <a:lnRef idx="1">
+            <a:schemeClr val="accent1"/>
+          </a:lnRef>
+          <a:fillRef idx="3">
+            <a:schemeClr val="accent1"/>
+          </a:fillRef>
+          <a:effectRef idx="2">
+            <a:schemeClr val="accent1"/>
+          </a:effectRef>
+          <a:fontRef idx="minor">
+            <a:schemeClr val="lt1"/>
+          </a:fontRef>
+        </p:style>
+        <p:txBody>
+          <a:bodyPr rtlCol="0" anchor="ctr"/>
+          <a:lstStyle/>
+          <a:p>
+            <a:pPr algn="ctr"/>
+          </a:p>
+        </p:txBody>
+      </p:sp>
+      <p:sp>
+        <p:nvSpPr>
+          <p:cNvPr id="11" name="TextBox 10"/>
+          <p:cNvSpPr txBox="1"/>
+          <p:nvPr/>
+        </p:nvSpPr>
+        <p:spPr>
+          <a:xfrm>
+            <a:off x="4562856" y="1609344"/>
+            <a:ext cx="3054096" cy="310896"/>
+          </a:xfrm>
+          <a:prstGeom prst="rect">
+            <a:avLst/>
+          </a:prstGeom>
+          <a:noFill/>
+        </p:spPr>
+        <p:txBody>
+          <a:bodyPr wrap="square" anchor="t" lIns="0" rIns="0" tIns="0" bIns="0">
+            <a:spAutoFit/>
+          </a:bodyPr>
+          <a:lstStyle/>
+          <a:p>
+            <a:pPr algn="l"/>
+            <a:r>
+              <a:rPr sz="1450" b="1" i="0">
+                <a:solidFill>
+                  <a:srgbClr val="FFFFFF"/>
+                </a:solidFill>
+                <a:latin typeface="Microsoft JhengHei"/>
+                <a:ea typeface="Microsoft JhengHei"/>
+              </a:rPr>
+              <a:t>已知限制</a:t>
+            </a:r>
+          </a:p>
+        </p:txBody>
+      </p:sp>
+      <p:sp>
+        <p:nvSpPr>
+          <p:cNvPr id="12" name="TextBox 11"/>
+          <p:cNvSpPr txBox="1"/>
+          <p:nvPr/>
+        </p:nvSpPr>
+        <p:spPr>
+          <a:xfrm>
+            <a:off x="4590288" y="2286000"/>
+            <a:ext cx="2999232" cy="3017520"/>
+          </a:xfrm>
+          <a:prstGeom prst="rect">
+            <a:avLst/>
+          </a:prstGeom>
+          <a:noFill/>
+        </p:spPr>
+        <p:txBody>
+          <a:bodyPr wrap="square" anchor="t" lIns="0" rIns="0" tIns="0" bIns="0">
+            <a:spAutoFit/>
+          </a:bodyPr>
+          <a:lstStyle/>
+          <a:p>
+            <a:pPr algn="l" marL="164592" indent="-164592">
+              <a:lnSpc>
+                <a:spcPct val="122000"/>
+              </a:lnSpc>
+              <a:spcAft>
+                <a:spcPts val="1000"/>
+              </a:spcAft>
+              <a:buClr>
+                <a:srgbClr val="C0564A"/>
+              </a:buClr>
+              <a:buFont typeface="Arial"/>
+              <a:buChar char="▪"/>
+            </a:pPr>
+            <a:r>
+              <a:rPr sz="1150" b="0" i="0">
+                <a:solidFill>
+                  <a:srgbClr val="22303F"/>
+                </a:solidFill>
+                <a:latin typeface="Microsoft JhengHei"/>
+                <a:ea typeface="Microsoft JhengHei"/>
+              </a:rPr>
+              <a:t>ASCII-only：É / ä / ã 等非 ASCII 字元直接傳遞，不做 Unicode 正規化</a:t>
+            </a:r>
+          </a:p>
+          <a:p>
+            <a:pPr algn="l" marL="164592" indent="-164592">
+              <a:lnSpc>
+                <a:spcPct val="122000"/>
+              </a:lnSpc>
+              <a:spcAft>
+                <a:spcPts val="1000"/>
+              </a:spcAft>
+              <a:buClr>
+                <a:srgbClr val="C0564A"/>
+              </a:buClr>
+              <a:buFont typeface="Arial"/>
+              <a:buChar char="▪"/>
+            </a:pPr>
+            <a:r>
+              <a:rPr sz="1150" b="0" i="0">
+                <a:solidFill>
+                  <a:srgbClr val="22303F"/>
+                </a:solidFill>
+                <a:latin typeface="Microsoft JhengHei"/>
+                <a:ea typeface="Microsoft JhengHei"/>
+              </a:rPr>
+              <a:t>requirement_parser 尚未實作（GMAT / GRE / GPA / IELTS / TOEFL / Duolingo）</a:t>
+            </a:r>
+          </a:p>
+          <a:p>
+            <a:pPr algn="l" marL="164592" indent="-164592">
+              <a:lnSpc>
+                <a:spcPct val="122000"/>
+              </a:lnSpc>
+              <a:spcAft>
+                <a:spcPts val="1000"/>
+              </a:spcAft>
+              <a:buClr>
+                <a:srgbClr val="C0564A"/>
+              </a:buClr>
+              <a:buFont typeface="Arial"/>
+              <a:buChar char="▪"/>
+            </a:pPr>
+            <a:r>
+              <a:rPr sz="1150" b="0" i="0">
+                <a:solidFill>
+                  <a:srgbClr val="22303F"/>
+                </a:solidFill>
+                <a:latin typeface="Microsoft JhengHei"/>
+                <a:ea typeface="Microsoft JhengHei"/>
+              </a:rPr>
+              <a:t>%.2f 捨入：99.999 輸出為 100.00（超出滿分）</a:t>
+            </a:r>
+          </a:p>
+        </p:txBody>
+      </p:sp>
+      <p:sp>
+        <p:nvSpPr>
+          <p:cNvPr id="13" name="Rounded Rectangle 12"/>
+          <p:cNvSpPr/>
+          <p:nvPr/>
+        </p:nvSpPr>
+        <p:spPr>
+          <a:xfrm>
+            <a:off x="8028431" y="1481328"/>
+            <a:ext cx="3511296" cy="3931920"/>
+          </a:xfrm>
+          <a:prstGeom prst="roundRect">
+            <a:avLst>
+              <a:gd name="adj" fmla="val 5000"/>
+            </a:avLst>
+          </a:prstGeom>
+          <a:solidFill>
+            <a:srgbClr val="F3F7F9"/>
+          </a:solidFill>
+          <a:ln w="9525">
+            <a:solidFill>
+              <a:srgbClr val="D8E1E7"/>
+            </a:solidFill>
+          </a:ln>
+          <a:effectLst/>
+        </p:spPr>
+        <p:style>
+          <a:lnRef idx="1">
+            <a:schemeClr val="accent1"/>
+          </a:lnRef>
+          <a:fillRef idx="3">
+            <a:schemeClr val="accent1"/>
+          </a:fillRef>
+          <a:effectRef idx="2">
+            <a:schemeClr val="accent1"/>
+          </a:effectRef>
+          <a:fontRef idx="minor">
+            <a:schemeClr val="lt1"/>
+          </a:fontRef>
+        </p:style>
+        <p:txBody>
+          <a:bodyPr rtlCol="0" anchor="ctr"/>
+          <a:lstStyle/>
+          <a:p>
+            <a:pPr algn="ctr"/>
+          </a:p>
+        </p:txBody>
+      </p:sp>
+      <p:sp>
+        <p:nvSpPr>
+          <p:cNvPr id="14" name="Rectangle 13"/>
+          <p:cNvSpPr/>
+          <p:nvPr/>
+        </p:nvSpPr>
+        <p:spPr>
+          <a:xfrm>
+            <a:off x="8028431" y="1481328"/>
+            <a:ext cx="3511296" cy="566928"/>
+          </a:xfrm>
+          <a:prstGeom prst="rect">
+            <a:avLst/>
+          </a:prstGeom>
+          <a:solidFill>
             <a:srgbClr val="1B2A41"/>
           </a:solidFill>
           <a:ln>
@@ -13170,14 +14245,14 @@
       </p:sp>
       <p:sp>
         <p:nvSpPr>
-          <p:cNvPr id="3" name="TextBox 2"/>
+          <p:cNvPr id="15" name="TextBox 14"/>
           <p:cNvSpPr txBox="1"/>
           <p:nvPr/>
         </p:nvSpPr>
         <p:spPr>
           <a:xfrm>
-            <a:off x="822960" y="457200"/>
-            <a:ext cx="10515600" cy="274320"/>
+            <a:off x="8257031" y="1609344"/>
+            <a:ext cx="3054096" cy="310896"/>
           </a:xfrm>
           <a:prstGeom prst="rect">
             <a:avLst/>
@@ -13192,28 +14267,28 @@
           <a:p>
             <a:pPr algn="l"/>
             <a:r>
-              <a:rPr sz="1200" b="1" i="0" spc="160">
-                <a:solidFill>
-                  <a:srgbClr val="3FD0B6"/>
-                </a:solidFill>
-                <a:latin typeface="Consolas"/>
-                <a:ea typeface="Microsoft JhengHei"/>
-              </a:rPr>
-              <a:t>REFERENCES</a:t>
-            </a:r>
-          </a:p>
-        </p:txBody>
-      </p:sp>
-      <p:sp>
-        <p:nvSpPr>
-          <p:cNvPr id="4" name="TextBox 3"/>
+              <a:rPr sz="1450" b="1" i="0">
+                <a:solidFill>
+                  <a:srgbClr val="FFFFFF"/>
+                </a:solidFill>
+                <a:latin typeface="Microsoft JhengHei"/>
+                <a:ea typeface="Microsoft JhengHei"/>
+              </a:rPr>
+              <a:t>未來工作</a:t>
+            </a:r>
+          </a:p>
+        </p:txBody>
+      </p:sp>
+      <p:sp>
+        <p:nvSpPr>
+          <p:cNvPr id="16" name="TextBox 15"/>
           <p:cNvSpPr txBox="1"/>
           <p:nvPr/>
         </p:nvSpPr>
         <p:spPr>
           <a:xfrm>
-            <a:off x="822960" y="731520"/>
-            <a:ext cx="10515600" cy="548640"/>
+            <a:off x="8284463" y="2286000"/>
+            <a:ext cx="2999232" cy="3017520"/>
           </a:xfrm>
           <a:prstGeom prst="rect">
             <a:avLst/>
@@ -13226,36 +14301,100 @@
           </a:bodyPr>
           <a:lstStyle/>
           <a:p>
-            <a:pPr algn="l"/>
-            <a:r>
-              <a:rPr sz="2700" b="1" i="0">
-                <a:solidFill>
-                  <a:srgbClr val="FFFFFF"/>
+            <a:pPr algn="l" marL="164592" indent="-164592">
+              <a:lnSpc>
+                <a:spcPct val="122000"/>
+              </a:lnSpc>
+              <a:spcAft>
+                <a:spcPts val="1000"/>
+              </a:spcAft>
+              <a:buClr>
+                <a:srgbClr val="1B2A41"/>
+              </a:buClr>
+              <a:buFont typeface="Arial"/>
+              <a:buChar char="▪"/>
+            </a:pPr>
+            <a:r>
+              <a:rPr sz="1150" b="0" i="0">
+                <a:solidFill>
+                  <a:srgbClr val="22303F"/>
                 </a:solidFill>
                 <a:latin typeface="Microsoft JhengHei"/>
                 <a:ea typeface="Microsoft JhengHei"/>
               </a:rPr>
-              <a:t>參考文獻</a:t>
-            </a:r>
-          </a:p>
-        </p:txBody>
-      </p:sp>
-      <p:sp>
-        <p:nvSpPr>
-          <p:cNvPr id="5" name="Rectangle 4"/>
+              <a:t>引入 utf8proc / ICU 處理非 ASCII 字元正規化</a:t>
+            </a:r>
+          </a:p>
+          <a:p>
+            <a:pPr algn="l" marL="164592" indent="-164592">
+              <a:lnSpc>
+                <a:spcPct val="122000"/>
+              </a:lnSpc>
+              <a:spcAft>
+                <a:spcPts val="1000"/>
+              </a:spcAft>
+              <a:buClr>
+                <a:srgbClr val="1B2A41"/>
+              </a:buClr>
+              <a:buFont typeface="Arial"/>
+              <a:buChar char="▪"/>
+            </a:pPr>
+            <a:r>
+              <a:rPr sz="1150" b="0" i="0">
+                <a:solidFill>
+                  <a:srgbClr val="22303F"/>
+                </a:solidFill>
+                <a:latin typeface="Microsoft JhengHei"/>
+                <a:ea typeface="Microsoft JhengHei"/>
+              </a:rPr>
+              <a:t>國家別名表外部化：從 mapping 檔載入，取代硬編碼</a:t>
+            </a:r>
+          </a:p>
+          <a:p>
+            <a:pPr algn="l" marL="164592" indent="-164592">
+              <a:lnSpc>
+                <a:spcPct val="122000"/>
+              </a:lnSpc>
+              <a:spcAft>
+                <a:spcPts val="1000"/>
+              </a:spcAft>
+              <a:buClr>
+                <a:srgbClr val="1B2A41"/>
+              </a:buClr>
+              <a:buFont typeface="Arial"/>
+              <a:buChar char="▪"/>
+            </a:pPr>
+            <a:r>
+              <a:rPr sz="1150" b="0" i="0">
+                <a:solidFill>
+                  <a:srgbClr val="22303F"/>
+                </a:solidFill>
+                <a:latin typeface="Microsoft JhengHei"/>
+                <a:ea typeface="Microsoft JhengHei"/>
+              </a:rPr>
+              <a:t>CI 整合（爬蟲 → 引擎 → 資料庫）並提供 libnormalizer 函式庫介面</a:t>
+            </a:r>
+          </a:p>
+        </p:txBody>
+      </p:sp>
+      <p:sp>
+        <p:nvSpPr>
+          <p:cNvPr id="17" name="Rounded Rectangle 16"/>
           <p:cNvSpPr/>
           <p:nvPr/>
         </p:nvSpPr>
         <p:spPr>
           <a:xfrm>
-            <a:off x="822960" y="1673352"/>
-            <a:ext cx="118872" cy="118872"/>
-          </a:xfrm>
-          <a:prstGeom prst="rect">
-            <a:avLst/>
+            <a:off x="640080" y="5650992"/>
+            <a:ext cx="10908792" cy="566928"/>
+          </a:xfrm>
+          <a:prstGeom prst="roundRect">
+            <a:avLst>
+              <a:gd name="adj" fmla="val 8000"/>
+            </a:avLst>
           </a:prstGeom>
           <a:solidFill>
-            <a:srgbClr val="3FD0B6"/>
+            <a:srgbClr val="1B2A41"/>
           </a:solidFill>
           <a:ln>
             <a:noFill/>
@@ -13286,14 +14425,14 @@
       </p:sp>
       <p:sp>
         <p:nvSpPr>
-          <p:cNvPr id="6" name="TextBox 5"/>
+          <p:cNvPr id="18" name="TextBox 17"/>
           <p:cNvSpPr txBox="1"/>
           <p:nvPr/>
         </p:nvSpPr>
         <p:spPr>
           <a:xfrm>
-            <a:off x="1060704" y="1591056"/>
-            <a:ext cx="4846320" cy="292608"/>
+            <a:off x="640080" y="5788152"/>
+            <a:ext cx="10908792" cy="310896"/>
           </a:xfrm>
           <a:prstGeom prst="rect">
             <a:avLst/>
@@ -13306,30 +14445,30 @@
           </a:bodyPr>
           <a:lstStyle/>
           <a:p>
-            <a:pPr algn="l"/>
-            <a:r>
-              <a:rPr sz="1450" b="1" i="0">
-                <a:solidFill>
-                  <a:srgbClr val="FFFFFF"/>
+            <a:pPr algn="ctr"/>
+            <a:r>
+              <a:rPr sz="1400" b="1" i="0">
+                <a:solidFill>
+                  <a:srgbClr val="3FD0B6"/>
                 </a:solidFill>
                 <a:latin typeface="Microsoft JhengHei"/>
                 <a:ea typeface="Microsoft JhengHei"/>
               </a:rPr>
-              <a:t>排名資料來源</a:t>
-            </a:r>
-          </a:p>
-        </p:txBody>
-      </p:sp>
-      <p:sp>
-        <p:nvSpPr>
-          <p:cNvPr id="7" name="TextBox 6"/>
+              <a:t>以小而可驗證的 C 核心，換取資料管線中可預期的正規化行為。</a:t>
+            </a:r>
+          </a:p>
+        </p:txBody>
+      </p:sp>
+      <p:sp>
+        <p:nvSpPr>
+          <p:cNvPr id="19" name="TextBox 18"/>
           <p:cNvSpPr txBox="1"/>
           <p:nvPr/>
         </p:nvSpPr>
         <p:spPr>
           <a:xfrm>
-            <a:off x="1060704" y="2011680"/>
-            <a:ext cx="5029200" cy="1554480"/>
+            <a:off x="640080" y="6473952"/>
+            <a:ext cx="7315200" cy="274320"/>
           </a:xfrm>
           <a:prstGeom prst="rect">
             <a:avLst/>
@@ -13342,136 +14481,30 @@
           </a:bodyPr>
           <a:lstStyle/>
           <a:p>
-            <a:pPr algn="l" marL="164592" indent="-164592">
-              <a:lnSpc>
-                <a:spcPct val="115000"/>
-              </a:lnSpc>
-              <a:spcAft>
-                <a:spcPts val="700"/>
-              </a:spcAft>
-              <a:buClr>
-                <a:srgbClr val="3FD0B6"/>
-              </a:buClr>
-              <a:buFont typeface="Arial"/>
-              <a:buChar char="▪"/>
-            </a:pPr>
-            <a:r>
-              <a:rPr sz="1100" b="0" i="0">
-                <a:solidFill>
-                  <a:srgbClr val="CADCFC"/>
-                </a:solidFill>
-                <a:latin typeface="Microsoft JhengHei"/>
-                <a:ea typeface="Microsoft JhengHei"/>
-              </a:rPr>
-              <a:t>QS World University Rankings — topuniversities.com</a:t>
-            </a:r>
-          </a:p>
-          <a:p>
-            <a:pPr algn="l" marL="164592" indent="-164592">
-              <a:lnSpc>
-                <a:spcPct val="115000"/>
-              </a:lnSpc>
-              <a:spcAft>
-                <a:spcPts val="700"/>
-              </a:spcAft>
-              <a:buClr>
-                <a:srgbClr val="3FD0B6"/>
-              </a:buClr>
-              <a:buFont typeface="Arial"/>
-              <a:buChar char="▪"/>
-            </a:pPr>
-            <a:r>
-              <a:rPr sz="1100" b="0" i="0">
-                <a:solidFill>
-                  <a:srgbClr val="CADCFC"/>
-                </a:solidFill>
-                <a:latin typeface="Microsoft JhengHei"/>
-                <a:ea typeface="Microsoft JhengHei"/>
-              </a:rPr>
-              <a:t>Times Higher Education (THE) World University Rankings</a:t>
-            </a:r>
-          </a:p>
-          <a:p>
-            <a:pPr algn="l" marL="164592" indent="-164592">
-              <a:lnSpc>
-                <a:spcPct val="115000"/>
-              </a:lnSpc>
-              <a:spcAft>
-                <a:spcPts val="700"/>
-              </a:spcAft>
-              <a:buClr>
-                <a:srgbClr val="3FD0B6"/>
-              </a:buClr>
-              <a:buFont typeface="Arial"/>
-              <a:buChar char="▪"/>
-            </a:pPr>
-            <a:r>
-              <a:rPr sz="1100" b="0" i="0">
-                <a:solidFill>
-                  <a:srgbClr val="CADCFC"/>
-                </a:solidFill>
-                <a:latin typeface="Microsoft JhengHei"/>
-                <a:ea typeface="Microsoft JhengHei"/>
-              </a:rPr>
-              <a:t>ShanghaiRanking / Academic Ranking of World Universities (ARWU)</a:t>
-            </a:r>
-          </a:p>
-        </p:txBody>
-      </p:sp>
-      <p:sp>
-        <p:nvSpPr>
-          <p:cNvPr id="8" name="Rectangle 7"/>
-          <p:cNvSpPr/>
-          <p:nvPr/>
-        </p:nvSpPr>
-        <p:spPr>
-          <a:xfrm>
-            <a:off x="6400800" y="1673352"/>
-            <a:ext cx="118872" cy="118872"/>
-          </a:xfrm>
-          <a:prstGeom prst="rect">
-            <a:avLst/>
-          </a:prstGeom>
-          <a:solidFill>
-            <a:srgbClr val="3FD0B6"/>
-          </a:solidFill>
-          <a:ln>
-            <a:noFill/>
-          </a:ln>
-          <a:effectLst/>
-        </p:spPr>
-        <p:style>
-          <a:lnRef idx="1">
-            <a:schemeClr val="accent1"/>
-          </a:lnRef>
-          <a:fillRef idx="3">
-            <a:schemeClr val="accent1"/>
-          </a:fillRef>
-          <a:effectRef idx="2">
-            <a:schemeClr val="accent1"/>
-          </a:effectRef>
-          <a:fontRef idx="minor">
-            <a:schemeClr val="lt1"/>
-          </a:fontRef>
-        </p:style>
-        <p:txBody>
-          <a:bodyPr rtlCol="0" anchor="ctr"/>
-          <a:lstStyle/>
-          <a:p>
-            <a:pPr algn="ctr"/>
-          </a:p>
-        </p:txBody>
-      </p:sp>
-      <p:sp>
-        <p:nvSpPr>
-          <p:cNvPr id="9" name="TextBox 8"/>
+            <a:pPr algn="l"/>
+            <a:r>
+              <a:rPr sz="900" b="0" i="0">
+                <a:solidFill>
+                  <a:srgbClr val="5F6E7D"/>
+                </a:solidFill>
+                <a:latin typeface="Consolas"/>
+                <a:ea typeface="Microsoft JhengHei"/>
+              </a:rPr>
+              <a:t>Clawer C Data Normalization Engine — b11402037 · b11402053</a:t>
+            </a:r>
+          </a:p>
+        </p:txBody>
+      </p:sp>
+      <p:sp>
+        <p:nvSpPr>
+          <p:cNvPr id="20" name="TextBox 19"/>
           <p:cNvSpPr txBox="1"/>
           <p:nvPr/>
         </p:nvSpPr>
         <p:spPr>
           <a:xfrm>
-            <a:off x="6638544" y="1591056"/>
-            <a:ext cx="4846320" cy="292608"/>
+            <a:off x="10607040" y="6473952"/>
+            <a:ext cx="941832" cy="274320"/>
           </a:xfrm>
           <a:prstGeom prst="rect">
             <a:avLst/>
@@ -13484,620 +14517,16 @@
           </a:bodyPr>
           <a:lstStyle/>
           <a:p>
-            <a:pPr algn="l"/>
-            <a:r>
-              <a:rPr sz="1450" b="1" i="0">
-                <a:solidFill>
-                  <a:srgbClr val="FFFFFF"/>
-                </a:solidFill>
-                <a:latin typeface="Microsoft JhengHei"/>
-                <a:ea typeface="Microsoft JhengHei"/>
-              </a:rPr>
-              <a:t>技術標準</a:t>
-            </a:r>
-          </a:p>
-        </p:txBody>
-      </p:sp>
-      <p:sp>
-        <p:nvSpPr>
-          <p:cNvPr id="10" name="TextBox 9"/>
-          <p:cNvSpPr txBox="1"/>
-          <p:nvPr/>
-        </p:nvSpPr>
-        <p:spPr>
-          <a:xfrm>
-            <a:off x="6638544" y="2011680"/>
-            <a:ext cx="5029200" cy="1554480"/>
-          </a:xfrm>
-          <a:prstGeom prst="rect">
-            <a:avLst/>
-          </a:prstGeom>
-          <a:noFill/>
-        </p:spPr>
-        <p:txBody>
-          <a:bodyPr wrap="square" anchor="t" lIns="0" rIns="0" tIns="0" bIns="0">
-            <a:spAutoFit/>
-          </a:bodyPr>
-          <a:lstStyle/>
-          <a:p>
-            <a:pPr algn="l" marL="164592" indent="-164592">
-              <a:lnSpc>
-                <a:spcPct val="115000"/>
-              </a:lnSpc>
-              <a:spcAft>
-                <a:spcPts val="700"/>
-              </a:spcAft>
-              <a:buClr>
-                <a:srgbClr val="3FD0B6"/>
-              </a:buClr>
-              <a:buFont typeface="Arial"/>
-              <a:buChar char="▪"/>
-            </a:pPr>
-            <a:r>
-              <a:rPr sz="1100" b="0" i="0">
-                <a:solidFill>
-                  <a:srgbClr val="CADCFC"/>
-                </a:solidFill>
-                <a:latin typeface="Microsoft JhengHei"/>
-                <a:ea typeface="Microsoft JhengHei"/>
-              </a:rPr>
-              <a:t>ISO 3166-1 — 國家代碼標準（國家別名映射依據）</a:t>
-            </a:r>
-          </a:p>
-          <a:p>
-            <a:pPr algn="l" marL="164592" indent="-164592">
-              <a:lnSpc>
-                <a:spcPct val="115000"/>
-              </a:lnSpc>
-              <a:spcAft>
-                <a:spcPts val="700"/>
-              </a:spcAft>
-              <a:buClr>
-                <a:srgbClr val="3FD0B6"/>
-              </a:buClr>
-              <a:buFont typeface="Arial"/>
-              <a:buChar char="▪"/>
-            </a:pPr>
-            <a:r>
-              <a:rPr sz="1100" b="0" i="0">
-                <a:solidFill>
-                  <a:srgbClr val="CADCFC"/>
-                </a:solidFill>
-                <a:latin typeface="Microsoft JhengHei"/>
-                <a:ea typeface="Microsoft JhengHei"/>
-              </a:rPr>
-              <a:t>RFC 4180 — CSV 格式標準（quoting / escaping 規範）</a:t>
-            </a:r>
-          </a:p>
-          <a:p>
-            <a:pPr algn="l" marL="164592" indent="-164592">
-              <a:lnSpc>
-                <a:spcPct val="115000"/>
-              </a:lnSpc>
-              <a:spcAft>
-                <a:spcPts val="700"/>
-              </a:spcAft>
-              <a:buClr>
-                <a:srgbClr val="3FD0B6"/>
-              </a:buClr>
-              <a:buFont typeface="Arial"/>
-              <a:buChar char="▪"/>
-            </a:pPr>
-            <a:r>
-              <a:rPr sz="1100" b="0" i="0">
-                <a:solidFill>
-                  <a:srgbClr val="CADCFC"/>
-                </a:solidFill>
-                <a:latin typeface="Microsoft JhengHei"/>
-                <a:ea typeface="Microsoft JhengHei"/>
-              </a:rPr>
-              <a:t>Unicode UAX #15 — Unicode Normalization Forms（NFC / NFD）</a:t>
-            </a:r>
-          </a:p>
-        </p:txBody>
-      </p:sp>
-      <p:sp>
-        <p:nvSpPr>
-          <p:cNvPr id="11" name="Rectangle 10"/>
-          <p:cNvSpPr/>
-          <p:nvPr/>
-        </p:nvSpPr>
-        <p:spPr>
-          <a:xfrm>
-            <a:off x="822960" y="3867911"/>
-            <a:ext cx="118872" cy="118872"/>
-          </a:xfrm>
-          <a:prstGeom prst="rect">
-            <a:avLst/>
-          </a:prstGeom>
-          <a:solidFill>
-            <a:srgbClr val="3FD0B6"/>
-          </a:solidFill>
-          <a:ln>
-            <a:noFill/>
-          </a:ln>
-          <a:effectLst/>
-        </p:spPr>
-        <p:style>
-          <a:lnRef idx="1">
-            <a:schemeClr val="accent1"/>
-          </a:lnRef>
-          <a:fillRef idx="3">
-            <a:schemeClr val="accent1"/>
-          </a:fillRef>
-          <a:effectRef idx="2">
-            <a:schemeClr val="accent1"/>
-          </a:effectRef>
-          <a:fontRef idx="minor">
-            <a:schemeClr val="lt1"/>
-          </a:fontRef>
-        </p:style>
-        <p:txBody>
-          <a:bodyPr rtlCol="0" anchor="ctr"/>
-          <a:lstStyle/>
-          <a:p>
-            <a:pPr algn="ctr"/>
-          </a:p>
-        </p:txBody>
-      </p:sp>
-      <p:sp>
-        <p:nvSpPr>
-          <p:cNvPr id="12" name="TextBox 11"/>
-          <p:cNvSpPr txBox="1"/>
-          <p:nvPr/>
-        </p:nvSpPr>
-        <p:spPr>
-          <a:xfrm>
-            <a:off x="1060704" y="3785615"/>
-            <a:ext cx="4846320" cy="292608"/>
-          </a:xfrm>
-          <a:prstGeom prst="rect">
-            <a:avLst/>
-          </a:prstGeom>
-          <a:noFill/>
-        </p:spPr>
-        <p:txBody>
-          <a:bodyPr wrap="square" anchor="t" lIns="0" rIns="0" tIns="0" bIns="0">
-            <a:spAutoFit/>
-          </a:bodyPr>
-          <a:lstStyle/>
-          <a:p>
-            <a:pPr algn="l"/>
-            <a:r>
-              <a:rPr sz="1450" b="1" i="0">
-                <a:solidFill>
-                  <a:srgbClr val="FFFFFF"/>
-                </a:solidFill>
-                <a:latin typeface="Microsoft JhengHei"/>
-                <a:ea typeface="Microsoft JhengHei"/>
-              </a:rPr>
-              <a:t>語言與工具</a:t>
-            </a:r>
-          </a:p>
-        </p:txBody>
-      </p:sp>
-      <p:sp>
-        <p:nvSpPr>
-          <p:cNvPr id="13" name="TextBox 12"/>
-          <p:cNvSpPr txBox="1"/>
-          <p:nvPr/>
-        </p:nvSpPr>
-        <p:spPr>
-          <a:xfrm>
-            <a:off x="1060704" y="4206240"/>
-            <a:ext cx="5029200" cy="1554480"/>
-          </a:xfrm>
-          <a:prstGeom prst="rect">
-            <a:avLst/>
-          </a:prstGeom>
-          <a:noFill/>
-        </p:spPr>
-        <p:txBody>
-          <a:bodyPr wrap="square" anchor="t" lIns="0" rIns="0" tIns="0" bIns="0">
-            <a:spAutoFit/>
-          </a:bodyPr>
-          <a:lstStyle/>
-          <a:p>
-            <a:pPr algn="l" marL="164592" indent="-164592">
-              <a:lnSpc>
-                <a:spcPct val="115000"/>
-              </a:lnSpc>
-              <a:spcAft>
-                <a:spcPts val="700"/>
-              </a:spcAft>
-              <a:buClr>
-                <a:srgbClr val="3FD0B6"/>
-              </a:buClr>
-              <a:buFont typeface="Arial"/>
-              <a:buChar char="▪"/>
-            </a:pPr>
-            <a:r>
-              <a:rPr sz="1100" b="0" i="0">
-                <a:solidFill>
-                  <a:srgbClr val="CADCFC"/>
-                </a:solidFill>
-                <a:latin typeface="Microsoft JhengHei"/>
-                <a:ea typeface="Microsoft JhengHei"/>
-              </a:rPr>
-              <a:t>ISO/IEC 9899:2011 — C11 Language Standard</a:t>
-            </a:r>
-          </a:p>
-          <a:p>
-            <a:pPr algn="l" marL="164592" indent="-164592">
-              <a:lnSpc>
-                <a:spcPct val="115000"/>
-              </a:lnSpc>
-              <a:spcAft>
-                <a:spcPts val="700"/>
-              </a:spcAft>
-              <a:buClr>
-                <a:srgbClr val="3FD0B6"/>
-              </a:buClr>
-              <a:buFont typeface="Arial"/>
-              <a:buChar char="▪"/>
-            </a:pPr>
-            <a:r>
-              <a:rPr sz="1100" b="0" i="0">
-                <a:solidFill>
-                  <a:srgbClr val="CADCFC"/>
-                </a:solidFill>
-                <a:latin typeface="Microsoft JhengHei"/>
-                <a:ea typeface="Microsoft JhengHei"/>
-              </a:rPr>
-              <a:t>GCC Compiler Documentation（-Wall -Wextra）</a:t>
-            </a:r>
-          </a:p>
-          <a:p>
-            <a:pPr algn="l" marL="164592" indent="-164592">
-              <a:lnSpc>
-                <a:spcPct val="115000"/>
-              </a:lnSpc>
-              <a:spcAft>
-                <a:spcPts val="700"/>
-              </a:spcAft>
-              <a:buClr>
-                <a:srgbClr val="3FD0B6"/>
-              </a:buClr>
-              <a:buFont typeface="Arial"/>
-              <a:buChar char="▪"/>
-            </a:pPr>
-            <a:r>
-              <a:rPr sz="1100" b="0" i="0">
-                <a:solidFill>
-                  <a:srgbClr val="CADCFC"/>
-                </a:solidFill>
-                <a:latin typeface="Microsoft JhengHei"/>
-                <a:ea typeface="Microsoft JhengHei"/>
-              </a:rPr>
-              <a:t>GNU Make Manual</a:t>
-            </a:r>
-          </a:p>
-        </p:txBody>
-      </p:sp>
-      <p:sp>
-        <p:nvSpPr>
-          <p:cNvPr id="14" name="Rectangle 13"/>
-          <p:cNvSpPr/>
-          <p:nvPr/>
-        </p:nvSpPr>
-        <p:spPr>
-          <a:xfrm>
-            <a:off x="6400800" y="3867911"/>
-            <a:ext cx="118872" cy="118872"/>
-          </a:xfrm>
-          <a:prstGeom prst="rect">
-            <a:avLst/>
-          </a:prstGeom>
-          <a:solidFill>
-            <a:srgbClr val="3FD0B6"/>
-          </a:solidFill>
-          <a:ln>
-            <a:noFill/>
-          </a:ln>
-          <a:effectLst/>
-        </p:spPr>
-        <p:style>
-          <a:lnRef idx="1">
-            <a:schemeClr val="accent1"/>
-          </a:lnRef>
-          <a:fillRef idx="3">
-            <a:schemeClr val="accent1"/>
-          </a:fillRef>
-          <a:effectRef idx="2">
-            <a:schemeClr val="accent1"/>
-          </a:effectRef>
-          <a:fontRef idx="minor">
-            <a:schemeClr val="lt1"/>
-          </a:fontRef>
-        </p:style>
-        <p:txBody>
-          <a:bodyPr rtlCol="0" anchor="ctr"/>
-          <a:lstStyle/>
-          <a:p>
-            <a:pPr algn="ctr"/>
-          </a:p>
-        </p:txBody>
-      </p:sp>
-      <p:sp>
-        <p:nvSpPr>
-          <p:cNvPr id="15" name="TextBox 14"/>
-          <p:cNvSpPr txBox="1"/>
-          <p:nvPr/>
-        </p:nvSpPr>
-        <p:spPr>
-          <a:xfrm>
-            <a:off x="6638544" y="3785615"/>
-            <a:ext cx="4846320" cy="292608"/>
-          </a:xfrm>
-          <a:prstGeom prst="rect">
-            <a:avLst/>
-          </a:prstGeom>
-          <a:noFill/>
-        </p:spPr>
-        <p:txBody>
-          <a:bodyPr wrap="square" anchor="t" lIns="0" rIns="0" tIns="0" bIns="0">
-            <a:spAutoFit/>
-          </a:bodyPr>
-          <a:lstStyle/>
-          <a:p>
-            <a:pPr algn="l"/>
-            <a:r>
-              <a:rPr sz="1450" b="1" i="0">
-                <a:solidFill>
-                  <a:srgbClr val="FFFFFF"/>
-                </a:solidFill>
-                <a:latin typeface="Microsoft JhengHei"/>
-                <a:ea typeface="Microsoft JhengHei"/>
-              </a:rPr>
-              <a:t>專案內部文件</a:t>
-            </a:r>
-          </a:p>
-        </p:txBody>
-      </p:sp>
-      <p:sp>
-        <p:nvSpPr>
-          <p:cNvPr id="16" name="TextBox 15"/>
-          <p:cNvSpPr txBox="1"/>
-          <p:nvPr/>
-        </p:nvSpPr>
-        <p:spPr>
-          <a:xfrm>
-            <a:off x="6638544" y="4206240"/>
-            <a:ext cx="5029200" cy="1554480"/>
-          </a:xfrm>
-          <a:prstGeom prst="rect">
-            <a:avLst/>
-          </a:prstGeom>
-          <a:noFill/>
-        </p:spPr>
-        <p:txBody>
-          <a:bodyPr wrap="square" anchor="t" lIns="0" rIns="0" tIns="0" bIns="0">
-            <a:spAutoFit/>
-          </a:bodyPr>
-          <a:lstStyle/>
-          <a:p>
-            <a:pPr algn="l" marL="164592" indent="-164592">
-              <a:lnSpc>
-                <a:spcPct val="115000"/>
-              </a:lnSpc>
-              <a:spcAft>
-                <a:spcPts val="700"/>
-              </a:spcAft>
-              <a:buClr>
-                <a:srgbClr val="3FD0B6"/>
-              </a:buClr>
-              <a:buFont typeface="Arial"/>
-              <a:buChar char="▪"/>
-            </a:pPr>
-            <a:r>
-              <a:rPr sz="1100" b="0" i="0">
-                <a:solidFill>
-                  <a:srgbClr val="CADCFC"/>
-                </a:solidFill>
-                <a:latin typeface="Microsoft JhengHei"/>
-                <a:ea typeface="Microsoft JhengHei"/>
-              </a:rPr>
-              <a:t>README.md — 使用說明與驗證流程</a:t>
-            </a:r>
-          </a:p>
-          <a:p>
-            <a:pPr algn="l" marL="164592" indent="-164592">
-              <a:lnSpc>
-                <a:spcPct val="115000"/>
-              </a:lnSpc>
-              <a:spcAft>
-                <a:spcPts val="700"/>
-              </a:spcAft>
-              <a:buClr>
-                <a:srgbClr val="3FD0B6"/>
-              </a:buClr>
-              <a:buFont typeface="Arial"/>
-              <a:buChar char="▪"/>
-            </a:pPr>
-            <a:r>
-              <a:rPr sz="1100" b="0" i="0">
-                <a:solidFill>
-                  <a:srgbClr val="CADCFC"/>
-                </a:solidFill>
-                <a:latin typeface="Microsoft JhengHei"/>
-                <a:ea typeface="Microsoft JhengHei"/>
-              </a:rPr>
-              <a:t>c_engine/docs/architecture.md — 系統架構與資料流</a:t>
-            </a:r>
-          </a:p>
-          <a:p>
-            <a:pPr algn="l" marL="164592" indent="-164592">
-              <a:lnSpc>
-                <a:spcPct val="115000"/>
-              </a:lnSpc>
-              <a:spcAft>
-                <a:spcPts val="700"/>
-              </a:spcAft>
-              <a:buClr>
-                <a:srgbClr val="3FD0B6"/>
-              </a:buClr>
-              <a:buFont typeface="Arial"/>
-              <a:buChar char="▪"/>
-            </a:pPr>
-            <a:r>
-              <a:rPr sz="1100" b="0" i="0">
-                <a:solidFill>
-                  <a:srgbClr val="CADCFC"/>
-                </a:solidFill>
-                <a:latin typeface="Microsoft JhengHei"/>
-                <a:ea typeface="Microsoft JhengHei"/>
-              </a:rPr>
-              <a:t>test-report.md — Session 1–6 累計測試報告</a:t>
-            </a:r>
-          </a:p>
-        </p:txBody>
-      </p:sp>
-      <p:sp>
-        <p:nvSpPr>
-          <p:cNvPr id="17" name="Rectangle 16"/>
-          <p:cNvSpPr/>
-          <p:nvPr/>
-        </p:nvSpPr>
-        <p:spPr>
-          <a:xfrm>
-            <a:off x="822960" y="5961888"/>
-            <a:ext cx="10543032" cy="0"/>
-          </a:xfrm>
-          <a:prstGeom prst="rect">
-            <a:avLst/>
-          </a:prstGeom>
-          <a:noFill/>
-          <a:ln>
-            <a:noFill/>
-          </a:ln>
-          <a:effectLst/>
-        </p:spPr>
-        <p:style>
-          <a:lnRef idx="1">
-            <a:schemeClr val="accent1"/>
-          </a:lnRef>
-          <a:fillRef idx="3">
-            <a:schemeClr val="accent1"/>
-          </a:fillRef>
-          <a:effectRef idx="2">
-            <a:schemeClr val="accent1"/>
-          </a:effectRef>
-          <a:fontRef idx="minor">
-            <a:schemeClr val="lt1"/>
-          </a:fontRef>
-        </p:style>
-        <p:txBody>
-          <a:bodyPr rtlCol="0" anchor="ctr"/>
-          <a:lstStyle/>
-          <a:p>
-            <a:pPr algn="ctr"/>
-          </a:p>
-        </p:txBody>
-      </p:sp>
-      <p:sp>
-        <p:nvSpPr>
-          <p:cNvPr id="18" name="TextBox 17"/>
-          <p:cNvSpPr txBox="1"/>
-          <p:nvPr/>
-        </p:nvSpPr>
-        <p:spPr>
-          <a:xfrm>
-            <a:off x="822960" y="6035040"/>
-            <a:ext cx="10515600" cy="365760"/>
-          </a:xfrm>
-          <a:prstGeom prst="rect">
-            <a:avLst/>
-          </a:prstGeom>
-          <a:noFill/>
-        </p:spPr>
-        <p:txBody>
-          <a:bodyPr wrap="square" anchor="t" lIns="0" rIns="0" tIns="0" bIns="0">
-            <a:spAutoFit/>
-          </a:bodyPr>
-          <a:lstStyle/>
-          <a:p>
-            <a:pPr algn="l"/>
-            <a:r>
-              <a:rPr sz="1200" b="0" i="0">
-                <a:solidFill>
-                  <a:srgbClr val="7E93A8"/>
+            <a:pPr algn="r"/>
+            <a:r>
+              <a:rPr sz="900" b="0" i="0">
+                <a:solidFill>
+                  <a:srgbClr val="5F6E7D"/>
                 </a:solidFill>
                 <a:latin typeface="Consolas"/>
                 <a:ea typeface="Microsoft JhengHei"/>
               </a:rPr>
-              <a:t>Thank You — 謝謝聆聽   |   Demo：2026.06.18 – 06.20   |   b11402037 高恩在 · b11402053 林秉學</a:t>
-            </a:r>
-          </a:p>
-        </p:txBody>
-      </p:sp>
-      <p:sp>
-        <p:nvSpPr>
-          <p:cNvPr id="19" name="TextBox 18"/>
-          <p:cNvSpPr txBox="1"/>
-          <p:nvPr/>
-        </p:nvSpPr>
-        <p:spPr>
-          <a:xfrm>
-            <a:off x="640080" y="6473952"/>
-            <a:ext cx="7315200" cy="274320"/>
-          </a:xfrm>
-          <a:prstGeom prst="rect">
-            <a:avLst/>
-          </a:prstGeom>
-          <a:noFill/>
-        </p:spPr>
-        <p:txBody>
-          <a:bodyPr wrap="square" anchor="t" lIns="0" rIns="0" tIns="0" bIns="0">
-            <a:spAutoFit/>
-          </a:bodyPr>
-          <a:lstStyle/>
-          <a:p>
-            <a:pPr algn="l"/>
-            <a:r>
-              <a:rPr sz="900" b="0" i="0">
-                <a:solidFill>
-                  <a:srgbClr val="CADCFC"/>
-                </a:solidFill>
-                <a:latin typeface="Consolas"/>
-                <a:ea typeface="Microsoft JhengHei"/>
-              </a:rPr>
-              <a:t>Clawer C Data Normalization Engine — b11402037 · b11402053</a:t>
-            </a:r>
-          </a:p>
-        </p:txBody>
-      </p:sp>
-      <p:sp>
-        <p:nvSpPr>
-          <p:cNvPr id="20" name="TextBox 19"/>
-          <p:cNvSpPr txBox="1"/>
-          <p:nvPr/>
-        </p:nvSpPr>
-        <p:spPr>
-          <a:xfrm>
-            <a:off x="10607040" y="6473952"/>
-            <a:ext cx="941832" cy="274320"/>
-          </a:xfrm>
-          <a:prstGeom prst="rect">
-            <a:avLst/>
-          </a:prstGeom>
-          <a:noFill/>
-        </p:spPr>
-        <p:txBody>
-          <a:bodyPr wrap="square" anchor="t" lIns="0" rIns="0" tIns="0" bIns="0">
-            <a:spAutoFit/>
-          </a:bodyPr>
-          <a:lstStyle/>
-          <a:p>
-            <a:pPr algn="r"/>
-            <a:r>
-              <a:rPr sz="900" b="0" i="0">
-                <a:solidFill>
-                  <a:srgbClr val="CADCFC"/>
-                </a:solidFill>
-                <a:latin typeface="Consolas"/>
-                <a:ea typeface="Microsoft JhengHei"/>
-              </a:rPr>
-              <a:t>9 / 9</a:t>
+              <a:t>9 / 10</a:t>
             </a:r>
           </a:p>
         </p:txBody>
